--- a/Reports_Presentations/CMP682-DorukTopcu-AlihanSagoz-Final-Project-Presentation_v2.pptx
+++ b/Reports_Presentations/CMP682-DorukTopcu-AlihanSagoz-Final-Project-Presentation_v2.pptx
@@ -4,33 +4,36 @@
   <p:sldMasterIdLst>
     <p:sldMasterId id="2147483648" r:id="rId1"/>
   </p:sldMasterIdLst>
+  <p:notesMasterIdLst>
+    <p:notesMasterId r:id="rId26"/>
+  </p:notesMasterIdLst>
   <p:sldIdLst>
-    <p:sldId id="256" r:id="rId7"/>
-    <p:sldId id="257" r:id="rId8"/>
-    <p:sldId id="258" r:id="rId9"/>
-    <p:sldId id="259" r:id="rId10"/>
-    <p:sldId id="260" r:id="rId11"/>
-    <p:sldId id="261" r:id="rId12"/>
-    <p:sldId id="262" r:id="rId13"/>
-    <p:sldId id="263" r:id="rId14"/>
-    <p:sldId id="264" r:id="rId15"/>
-    <p:sldId id="265" r:id="rId16"/>
-    <p:sldId id="266" r:id="rId17"/>
-    <p:sldId id="267" r:id="rId18"/>
-    <p:sldId id="268" r:id="rId19"/>
-    <p:sldId id="269" r:id="rId20"/>
-    <p:sldId id="270" r:id="rId21"/>
-    <p:sldId id="271" r:id="rId22"/>
-    <p:sldId id="272" r:id="rId23"/>
-    <p:sldId id="273" r:id="rId24"/>
-    <p:sldId id="274" r:id="rId25"/>
-    <p:sldId id="275" r:id="rId26"/>
-    <p:sldId id="276" r:id="rId27"/>
-    <p:sldId id="277" r:id="rId28"/>
-    <p:sldId id="278" r:id="rId29"/>
-    <p:sldId id="279" r:id="rId30"/>
+    <p:sldId id="256" r:id="rId2"/>
+    <p:sldId id="257" r:id="rId3"/>
+    <p:sldId id="258" r:id="rId4"/>
+    <p:sldId id="259" r:id="rId5"/>
+    <p:sldId id="260" r:id="rId6"/>
+    <p:sldId id="261" r:id="rId7"/>
+    <p:sldId id="262" r:id="rId8"/>
+    <p:sldId id="263" r:id="rId9"/>
+    <p:sldId id="264" r:id="rId10"/>
+    <p:sldId id="265" r:id="rId11"/>
+    <p:sldId id="266" r:id="rId12"/>
+    <p:sldId id="267" r:id="rId13"/>
+    <p:sldId id="268" r:id="rId14"/>
+    <p:sldId id="269" r:id="rId15"/>
+    <p:sldId id="270" r:id="rId16"/>
+    <p:sldId id="271" r:id="rId17"/>
+    <p:sldId id="272" r:id="rId18"/>
+    <p:sldId id="273" r:id="rId19"/>
+    <p:sldId id="274" r:id="rId20"/>
+    <p:sldId id="275" r:id="rId21"/>
+    <p:sldId id="276" r:id="rId22"/>
+    <p:sldId id="277" r:id="rId23"/>
+    <p:sldId id="278" r:id="rId24"/>
+    <p:sldId id="279" r:id="rId25"/>
   </p:sldIdLst>
-  <p:sldSz cx="12191695" cy="6858000" type="screen4x3"/>
+  <p:sldSz cx="12192000" cy="6858000"/>
   <p:notesSz cx="6858000" cy="9144000"/>
   <p:defaultTextStyle>
     <a:defPPr>
@@ -127,18 +130,49 @@
       </a:defRPr>
     </a:lvl9pPr>
   </p:defaultTextStyle>
+  <p:extLst>
+    <p:ext uri="{EFAFB233-063F-42B5-8137-9DF3F51BA10A}">
+      <p15:sldGuideLst xmlns:p15="http://schemas.microsoft.com/office/powerpoint/2012/main">
+        <p15:guide id="1" orient="horz" pos="2160">
+          <p15:clr>
+            <a:srgbClr val="A4A3A4"/>
+          </p15:clr>
+        </p15:guide>
+        <p15:guide id="2" pos="2880">
+          <p15:clr>
+            <a:srgbClr val="A4A3A4"/>
+          </p15:clr>
+        </p15:guide>
+      </p15:sldGuideLst>
+    </p:ext>
+  </p:extLst>
 </p:presentation>
 </file>
 
 <file path=ppt/charts/chart1.xml><?xml version="1.0" encoding="utf-8"?>
-<c:chartSpace xmlns:c="http://schemas.openxmlformats.org/drawingml/2006/chart" xmlns:a="http://schemas.openxmlformats.org/drawingml/2006/main" xmlns:r="http://schemas.openxmlformats.org/officeDocument/2006/relationships">
+<c:chartSpace xmlns:c="http://schemas.openxmlformats.org/drawingml/2006/chart" xmlns:a="http://schemas.openxmlformats.org/drawingml/2006/main" xmlns:r="http://schemas.openxmlformats.org/officeDocument/2006/relationships" xmlns:c16r2="http://schemas.microsoft.com/office/drawing/2015/06/chart">
   <c:date1904 val="0"/>
+  <c:lang val="en-US"/>
+  <c:roundedCorners val="1"/>
+  <c:style val="2"/>
   <c:chart>
     <c:autoTitleDeleted val="1"/>
     <c:plotArea>
+      <c:layout>
+        <c:manualLayout>
+          <c:layoutTarget val="inner"/>
+          <c:xMode val="edge"/>
+          <c:yMode val="edge"/>
+          <c:x val="0.14009276732970363"/>
+          <c:y val="7.1684587813620068E-2"/>
+          <c:w val="0.83509377959986408"/>
+          <c:h val="0.82183346033358728"/>
+        </c:manualLayout>
+      </c:layout>
       <c:barChart>
         <c:barDir val="bar"/>
         <c:grouping val="clustered"/>
+        <c:varyColors val="1"/>
         <c:ser>
           <c:idx val="0"/>
           <c:order val="0"/>
@@ -163,6 +197,45 @@
               </a:solidFill>
             </a:ln>
           </c:spPr>
+          <c:invertIfNegative val="1"/>
+          <c:dLbls>
+            <c:numFmt formatCode="0.000" sourceLinked="0"/>
+            <c:spPr>
+              <a:noFill/>
+              <a:ln>
+                <a:noFill/>
+              </a:ln>
+              <a:effectLst/>
+            </c:spPr>
+            <c:txPr>
+              <a:bodyPr/>
+              <a:lstStyle/>
+              <a:p>
+                <a:pPr>
+                  <a:defRPr sz="1200">
+                    <a:solidFill>
+                      <a:srgbClr val="202020"/>
+                    </a:solidFill>
+                    <a:latin typeface="Calibri"/>
+                  </a:defRPr>
+                </a:pPr>
+                <a:endParaRPr lang="en-TR"/>
+              </a:p>
+            </c:txPr>
+            <c:dLblPos val="outEnd"/>
+            <c:showLegendKey val="0"/>
+            <c:showVal val="1"/>
+            <c:showCatName val="0"/>
+            <c:showSerName val="0"/>
+            <c:showPercent val="0"/>
+            <c:showBubbleSize val="0"/>
+            <c:showLeaderLines val="0"/>
+            <c:extLst>
+              <c:ext xmlns:c15="http://schemas.microsoft.com/office/drawing/2012/chart" uri="{CE6537A1-D6FC-4f65-9D91-7224C49458BB}">
+                <c15:showLeaderLines val="0"/>
+              </c:ext>
+            </c:extLst>
+          </c:dLbls>
           <c:cat>
             <c:strRef>
               <c:f>Sheet1!$A$2:$A$8</c:f>
@@ -199,46 +272,50 @@
                 <c:formatCode>General</c:formatCode>
                 <c:ptCount val="7"/>
                 <c:pt idx="0">
-                  <c:v>0.6597909745251019</c:v>
+                  <c:v>0.65979097452510194</c:v>
                 </c:pt>
                 <c:pt idx="1">
-                  <c:v>0.7003232293438628</c:v>
+                  <c:v>0.70032322934386282</c:v>
                 </c:pt>
                 <c:pt idx="2">
-                  <c:v>0.702199015949549</c:v>
+                  <c:v>0.70219901594954903</c:v>
                 </c:pt>
                 <c:pt idx="3">
-                  <c:v>0.7182084960604684</c:v>
+                  <c:v>0.71820849606046844</c:v>
                 </c:pt>
                 <c:pt idx="4">
-                  <c:v>0.7514090067859782</c:v>
+                  <c:v>0.75140900678597822</c:v>
                 </c:pt>
                 <c:pt idx="5">
-                  <c:v>0.754933552727006</c:v>
+                  <c:v>0.75493355272700602</c:v>
                 </c:pt>
                 <c:pt idx="6">
-                  <c:v>0.7950392616951822</c:v>
+                  <c:v>0.79503926169518224</c:v>
                 </c:pt>
               </c:numCache>
             </c:numRef>
           </c:val>
+          <c:extLst>
+            <c:ext xmlns:c14="http://schemas.microsoft.com/office/drawing/2007/8/2/chart" uri="{6F2FDCE9-48DA-4B69-8628-5D25D57E5C99}">
+              <c14:invertSolidFillFmt>
+                <c14:spPr xmlns:c14="http://schemas.microsoft.com/office/drawing/2007/8/2/chart">
+                  <a:solidFill>
+                    <a:srgbClr val="FFFFFF"/>
+                  </a:solidFill>
+                  <a:ln w="9525">
+                    <a:solidFill>
+                      <a:srgbClr val="202020"/>
+                    </a:solidFill>
+                  </a:ln>
+                </c14:spPr>
+              </c14:invertSolidFillFmt>
+            </c:ext>
+            <c:ext xmlns:c16="http://schemas.microsoft.com/office/drawing/2014/chart" uri="{C3380CC4-5D6E-409C-BE32-E72D297353CC}">
+              <c16:uniqueId val="{00000000-ABCF-D64D-A2B4-1D26D0C0E5C6}"/>
+            </c:ext>
+          </c:extLst>
         </c:ser>
         <c:dLbls>
-          <c:numFmt formatCode="0.000" sourceLinked="0"/>
-          <c:txPr>
-            <a:bodyPr/>
-            <a:lstStyle/>
-            <a:p>
-              <a:pPr>
-                <a:defRPr sz="1200">
-                  <a:solidFill>
-                    <a:srgbClr val="202020"/>
-                  </a:solidFill>
-                  <a:latin typeface="Calibri"/>
-                </a:defRPr>
-              </a:pPr>
-            </a:p>
-          </c:txPr>
           <c:dLblPos val="outEnd"/>
           <c:showLegendKey val="0"/>
           <c:showVal val="1"/>
@@ -246,8 +323,8 @@
           <c:showSerName val="0"/>
           <c:showPercent val="0"/>
           <c:showBubbleSize val="0"/>
-          <c:showLeaderLines val="1"/>
         </c:dLbls>
+        <c:gapWidth val="150"/>
         <c:axId val="-2068027336"/>
         <c:axId val="-2113994440"/>
       </c:barChart>
@@ -265,6 +342,7 @@
             </a:ln>
           </c:spPr>
         </c:majorGridlines>
+        <c:numFmt formatCode="General" sourceLinked="0"/>
         <c:majorTickMark val="out"/>
         <c:minorTickMark val="none"/>
         <c:tickLblPos val="nextTo"/>
@@ -287,6 +365,7 @@
                 <a:latin typeface="Calibri"/>
               </a:defRPr>
             </a:pPr>
+            <a:endParaRPr lang="en-TR"/>
           </a:p>
         </c:txPr>
         <c:crossAx val="-2113994440"/>
@@ -299,12 +378,14 @@
       <c:valAx>
         <c:axId val="-2113994440"/>
         <c:scaling>
+          <c:orientation val="minMax"/>
           <c:max val="0.85"/>
           <c:min val="0.5"/>
         </c:scaling>
         <c:delete val="0"/>
         <c:axPos val="b"/>
         <c:majorGridlines/>
+        <c:numFmt formatCode="General" sourceLinked="1"/>
         <c:majorTickMark val="out"/>
         <c:minorTickMark val="none"/>
         <c:tickLblPos val="nextTo"/>
@@ -327,13 +408,17 @@
                 <a:latin typeface="Calibri"/>
               </a:defRPr>
             </a:pPr>
+            <a:endParaRPr lang="en-TR"/>
           </a:p>
         </c:txPr>
         <c:crossAx val="-2068027336"/>
         <c:crosses val="autoZero"/>
+        <c:crossBetween val="between"/>
       </c:valAx>
     </c:plotArea>
+    <c:plotVisOnly val="1"/>
     <c:dispBlanksAs val="gap"/>
+    <c:showDLblsOverMax val="1"/>
   </c:chart>
   <c:txPr>
     <a:bodyPr/>
@@ -352,14 +437,19 @@
 </file>
 
 <file path=ppt/charts/chart2.xml><?xml version="1.0" encoding="utf-8"?>
-<c:chartSpace xmlns:c="http://schemas.openxmlformats.org/drawingml/2006/chart" xmlns:a="http://schemas.openxmlformats.org/drawingml/2006/main" xmlns:r="http://schemas.openxmlformats.org/officeDocument/2006/relationships">
+<c:chartSpace xmlns:c="http://schemas.openxmlformats.org/drawingml/2006/chart" xmlns:a="http://schemas.openxmlformats.org/drawingml/2006/main" xmlns:r="http://schemas.openxmlformats.org/officeDocument/2006/relationships" xmlns:c16r2="http://schemas.microsoft.com/office/drawing/2015/06/chart">
   <c:date1904 val="0"/>
+  <c:lang val="en-US"/>
+  <c:roundedCorners val="1"/>
+  <c:style val="2"/>
   <c:chart>
     <c:autoTitleDeleted val="1"/>
     <c:plotArea>
+      <c:layout/>
       <c:barChart>
         <c:barDir val="bar"/>
         <c:grouping val="clustered"/>
+        <c:varyColors val="1"/>
         <c:ser>
           <c:idx val="0"/>
           <c:order val="0"/>
@@ -384,6 +474,45 @@
               </a:solidFill>
             </a:ln>
           </c:spPr>
+          <c:invertIfNegative val="1"/>
+          <c:dLbls>
+            <c:numFmt formatCode="0.000" sourceLinked="0"/>
+            <c:spPr>
+              <a:noFill/>
+              <a:ln>
+                <a:noFill/>
+              </a:ln>
+              <a:effectLst/>
+            </c:spPr>
+            <c:txPr>
+              <a:bodyPr/>
+              <a:lstStyle/>
+              <a:p>
+                <a:pPr>
+                  <a:defRPr sz="1100">
+                    <a:solidFill>
+                      <a:srgbClr val="202020"/>
+                    </a:solidFill>
+                    <a:latin typeface="Calibri"/>
+                  </a:defRPr>
+                </a:pPr>
+                <a:endParaRPr lang="en-TR"/>
+              </a:p>
+            </c:txPr>
+            <c:dLblPos val="outEnd"/>
+            <c:showLegendKey val="0"/>
+            <c:showVal val="1"/>
+            <c:showCatName val="0"/>
+            <c:showSerName val="0"/>
+            <c:showPercent val="0"/>
+            <c:showBubbleSize val="0"/>
+            <c:showLeaderLines val="0"/>
+            <c:extLst>
+              <c:ext xmlns:c15="http://schemas.microsoft.com/office/drawing/2012/chart" uri="{CE6537A1-D6FC-4f65-9D91-7224C49458BB}">
+                <c15:showLeaderLines val="0"/>
+              </c:ext>
+            </c:extLst>
+          </c:dLbls>
           <c:cat>
             <c:strRef>
               <c:f>Sheet1!$A$2:$A$8</c:f>
@@ -420,46 +549,50 @@
                 <c:formatCode>General</c:formatCode>
                 <c:ptCount val="7"/>
                 <c:pt idx="0">
-                  <c:v>0.9652556162598284</c:v>
+                  <c:v>0.96525561625982836</c:v>
                 </c:pt>
                 <c:pt idx="1">
-                  <c:v>0.9796544854838184</c:v>
+                  <c:v>0.97965448548381839</c:v>
                 </c:pt>
                 <c:pt idx="2">
                   <c:v>0.9801116880572156</c:v>
                 </c:pt>
                 <c:pt idx="3">
-                  <c:v>0.9821710923109525</c:v>
+                  <c:v>0.98217109231095245</c:v>
                 </c:pt>
                 <c:pt idx="4">
                   <c:v>0.9846853942417082</c:v>
                 </c:pt>
                 <c:pt idx="5">
-                  <c:v>0.9867423522050486</c:v>
+                  <c:v>0.98674235220504858</c:v>
                 </c:pt>
                 <c:pt idx="6">
-                  <c:v>0.9871998495329252</c:v>
+                  <c:v>0.98719984953292517</c:v>
                 </c:pt>
               </c:numCache>
             </c:numRef>
           </c:val>
+          <c:extLst>
+            <c:ext xmlns:c14="http://schemas.microsoft.com/office/drawing/2007/8/2/chart" uri="{6F2FDCE9-48DA-4B69-8628-5D25D57E5C99}">
+              <c14:invertSolidFillFmt>
+                <c14:spPr xmlns:c14="http://schemas.microsoft.com/office/drawing/2007/8/2/chart">
+                  <a:solidFill>
+                    <a:srgbClr val="FFFFFF"/>
+                  </a:solidFill>
+                  <a:ln w="9525">
+                    <a:solidFill>
+                      <a:srgbClr val="202020"/>
+                    </a:solidFill>
+                  </a:ln>
+                </c14:spPr>
+              </c14:invertSolidFillFmt>
+            </c:ext>
+            <c:ext xmlns:c16="http://schemas.microsoft.com/office/drawing/2014/chart" uri="{C3380CC4-5D6E-409C-BE32-E72D297353CC}">
+              <c16:uniqueId val="{00000000-C97C-D147-9955-AE7A7EA0D81D}"/>
+            </c:ext>
+          </c:extLst>
         </c:ser>
         <c:dLbls>
-          <c:numFmt formatCode="0.000" sourceLinked="0"/>
-          <c:txPr>
-            <a:bodyPr/>
-            <a:lstStyle/>
-            <a:p>
-              <a:pPr>
-                <a:defRPr sz="1100">
-                  <a:solidFill>
-                    <a:srgbClr val="202020"/>
-                  </a:solidFill>
-                  <a:latin typeface="Calibri"/>
-                </a:defRPr>
-              </a:pPr>
-            </a:p>
-          </c:txPr>
           <c:dLblPos val="outEnd"/>
           <c:showLegendKey val="0"/>
           <c:showVal val="1"/>
@@ -467,8 +600,8 @@
           <c:showSerName val="0"/>
           <c:showPercent val="0"/>
           <c:showBubbleSize val="0"/>
-          <c:showLeaderLines val="1"/>
         </c:dLbls>
+        <c:gapWidth val="150"/>
         <c:axId val="-2068027336"/>
         <c:axId val="-2113994440"/>
       </c:barChart>
@@ -486,6 +619,7 @@
             </a:ln>
           </c:spPr>
         </c:majorGridlines>
+        <c:numFmt formatCode="General" sourceLinked="0"/>
         <c:majorTickMark val="out"/>
         <c:minorTickMark val="none"/>
         <c:tickLblPos val="nextTo"/>
@@ -508,6 +642,7 @@
                 <a:latin typeface="Calibri"/>
               </a:defRPr>
             </a:pPr>
+            <a:endParaRPr lang="en-TR"/>
           </a:p>
         </c:txPr>
         <c:crossAx val="-2113994440"/>
@@ -520,12 +655,14 @@
       <c:valAx>
         <c:axId val="-2113994440"/>
         <c:scaling>
-          <c:max val="1.0"/>
+          <c:orientation val="minMax"/>
+          <c:max val="1"/>
           <c:min val="0.88"/>
         </c:scaling>
         <c:delete val="0"/>
         <c:axPos val="b"/>
         <c:majorGridlines/>
+        <c:numFmt formatCode="General" sourceLinked="1"/>
         <c:majorTickMark val="out"/>
         <c:minorTickMark val="none"/>
         <c:tickLblPos val="nextTo"/>
@@ -548,13 +685,17 @@
                 <a:latin typeface="Calibri"/>
               </a:defRPr>
             </a:pPr>
+            <a:endParaRPr lang="en-TR"/>
           </a:p>
         </c:txPr>
         <c:crossAx val="-2068027336"/>
         <c:crosses val="autoZero"/>
+        <c:crossBetween val="between"/>
       </c:valAx>
     </c:plotArea>
+    <c:plotVisOnly val="1"/>
     <c:dispBlanksAs val="gap"/>
+    <c:showDLblsOverMax val="1"/>
   </c:chart>
   <c:txPr>
     <a:bodyPr/>
@@ -573,14 +714,19 @@
 </file>
 
 <file path=ppt/charts/chart3.xml><?xml version="1.0" encoding="utf-8"?>
-<c:chartSpace xmlns:c="http://schemas.openxmlformats.org/drawingml/2006/chart" xmlns:a="http://schemas.openxmlformats.org/drawingml/2006/main" xmlns:r="http://schemas.openxmlformats.org/officeDocument/2006/relationships">
+<c:chartSpace xmlns:c="http://schemas.openxmlformats.org/drawingml/2006/chart" xmlns:a="http://schemas.openxmlformats.org/drawingml/2006/main" xmlns:r="http://schemas.openxmlformats.org/officeDocument/2006/relationships" xmlns:c16r2="http://schemas.microsoft.com/office/drawing/2015/06/chart">
   <c:date1904 val="0"/>
+  <c:lang val="en-US"/>
+  <c:roundedCorners val="1"/>
+  <c:style val="2"/>
   <c:chart>
     <c:autoTitleDeleted val="1"/>
     <c:plotArea>
+      <c:layout/>
       <c:barChart>
         <c:barDir val="bar"/>
         <c:grouping val="clustered"/>
+        <c:varyColors val="1"/>
         <c:ser>
           <c:idx val="0"/>
           <c:order val="0"/>
@@ -605,6 +751,45 @@
               </a:solidFill>
             </a:ln>
           </c:spPr>
+          <c:invertIfNegative val="1"/>
+          <c:dLbls>
+            <c:numFmt formatCode="0.000" sourceLinked="0"/>
+            <c:spPr>
+              <a:noFill/>
+              <a:ln>
+                <a:noFill/>
+              </a:ln>
+              <a:effectLst/>
+            </c:spPr>
+            <c:txPr>
+              <a:bodyPr/>
+              <a:lstStyle/>
+              <a:p>
+                <a:pPr>
+                  <a:defRPr sz="1100">
+                    <a:solidFill>
+                      <a:srgbClr val="202020"/>
+                    </a:solidFill>
+                    <a:latin typeface="Calibri"/>
+                  </a:defRPr>
+                </a:pPr>
+                <a:endParaRPr lang="en-TR"/>
+              </a:p>
+            </c:txPr>
+            <c:dLblPos val="outEnd"/>
+            <c:showLegendKey val="0"/>
+            <c:showVal val="1"/>
+            <c:showCatName val="0"/>
+            <c:showSerName val="0"/>
+            <c:showPercent val="0"/>
+            <c:showBubbleSize val="0"/>
+            <c:showLeaderLines val="0"/>
+            <c:extLst>
+              <c:ext xmlns:c15="http://schemas.microsoft.com/office/drawing/2012/chart" uri="{CE6537A1-D6FC-4f65-9D91-7224C49458BB}">
+                <c15:showLeaderLines val="0"/>
+              </c:ext>
+            </c:extLst>
+          </c:dLbls>
           <c:cat>
             <c:strRef>
               <c:f>Sheet1!$A$2:$A$8</c:f>
@@ -641,46 +826,50 @@
                 <c:formatCode>General</c:formatCode>
                 <c:ptCount val="7"/>
                 <c:pt idx="0">
-                  <c:v>0.8272978965298098</c:v>
+                  <c:v>0.82729789652980978</c:v>
                 </c:pt>
                 <c:pt idx="1">
-                  <c:v>0.8454625440492118</c:v>
+                  <c:v>0.84546254404921184</c:v>
                 </c:pt>
                 <c:pt idx="2">
-                  <c:v>0.8476836131809696</c:v>
+                  <c:v>0.84768361318096963</c:v>
                 </c:pt>
                 <c:pt idx="3">
-                  <c:v>0.8579857232293113</c:v>
+                  <c:v>0.85798572322931133</c:v>
                 </c:pt>
                 <c:pt idx="4">
-                  <c:v>0.8762373178501358</c:v>
+                  <c:v>0.87623731785013581</c:v>
                 </c:pt>
                 <c:pt idx="5">
-                  <c:v>0.9043588161324086</c:v>
+                  <c:v>0.90435881613240865</c:v>
                 </c:pt>
                 <c:pt idx="6">
-                  <c:v>0.9459342485558792</c:v>
+                  <c:v>0.94593424855587915</c:v>
                 </c:pt>
               </c:numCache>
             </c:numRef>
           </c:val>
+          <c:extLst>
+            <c:ext xmlns:c14="http://schemas.microsoft.com/office/drawing/2007/8/2/chart" uri="{6F2FDCE9-48DA-4B69-8628-5D25D57E5C99}">
+              <c14:invertSolidFillFmt>
+                <c14:spPr xmlns:c14="http://schemas.microsoft.com/office/drawing/2007/8/2/chart">
+                  <a:solidFill>
+                    <a:srgbClr val="FFFFFF"/>
+                  </a:solidFill>
+                  <a:ln w="9525">
+                    <a:solidFill>
+                      <a:srgbClr val="202020"/>
+                    </a:solidFill>
+                  </a:ln>
+                </c14:spPr>
+              </c14:invertSolidFillFmt>
+            </c:ext>
+            <c:ext xmlns:c16="http://schemas.microsoft.com/office/drawing/2014/chart" uri="{C3380CC4-5D6E-409C-BE32-E72D297353CC}">
+              <c16:uniqueId val="{00000000-9844-494B-8EAC-04CDF266130C}"/>
+            </c:ext>
+          </c:extLst>
         </c:ser>
         <c:dLbls>
-          <c:numFmt formatCode="0.000" sourceLinked="0"/>
-          <c:txPr>
-            <a:bodyPr/>
-            <a:lstStyle/>
-            <a:p>
-              <a:pPr>
-                <a:defRPr sz="1100">
-                  <a:solidFill>
-                    <a:srgbClr val="202020"/>
-                  </a:solidFill>
-                  <a:latin typeface="Calibri"/>
-                </a:defRPr>
-              </a:pPr>
-            </a:p>
-          </c:txPr>
           <c:dLblPos val="outEnd"/>
           <c:showLegendKey val="0"/>
           <c:showVal val="1"/>
@@ -688,8 +877,8 @@
           <c:showSerName val="0"/>
           <c:showPercent val="0"/>
           <c:showBubbleSize val="0"/>
-          <c:showLeaderLines val="1"/>
         </c:dLbls>
+        <c:gapWidth val="150"/>
         <c:axId val="-2068027336"/>
         <c:axId val="-2113994440"/>
       </c:barChart>
@@ -707,6 +896,7 @@
             </a:ln>
           </c:spPr>
         </c:majorGridlines>
+        <c:numFmt formatCode="General" sourceLinked="0"/>
         <c:majorTickMark val="out"/>
         <c:minorTickMark val="none"/>
         <c:tickLblPos val="nextTo"/>
@@ -729,6 +919,7 @@
                 <a:latin typeface="Calibri"/>
               </a:defRPr>
             </a:pPr>
+            <a:endParaRPr lang="en-TR"/>
           </a:p>
         </c:txPr>
         <c:crossAx val="-2113994440"/>
@@ -741,12 +932,14 @@
       <c:valAx>
         <c:axId val="-2113994440"/>
         <c:scaling>
-          <c:max val="1.0"/>
+          <c:orientation val="minMax"/>
+          <c:max val="1"/>
           <c:min val="0.6"/>
         </c:scaling>
         <c:delete val="0"/>
         <c:axPos val="b"/>
         <c:majorGridlines/>
+        <c:numFmt formatCode="General" sourceLinked="1"/>
         <c:majorTickMark val="out"/>
         <c:minorTickMark val="none"/>
         <c:tickLblPos val="nextTo"/>
@@ -769,13 +962,17 @@
                 <a:latin typeface="Calibri"/>
               </a:defRPr>
             </a:pPr>
+            <a:endParaRPr lang="en-TR"/>
           </a:p>
         </c:txPr>
         <c:crossAx val="-2068027336"/>
         <c:crosses val="autoZero"/>
+        <c:crossBetween val="between"/>
       </c:valAx>
     </c:plotArea>
+    <c:plotVisOnly val="1"/>
     <c:dispBlanksAs val="gap"/>
+    <c:showDLblsOverMax val="1"/>
   </c:chart>
   <c:txPr>
     <a:bodyPr/>
@@ -794,14 +991,19 @@
 </file>
 
 <file path=ppt/charts/chart4.xml><?xml version="1.0" encoding="utf-8"?>
-<c:chartSpace xmlns:c="http://schemas.openxmlformats.org/drawingml/2006/chart" xmlns:a="http://schemas.openxmlformats.org/drawingml/2006/main" xmlns:r="http://schemas.openxmlformats.org/officeDocument/2006/relationships">
+<c:chartSpace xmlns:c="http://schemas.openxmlformats.org/drawingml/2006/chart" xmlns:a="http://schemas.openxmlformats.org/drawingml/2006/main" xmlns:r="http://schemas.openxmlformats.org/officeDocument/2006/relationships" xmlns:c16r2="http://schemas.microsoft.com/office/drawing/2015/06/chart">
   <c:date1904 val="0"/>
+  <c:lang val="en-US"/>
+  <c:roundedCorners val="1"/>
+  <c:style val="2"/>
   <c:chart>
     <c:autoTitleDeleted val="1"/>
     <c:plotArea>
+      <c:layout/>
       <c:barChart>
         <c:barDir val="bar"/>
         <c:grouping val="clustered"/>
+        <c:varyColors val="1"/>
         <c:ser>
           <c:idx val="0"/>
           <c:order val="0"/>
@@ -826,6 +1028,45 @@
               </a:solidFill>
             </a:ln>
           </c:spPr>
+          <c:invertIfNegative val="1"/>
+          <c:dLbls>
+            <c:numFmt formatCode="0.000" sourceLinked="0"/>
+            <c:spPr>
+              <a:noFill/>
+              <a:ln>
+                <a:noFill/>
+              </a:ln>
+              <a:effectLst/>
+            </c:spPr>
+            <c:txPr>
+              <a:bodyPr/>
+              <a:lstStyle/>
+              <a:p>
+                <a:pPr>
+                  <a:defRPr sz="1100">
+                    <a:solidFill>
+                      <a:srgbClr val="202020"/>
+                    </a:solidFill>
+                    <a:latin typeface="Calibri"/>
+                  </a:defRPr>
+                </a:pPr>
+                <a:endParaRPr lang="en-TR"/>
+              </a:p>
+            </c:txPr>
+            <c:dLblPos val="outEnd"/>
+            <c:showLegendKey val="0"/>
+            <c:showVal val="1"/>
+            <c:showCatName val="0"/>
+            <c:showSerName val="0"/>
+            <c:showPercent val="0"/>
+            <c:showBubbleSize val="0"/>
+            <c:showLeaderLines val="0"/>
+            <c:extLst>
+              <c:ext xmlns:c15="http://schemas.microsoft.com/office/drawing/2012/chart" uri="{CE6537A1-D6FC-4f65-9D91-7224C49458BB}">
+                <c15:showLeaderLines val="0"/>
+              </c:ext>
+            </c:extLst>
+          </c:dLbls>
           <c:cat>
             <c:strRef>
               <c:f>Sheet1!$A$2:$A$8</c:f>
@@ -862,46 +1103,50 @@
                 <c:formatCode>General</c:formatCode>
                 <c:ptCount val="7"/>
                 <c:pt idx="0">
-                  <c:v>0.612348490793616</c:v>
+                  <c:v>0.61234849079361597</c:v>
                 </c:pt>
                 <c:pt idx="1">
-                  <c:v>0.6573712559773094</c:v>
+                  <c:v>0.65737125597730939</c:v>
                 </c:pt>
                 <c:pt idx="2">
-                  <c:v>0.6640918979978673</c:v>
+                  <c:v>0.66409189799786728</c:v>
                 </c:pt>
                 <c:pt idx="3">
-                  <c:v>0.6782762437007495</c:v>
+                  <c:v>0.67827624370074946</c:v>
                 </c:pt>
                 <c:pt idx="4">
-                  <c:v>0.7185925261309196</c:v>
+                  <c:v>0.71859252613091962</c:v>
                 </c:pt>
                 <c:pt idx="5">
-                  <c:v>0.7292430588439925</c:v>
+                  <c:v>0.72924305884399254</c:v>
                 </c:pt>
                 <c:pt idx="6">
-                  <c:v>0.7983976382448654</c:v>
+                  <c:v>0.79839763824486543</c:v>
                 </c:pt>
               </c:numCache>
             </c:numRef>
           </c:val>
+          <c:extLst>
+            <c:ext xmlns:c14="http://schemas.microsoft.com/office/drawing/2007/8/2/chart" uri="{6F2FDCE9-48DA-4B69-8628-5D25D57E5C99}">
+              <c14:invertSolidFillFmt>
+                <c14:spPr xmlns:c14="http://schemas.microsoft.com/office/drawing/2007/8/2/chart">
+                  <a:solidFill>
+                    <a:srgbClr val="FFFFFF"/>
+                  </a:solidFill>
+                  <a:ln w="9525">
+                    <a:solidFill>
+                      <a:srgbClr val="202020"/>
+                    </a:solidFill>
+                  </a:ln>
+                </c14:spPr>
+              </c14:invertSolidFillFmt>
+            </c:ext>
+            <c:ext xmlns:c16="http://schemas.microsoft.com/office/drawing/2014/chart" uri="{C3380CC4-5D6E-409C-BE32-E72D297353CC}">
+              <c16:uniqueId val="{00000000-4FC3-2544-8106-E3879C17189A}"/>
+            </c:ext>
+          </c:extLst>
         </c:ser>
         <c:dLbls>
-          <c:numFmt formatCode="0.000" sourceLinked="0"/>
-          <c:txPr>
-            <a:bodyPr/>
-            <a:lstStyle/>
-            <a:p>
-              <a:pPr>
-                <a:defRPr sz="1100">
-                  <a:solidFill>
-                    <a:srgbClr val="202020"/>
-                  </a:solidFill>
-                  <a:latin typeface="Calibri"/>
-                </a:defRPr>
-              </a:pPr>
-            </a:p>
-          </c:txPr>
           <c:dLblPos val="outEnd"/>
           <c:showLegendKey val="0"/>
           <c:showVal val="1"/>
@@ -909,8 +1154,8 @@
           <c:showSerName val="0"/>
           <c:showPercent val="0"/>
           <c:showBubbleSize val="0"/>
-          <c:showLeaderLines val="1"/>
         </c:dLbls>
+        <c:gapWidth val="150"/>
         <c:axId val="-2068027336"/>
         <c:axId val="-2113994440"/>
       </c:barChart>
@@ -928,6 +1173,7 @@
             </a:ln>
           </c:spPr>
         </c:majorGridlines>
+        <c:numFmt formatCode="General" sourceLinked="0"/>
         <c:majorTickMark val="out"/>
         <c:minorTickMark val="none"/>
         <c:tickLblPos val="nextTo"/>
@@ -950,6 +1196,7 @@
                 <a:latin typeface="Calibri"/>
               </a:defRPr>
             </a:pPr>
+            <a:endParaRPr lang="en-TR"/>
           </a:p>
         </c:txPr>
         <c:crossAx val="-2113994440"/>
@@ -962,12 +1209,14 @@
       <c:valAx>
         <c:axId val="-2113994440"/>
         <c:scaling>
+          <c:orientation val="minMax"/>
           <c:max val="0.85"/>
           <c:min val="0.45"/>
         </c:scaling>
         <c:delete val="0"/>
         <c:axPos val="b"/>
         <c:majorGridlines/>
+        <c:numFmt formatCode="General" sourceLinked="1"/>
         <c:majorTickMark val="out"/>
         <c:minorTickMark val="none"/>
         <c:tickLblPos val="nextTo"/>
@@ -990,13 +1239,17 @@
                 <a:latin typeface="Calibri"/>
               </a:defRPr>
             </a:pPr>
+            <a:endParaRPr lang="en-TR"/>
           </a:p>
         </c:txPr>
         <c:crossAx val="-2068027336"/>
         <c:crosses val="autoZero"/>
+        <c:crossBetween val="between"/>
       </c:valAx>
     </c:plotArea>
+    <c:plotVisOnly val="1"/>
     <c:dispBlanksAs val="gap"/>
+    <c:showDLblsOverMax val="1"/>
   </c:chart>
   <c:txPr>
     <a:bodyPr/>
@@ -1015,14 +1268,19 @@
 </file>
 
 <file path=ppt/charts/chart5.xml><?xml version="1.0" encoding="utf-8"?>
-<c:chartSpace xmlns:c="http://schemas.openxmlformats.org/drawingml/2006/chart" xmlns:a="http://schemas.openxmlformats.org/drawingml/2006/main" xmlns:r="http://schemas.openxmlformats.org/officeDocument/2006/relationships">
+<c:chartSpace xmlns:c="http://schemas.openxmlformats.org/drawingml/2006/chart" xmlns:a="http://schemas.openxmlformats.org/drawingml/2006/main" xmlns:r="http://schemas.openxmlformats.org/officeDocument/2006/relationships" xmlns:c16r2="http://schemas.microsoft.com/office/drawing/2015/06/chart">
   <c:date1904 val="0"/>
+  <c:lang val="en-US"/>
+  <c:roundedCorners val="1"/>
+  <c:style val="2"/>
   <c:chart>
     <c:autoTitleDeleted val="1"/>
     <c:plotArea>
+      <c:layout/>
       <c:barChart>
         <c:barDir val="col"/>
         <c:grouping val="clustered"/>
+        <c:varyColors val="1"/>
         <c:ser>
           <c:idx val="0"/>
           <c:order val="0"/>
@@ -1047,6 +1305,45 @@
               </a:solidFill>
             </a:ln>
           </c:spPr>
+          <c:invertIfNegative val="1"/>
+          <c:dLbls>
+            <c:numFmt formatCode="0.000" sourceLinked="0"/>
+            <c:spPr>
+              <a:noFill/>
+              <a:ln>
+                <a:noFill/>
+              </a:ln>
+              <a:effectLst/>
+            </c:spPr>
+            <c:txPr>
+              <a:bodyPr/>
+              <a:lstStyle/>
+              <a:p>
+                <a:pPr>
+                  <a:defRPr sz="1200">
+                    <a:solidFill>
+                      <a:srgbClr val="202020"/>
+                    </a:solidFill>
+                    <a:latin typeface="Calibri"/>
+                  </a:defRPr>
+                </a:pPr>
+                <a:endParaRPr lang="en-TR"/>
+              </a:p>
+            </c:txPr>
+            <c:dLblPos val="outEnd"/>
+            <c:showLegendKey val="0"/>
+            <c:showVal val="1"/>
+            <c:showCatName val="0"/>
+            <c:showSerName val="0"/>
+            <c:showPercent val="0"/>
+            <c:showBubbleSize val="0"/>
+            <c:showLeaderLines val="0"/>
+            <c:extLst>
+              <c:ext xmlns:c15="http://schemas.microsoft.com/office/drawing/2012/chart" uri="{CE6537A1-D6FC-4f65-9D91-7224C49458BB}">
+                <c15:showLeaderLines val="0"/>
+              </c:ext>
+            </c:extLst>
+          </c:dLbls>
           <c:cat>
             <c:strRef>
               <c:f>Sheet1!$A$2:$A$6</c:f>
@@ -1077,40 +1374,44 @@
                 <c:formatCode>General</c:formatCode>
                 <c:ptCount val="5"/>
                 <c:pt idx="0">
-                  <c:v>0.929</c:v>
+                  <c:v>0.92900000000000005</c:v>
                 </c:pt>
                 <c:pt idx="1">
-                  <c:v>0.894</c:v>
+                  <c:v>0.89400000000000002</c:v>
                 </c:pt>
                 <c:pt idx="2">
                   <c:v>0.622</c:v>
                 </c:pt>
                 <c:pt idx="3">
-                  <c:v>0.646</c:v>
+                  <c:v>0.64600000000000002</c:v>
                 </c:pt>
                 <c:pt idx="4">
-                  <c:v>0.901</c:v>
+                  <c:v>0.90100000000000002</c:v>
                 </c:pt>
               </c:numCache>
             </c:numRef>
           </c:val>
+          <c:extLst>
+            <c:ext xmlns:c14="http://schemas.microsoft.com/office/drawing/2007/8/2/chart" uri="{6F2FDCE9-48DA-4B69-8628-5D25D57E5C99}">
+              <c14:invertSolidFillFmt>
+                <c14:spPr xmlns:c14="http://schemas.microsoft.com/office/drawing/2007/8/2/chart">
+                  <a:solidFill>
+                    <a:srgbClr val="FFFFFF"/>
+                  </a:solidFill>
+                  <a:ln w="9525">
+                    <a:solidFill>
+                      <a:srgbClr val="202020"/>
+                    </a:solidFill>
+                  </a:ln>
+                </c14:spPr>
+              </c14:invertSolidFillFmt>
+            </c:ext>
+            <c:ext xmlns:c16="http://schemas.microsoft.com/office/drawing/2014/chart" uri="{C3380CC4-5D6E-409C-BE32-E72D297353CC}">
+              <c16:uniqueId val="{00000000-7E69-5A4F-B77C-2C435AB257AA}"/>
+            </c:ext>
+          </c:extLst>
         </c:ser>
         <c:dLbls>
-          <c:numFmt formatCode="0.000" sourceLinked="0"/>
-          <c:txPr>
-            <a:bodyPr/>
-            <a:lstStyle/>
-            <a:p>
-              <a:pPr>
-                <a:defRPr sz="1200">
-                  <a:solidFill>
-                    <a:srgbClr val="202020"/>
-                  </a:solidFill>
-                  <a:latin typeface="Calibri"/>
-                </a:defRPr>
-              </a:pPr>
-            </a:p>
-          </c:txPr>
           <c:dLblPos val="outEnd"/>
           <c:showLegendKey val="0"/>
           <c:showVal val="1"/>
@@ -1118,8 +1419,8 @@
           <c:showSerName val="0"/>
           <c:showPercent val="0"/>
           <c:showBubbleSize val="0"/>
-          <c:showLeaderLines val="1"/>
         </c:dLbls>
+        <c:gapWidth val="150"/>
         <c:axId val="-2068027336"/>
         <c:axId val="-2113994440"/>
       </c:barChart>
@@ -1137,6 +1438,7 @@
             </a:ln>
           </c:spPr>
         </c:majorGridlines>
+        <c:numFmt formatCode="General" sourceLinked="0"/>
         <c:majorTickMark val="out"/>
         <c:minorTickMark val="none"/>
         <c:tickLblPos val="nextTo"/>
@@ -1159,6 +1461,7 @@
                 <a:latin typeface="Calibri"/>
               </a:defRPr>
             </a:pPr>
+            <a:endParaRPr lang="en-TR"/>
           </a:p>
         </c:txPr>
         <c:crossAx val="-2113994440"/>
@@ -1171,12 +1474,14 @@
       <c:valAx>
         <c:axId val="-2113994440"/>
         <c:scaling>
-          <c:max val="1.0"/>
+          <c:orientation val="minMax"/>
+          <c:max val="1"/>
           <c:min val="0.5"/>
         </c:scaling>
         <c:delete val="0"/>
         <c:axPos val="l"/>
         <c:majorGridlines/>
+        <c:numFmt formatCode="General" sourceLinked="1"/>
         <c:majorTickMark val="out"/>
         <c:minorTickMark val="none"/>
         <c:tickLblPos val="nextTo"/>
@@ -1199,13 +1504,17 @@
                 <a:latin typeface="Calibri"/>
               </a:defRPr>
             </a:pPr>
+            <a:endParaRPr lang="en-TR"/>
           </a:p>
         </c:txPr>
         <c:crossAx val="-2068027336"/>
         <c:crosses val="autoZero"/>
+        <c:crossBetween val="between"/>
       </c:valAx>
     </c:plotArea>
+    <c:plotVisOnly val="1"/>
     <c:dispBlanksAs val="gap"/>
+    <c:showDLblsOverMax val="1"/>
   </c:chart>
   <c:txPr>
     <a:bodyPr/>
@@ -1224,14 +1533,19 @@
 </file>
 
 <file path=ppt/charts/chart6.xml><?xml version="1.0" encoding="utf-8"?>
-<c:chartSpace xmlns:c="http://schemas.openxmlformats.org/drawingml/2006/chart" xmlns:a="http://schemas.openxmlformats.org/drawingml/2006/main" xmlns:r="http://schemas.openxmlformats.org/officeDocument/2006/relationships">
+<c:chartSpace xmlns:c="http://schemas.openxmlformats.org/drawingml/2006/chart" xmlns:a="http://schemas.openxmlformats.org/drawingml/2006/main" xmlns:r="http://schemas.openxmlformats.org/officeDocument/2006/relationships" xmlns:c16r2="http://schemas.microsoft.com/office/drawing/2015/06/chart">
   <c:date1904 val="0"/>
+  <c:lang val="en-US"/>
+  <c:roundedCorners val="1"/>
+  <c:style val="2"/>
   <c:chart>
     <c:autoTitleDeleted val="1"/>
     <c:plotArea>
+      <c:layout/>
       <c:barChart>
         <c:barDir val="col"/>
         <c:grouping val="clustered"/>
+        <c:varyColors val="1"/>
         <c:ser>
           <c:idx val="0"/>
           <c:order val="0"/>
@@ -1256,6 +1570,45 @@
               </a:solidFill>
             </a:ln>
           </c:spPr>
+          <c:invertIfNegative val="1"/>
+          <c:dLbls>
+            <c:numFmt formatCode="0.000" sourceLinked="0"/>
+            <c:spPr>
+              <a:noFill/>
+              <a:ln>
+                <a:noFill/>
+              </a:ln>
+              <a:effectLst/>
+            </c:spPr>
+            <c:txPr>
+              <a:bodyPr/>
+              <a:lstStyle/>
+              <a:p>
+                <a:pPr>
+                  <a:defRPr sz="1100">
+                    <a:solidFill>
+                      <a:srgbClr val="404040"/>
+                    </a:solidFill>
+                    <a:latin typeface="Calibri"/>
+                  </a:defRPr>
+                </a:pPr>
+                <a:endParaRPr lang="en-TR"/>
+              </a:p>
+            </c:txPr>
+            <c:dLblPos val="outEnd"/>
+            <c:showLegendKey val="0"/>
+            <c:showVal val="1"/>
+            <c:showCatName val="0"/>
+            <c:showSerName val="0"/>
+            <c:showPercent val="0"/>
+            <c:showBubbleSize val="0"/>
+            <c:showLeaderLines val="0"/>
+            <c:extLst>
+              <c:ext xmlns:c15="http://schemas.microsoft.com/office/drawing/2012/chart" uri="{CE6537A1-D6FC-4f65-9D91-7224C49458BB}">
+                <c15:showLeaderLines val="0"/>
+              </c:ext>
+            </c:extLst>
+          </c:dLbls>
           <c:cat>
             <c:strRef>
               <c:f>Sheet1!$A$2:$A$5</c:f>
@@ -1283,13 +1636,13 @@
                 <c:formatCode>General</c:formatCode>
                 <c:ptCount val="4"/>
                 <c:pt idx="0">
-                  <c:v>0.9872</c:v>
+                  <c:v>0.98719999999999997</c:v>
                 </c:pt>
                 <c:pt idx="1">
-                  <c:v>0.9459</c:v>
+                  <c:v>0.94589999999999996</c:v>
                 </c:pt>
                 <c:pt idx="2">
-                  <c:v>0.795</c:v>
+                  <c:v>0.79500000000000004</c:v>
                 </c:pt>
                 <c:pt idx="3">
                   <c:v>0.7984</c:v>
@@ -1297,6 +1650,25 @@
               </c:numCache>
             </c:numRef>
           </c:val>
+          <c:extLst>
+            <c:ext xmlns:c14="http://schemas.microsoft.com/office/drawing/2007/8/2/chart" uri="{6F2FDCE9-48DA-4B69-8628-5D25D57E5C99}">
+              <c14:invertSolidFillFmt>
+                <c14:spPr xmlns:c14="http://schemas.microsoft.com/office/drawing/2007/8/2/chart">
+                  <a:solidFill>
+                    <a:srgbClr val="FFFFFF"/>
+                  </a:solidFill>
+                  <a:ln w="9525">
+                    <a:solidFill>
+                      <a:srgbClr val="202020"/>
+                    </a:solidFill>
+                  </a:ln>
+                </c14:spPr>
+              </c14:invertSolidFillFmt>
+            </c:ext>
+            <c:ext xmlns:c16="http://schemas.microsoft.com/office/drawing/2014/chart" uri="{C3380CC4-5D6E-409C-BE32-E72D297353CC}">
+              <c16:uniqueId val="{00000000-5EA7-B64F-8651-9FAE35B419F6}"/>
+            </c:ext>
+          </c:extLst>
         </c:ser>
         <c:ser>
           <c:idx val="1"/>
@@ -1322,6 +1694,45 @@
               </a:solidFill>
             </a:ln>
           </c:spPr>
+          <c:invertIfNegative val="1"/>
+          <c:dLbls>
+            <c:numFmt formatCode="0.000" sourceLinked="0"/>
+            <c:spPr>
+              <a:noFill/>
+              <a:ln>
+                <a:noFill/>
+              </a:ln>
+              <a:effectLst/>
+            </c:spPr>
+            <c:txPr>
+              <a:bodyPr/>
+              <a:lstStyle/>
+              <a:p>
+                <a:pPr>
+                  <a:defRPr sz="1100">
+                    <a:solidFill>
+                      <a:srgbClr val="404040"/>
+                    </a:solidFill>
+                    <a:latin typeface="Calibri"/>
+                  </a:defRPr>
+                </a:pPr>
+                <a:endParaRPr lang="en-TR"/>
+              </a:p>
+            </c:txPr>
+            <c:dLblPos val="outEnd"/>
+            <c:showLegendKey val="0"/>
+            <c:showVal val="1"/>
+            <c:showCatName val="0"/>
+            <c:showSerName val="0"/>
+            <c:showPercent val="0"/>
+            <c:showBubbleSize val="0"/>
+            <c:showLeaderLines val="0"/>
+            <c:extLst>
+              <c:ext xmlns:c15="http://schemas.microsoft.com/office/drawing/2012/chart" uri="{CE6537A1-D6FC-4f65-9D91-7224C49458BB}">
+                <c15:showLeaderLines val="0"/>
+              </c:ext>
+            </c:extLst>
+          </c:dLbls>
           <c:cat>
             <c:strRef>
               <c:f>Sheet1!$A$2:$A$5</c:f>
@@ -1349,37 +1760,41 @@
                 <c:formatCode>General</c:formatCode>
                 <c:ptCount val="4"/>
                 <c:pt idx="0">
-                  <c:v>0.9863</c:v>
+                  <c:v>0.98629999999999995</c:v>
                 </c:pt>
                 <c:pt idx="1">
-                  <c:v>0.9386</c:v>
+                  <c:v>0.93859999999999999</c:v>
                 </c:pt>
                 <c:pt idx="2">
                   <c:v>0.79</c:v>
                 </c:pt>
                 <c:pt idx="3">
-                  <c:v>0.7867</c:v>
+                  <c:v>0.78669999999999995</c:v>
                 </c:pt>
               </c:numCache>
             </c:numRef>
           </c:val>
+          <c:extLst>
+            <c:ext xmlns:c14="http://schemas.microsoft.com/office/drawing/2007/8/2/chart" uri="{6F2FDCE9-48DA-4B69-8628-5D25D57E5C99}">
+              <c14:invertSolidFillFmt>
+                <c14:spPr xmlns:c14="http://schemas.microsoft.com/office/drawing/2007/8/2/chart">
+                  <a:solidFill>
+                    <a:srgbClr val="FFFFFF"/>
+                  </a:solidFill>
+                  <a:ln w="9525">
+                    <a:solidFill>
+                      <a:srgbClr val="202020"/>
+                    </a:solidFill>
+                  </a:ln>
+                </c14:spPr>
+              </c14:invertSolidFillFmt>
+            </c:ext>
+            <c:ext xmlns:c16="http://schemas.microsoft.com/office/drawing/2014/chart" uri="{C3380CC4-5D6E-409C-BE32-E72D297353CC}">
+              <c16:uniqueId val="{00000001-5EA7-B64F-8651-9FAE35B419F6}"/>
+            </c:ext>
+          </c:extLst>
         </c:ser>
         <c:dLbls>
-          <c:numFmt formatCode="0.000" sourceLinked="0"/>
-          <c:txPr>
-            <a:bodyPr/>
-            <a:lstStyle/>
-            <a:p>
-              <a:pPr>
-                <a:defRPr sz="1100">
-                  <a:solidFill>
-                    <a:srgbClr val="404040"/>
-                  </a:solidFill>
-                  <a:latin typeface="Calibri"/>
-                </a:defRPr>
-              </a:pPr>
-            </a:p>
-          </c:txPr>
           <c:dLblPos val="outEnd"/>
           <c:showLegendKey val="0"/>
           <c:showVal val="1"/>
@@ -1387,8 +1802,8 @@
           <c:showSerName val="0"/>
           <c:showPercent val="0"/>
           <c:showBubbleSize val="0"/>
-          <c:showLeaderLines val="1"/>
         </c:dLbls>
+        <c:gapWidth val="150"/>
         <c:axId val="-2068027336"/>
         <c:axId val="-2113994440"/>
       </c:barChart>
@@ -1399,6 +1814,7 @@
         </c:scaling>
         <c:delete val="0"/>
         <c:axPos val="b"/>
+        <c:numFmt formatCode="General" sourceLinked="0"/>
         <c:majorTickMark val="out"/>
         <c:minorTickMark val="none"/>
         <c:tickLblPos val="nextTo"/>
@@ -1421,6 +1837,7 @@
                 <a:latin typeface="Calibri"/>
               </a:defRPr>
             </a:pPr>
+            <a:endParaRPr lang="en-TR"/>
           </a:p>
         </c:txPr>
         <c:crossAx val="-2113994440"/>
@@ -1433,12 +1850,14 @@
       <c:valAx>
         <c:axId val="-2113994440"/>
         <c:scaling>
+          <c:orientation val="minMax"/>
           <c:max val="1.05"/>
           <c:min val="0.5"/>
         </c:scaling>
         <c:delete val="0"/>
         <c:axPos val="l"/>
         <c:majorGridlines/>
+        <c:numFmt formatCode="General" sourceLinked="1"/>
         <c:majorTickMark val="out"/>
         <c:minorTickMark val="none"/>
         <c:tickLblPos val="nextTo"/>
@@ -1461,10 +1880,12 @@
                 <a:latin typeface="Calibri"/>
               </a:defRPr>
             </a:pPr>
+            <a:endParaRPr lang="en-TR"/>
           </a:p>
         </c:txPr>
         <c:crossAx val="-2068027336"/>
         <c:crosses val="autoZero"/>
+        <c:crossBetween val="between"/>
       </c:valAx>
     </c:plotArea>
     <c:legend>
@@ -1482,10 +1903,13 @@
               <a:latin typeface="Calibri"/>
             </a:defRPr>
           </a:pPr>
+          <a:endParaRPr lang="en-TR"/>
         </a:p>
       </c:txPr>
     </c:legend>
+    <c:plotVisOnly val="1"/>
     <c:dispBlanksAs val="gap"/>
+    <c:showDLblsOverMax val="1"/>
   </c:chart>
   <c:txPr>
     <a:bodyPr/>
@@ -1501,6 +1925,440 @@
     <c:autoUpdate val="0"/>
   </c:externalData>
 </c:chartSpace>
+</file>
+
+<file path=ppt/notesMasters/notesMaster1.xml><?xml version="1.0" encoding="utf-8"?>
+<p:notesMaster xmlns:a="http://schemas.openxmlformats.org/drawingml/2006/main" xmlns:r="http://schemas.openxmlformats.org/officeDocument/2006/relationships" xmlns:p="http://schemas.openxmlformats.org/presentationml/2006/main">
+  <p:cSld>
+    <p:bg>
+      <p:bgRef idx="1001">
+        <a:schemeClr val="bg1"/>
+      </p:bgRef>
+    </p:bg>
+    <p:spTree>
+      <p:nvGrpSpPr>
+        <p:cNvPr id="1" name=""/>
+        <p:cNvGrpSpPr/>
+        <p:nvPr/>
+      </p:nvGrpSpPr>
+      <p:grpSpPr>
+        <a:xfrm>
+          <a:off x="0" y="0"/>
+          <a:ext cx="0" cy="0"/>
+          <a:chOff x="0" y="0"/>
+          <a:chExt cx="0" cy="0"/>
+        </a:xfrm>
+      </p:grpSpPr>
+      <p:sp>
+        <p:nvSpPr>
+          <p:cNvPr id="2" name="Header Placeholder 1"/>
+          <p:cNvSpPr>
+            <a:spLocks noGrp="1"/>
+          </p:cNvSpPr>
+          <p:nvPr>
+            <p:ph type="hdr" sz="quarter"/>
+          </p:nvPr>
+        </p:nvSpPr>
+        <p:spPr>
+          <a:xfrm>
+            <a:off x="0" y="0"/>
+            <a:ext cx="2971800" cy="458788"/>
+          </a:xfrm>
+          <a:prstGeom prst="rect">
+            <a:avLst/>
+          </a:prstGeom>
+        </p:spPr>
+        <p:txBody>
+          <a:bodyPr vert="horz" lIns="91440" tIns="45720" rIns="91440" bIns="45720" rtlCol="0"/>
+          <a:lstStyle>
+            <a:lvl1pPr algn="l">
+              <a:defRPr sz="1200"/>
+            </a:lvl1pPr>
+          </a:lstStyle>
+          <a:p>
+            <a:endParaRPr lang="en-TR"/>
+          </a:p>
+        </p:txBody>
+      </p:sp>
+      <p:sp>
+        <p:nvSpPr>
+          <p:cNvPr id="3" name="Date Placeholder 2"/>
+          <p:cNvSpPr>
+            <a:spLocks noGrp="1"/>
+          </p:cNvSpPr>
+          <p:nvPr>
+            <p:ph type="dt" idx="1"/>
+          </p:nvPr>
+        </p:nvSpPr>
+        <p:spPr>
+          <a:xfrm>
+            <a:off x="3884613" y="0"/>
+            <a:ext cx="2971800" cy="458788"/>
+          </a:xfrm>
+          <a:prstGeom prst="rect">
+            <a:avLst/>
+          </a:prstGeom>
+        </p:spPr>
+        <p:txBody>
+          <a:bodyPr vert="horz" lIns="91440" tIns="45720" rIns="91440" bIns="45720" rtlCol="0"/>
+          <a:lstStyle>
+            <a:lvl1pPr algn="r">
+              <a:defRPr sz="1200"/>
+            </a:lvl1pPr>
+          </a:lstStyle>
+          <a:p>
+            <a:fld id="{2760A3CB-6D83-4943-B668-519CFCF79629}" type="datetimeFigureOut">
+              <a:rPr lang="en-TR" smtClean="0"/>
+              <a:t>24.05.2026</a:t>
+            </a:fld>
+            <a:endParaRPr lang="en-TR"/>
+          </a:p>
+        </p:txBody>
+      </p:sp>
+      <p:sp>
+        <p:nvSpPr>
+          <p:cNvPr id="4" name="Slide Image Placeholder 3"/>
+          <p:cNvSpPr>
+            <a:spLocks noGrp="1" noRot="1" noChangeAspect="1"/>
+          </p:cNvSpPr>
+          <p:nvPr>
+            <p:ph type="sldImg" idx="2"/>
+          </p:nvPr>
+        </p:nvSpPr>
+        <p:spPr>
+          <a:xfrm>
+            <a:off x="685800" y="1143000"/>
+            <a:ext cx="5486400" cy="3086100"/>
+          </a:xfrm>
+          <a:prstGeom prst="rect">
+            <a:avLst/>
+          </a:prstGeom>
+          <a:noFill/>
+          <a:ln w="12700">
+            <a:solidFill>
+              <a:prstClr val="black"/>
+            </a:solidFill>
+          </a:ln>
+        </p:spPr>
+        <p:txBody>
+          <a:bodyPr vert="horz" lIns="91440" tIns="45720" rIns="91440" bIns="45720" rtlCol="0" anchor="ctr"/>
+          <a:lstStyle/>
+          <a:p>
+            <a:endParaRPr lang="en-TR"/>
+          </a:p>
+        </p:txBody>
+      </p:sp>
+      <p:sp>
+        <p:nvSpPr>
+          <p:cNvPr id="5" name="Notes Placeholder 4"/>
+          <p:cNvSpPr>
+            <a:spLocks noGrp="1"/>
+          </p:cNvSpPr>
+          <p:nvPr>
+            <p:ph type="body" sz="quarter" idx="3"/>
+          </p:nvPr>
+        </p:nvSpPr>
+        <p:spPr>
+          <a:xfrm>
+            <a:off x="685800" y="4400550"/>
+            <a:ext cx="5486400" cy="3600450"/>
+          </a:xfrm>
+          <a:prstGeom prst="rect">
+            <a:avLst/>
+          </a:prstGeom>
+        </p:spPr>
+        <p:txBody>
+          <a:bodyPr vert="horz" lIns="91440" tIns="45720" rIns="91440" bIns="45720" rtlCol="0"/>
+          <a:lstStyle/>
+          <a:p>
+            <a:pPr lvl="0"/>
+            <a:r>
+              <a:rPr lang="en-US"/>
+              <a:t>Click to edit Master text styles</a:t>
+            </a:r>
+          </a:p>
+          <a:p>
+            <a:pPr lvl="1"/>
+            <a:r>
+              <a:rPr lang="en-US"/>
+              <a:t>Second level</a:t>
+            </a:r>
+          </a:p>
+          <a:p>
+            <a:pPr lvl="2"/>
+            <a:r>
+              <a:rPr lang="en-US"/>
+              <a:t>Third level</a:t>
+            </a:r>
+          </a:p>
+          <a:p>
+            <a:pPr lvl="3"/>
+            <a:r>
+              <a:rPr lang="en-US"/>
+              <a:t>Fourth level</a:t>
+            </a:r>
+          </a:p>
+          <a:p>
+            <a:pPr lvl="4"/>
+            <a:r>
+              <a:rPr lang="en-US"/>
+              <a:t>Fifth level</a:t>
+            </a:r>
+            <a:endParaRPr lang="en-TR"/>
+          </a:p>
+        </p:txBody>
+      </p:sp>
+      <p:sp>
+        <p:nvSpPr>
+          <p:cNvPr id="6" name="Footer Placeholder 5"/>
+          <p:cNvSpPr>
+            <a:spLocks noGrp="1"/>
+          </p:cNvSpPr>
+          <p:nvPr>
+            <p:ph type="ftr" sz="quarter" idx="4"/>
+          </p:nvPr>
+        </p:nvSpPr>
+        <p:spPr>
+          <a:xfrm>
+            <a:off x="0" y="8685213"/>
+            <a:ext cx="2971800" cy="458787"/>
+          </a:xfrm>
+          <a:prstGeom prst="rect">
+            <a:avLst/>
+          </a:prstGeom>
+        </p:spPr>
+        <p:txBody>
+          <a:bodyPr vert="horz" lIns="91440" tIns="45720" rIns="91440" bIns="45720" rtlCol="0" anchor="b"/>
+          <a:lstStyle>
+            <a:lvl1pPr algn="l">
+              <a:defRPr sz="1200"/>
+            </a:lvl1pPr>
+          </a:lstStyle>
+          <a:p>
+            <a:endParaRPr lang="en-TR"/>
+          </a:p>
+        </p:txBody>
+      </p:sp>
+      <p:sp>
+        <p:nvSpPr>
+          <p:cNvPr id="7" name="Slide Number Placeholder 6"/>
+          <p:cNvSpPr>
+            <a:spLocks noGrp="1"/>
+          </p:cNvSpPr>
+          <p:nvPr>
+            <p:ph type="sldNum" sz="quarter" idx="5"/>
+          </p:nvPr>
+        </p:nvSpPr>
+        <p:spPr>
+          <a:xfrm>
+            <a:off x="3884613" y="8685213"/>
+            <a:ext cx="2971800" cy="458787"/>
+          </a:xfrm>
+          <a:prstGeom prst="rect">
+            <a:avLst/>
+          </a:prstGeom>
+        </p:spPr>
+        <p:txBody>
+          <a:bodyPr vert="horz" lIns="91440" tIns="45720" rIns="91440" bIns="45720" rtlCol="0" anchor="b"/>
+          <a:lstStyle>
+            <a:lvl1pPr algn="r">
+              <a:defRPr sz="1200"/>
+            </a:lvl1pPr>
+          </a:lstStyle>
+          <a:p>
+            <a:fld id="{49C98723-0C31-4D42-919C-E4C19B599C8B}" type="slidenum">
+              <a:rPr lang="en-TR" smtClean="0"/>
+              <a:t>‹#›</a:t>
+            </a:fld>
+            <a:endParaRPr lang="en-TR"/>
+          </a:p>
+        </p:txBody>
+      </p:sp>
+    </p:spTree>
+    <p:extLst>
+      <p:ext uri="{BB962C8B-B14F-4D97-AF65-F5344CB8AC3E}">
+        <p14:creationId xmlns:p14="http://schemas.microsoft.com/office/powerpoint/2010/main" val="2055775294"/>
+      </p:ext>
+    </p:extLst>
+  </p:cSld>
+  <p:clrMap bg1="lt1" tx1="dk1" bg2="lt2" tx2="dk2" accent1="accent1" accent2="accent2" accent3="accent3" accent4="accent4" accent5="accent5" accent6="accent6" hlink="hlink" folHlink="folHlink"/>
+  <p:notesStyle>
+    <a:lvl1pPr marL="0" algn="l" defTabSz="914400" rtl="0" eaLnBrk="1" latinLnBrk="0" hangingPunct="1">
+      <a:defRPr sz="1200" kern="1200">
+        <a:solidFill>
+          <a:schemeClr val="tx1"/>
+        </a:solidFill>
+        <a:latin typeface="+mn-lt"/>
+        <a:ea typeface="+mn-ea"/>
+        <a:cs typeface="+mn-cs"/>
+      </a:defRPr>
+    </a:lvl1pPr>
+    <a:lvl2pPr marL="457200" algn="l" defTabSz="914400" rtl="0" eaLnBrk="1" latinLnBrk="0" hangingPunct="1">
+      <a:defRPr sz="1200" kern="1200">
+        <a:solidFill>
+          <a:schemeClr val="tx1"/>
+        </a:solidFill>
+        <a:latin typeface="+mn-lt"/>
+        <a:ea typeface="+mn-ea"/>
+        <a:cs typeface="+mn-cs"/>
+      </a:defRPr>
+    </a:lvl2pPr>
+    <a:lvl3pPr marL="914400" algn="l" defTabSz="914400" rtl="0" eaLnBrk="1" latinLnBrk="0" hangingPunct="1">
+      <a:defRPr sz="1200" kern="1200">
+        <a:solidFill>
+          <a:schemeClr val="tx1"/>
+        </a:solidFill>
+        <a:latin typeface="+mn-lt"/>
+        <a:ea typeface="+mn-ea"/>
+        <a:cs typeface="+mn-cs"/>
+      </a:defRPr>
+    </a:lvl3pPr>
+    <a:lvl4pPr marL="1371600" algn="l" defTabSz="914400" rtl="0" eaLnBrk="1" latinLnBrk="0" hangingPunct="1">
+      <a:defRPr sz="1200" kern="1200">
+        <a:solidFill>
+          <a:schemeClr val="tx1"/>
+        </a:solidFill>
+        <a:latin typeface="+mn-lt"/>
+        <a:ea typeface="+mn-ea"/>
+        <a:cs typeface="+mn-cs"/>
+      </a:defRPr>
+    </a:lvl4pPr>
+    <a:lvl5pPr marL="1828800" algn="l" defTabSz="914400" rtl="0" eaLnBrk="1" latinLnBrk="0" hangingPunct="1">
+      <a:defRPr sz="1200" kern="1200">
+        <a:solidFill>
+          <a:schemeClr val="tx1"/>
+        </a:solidFill>
+        <a:latin typeface="+mn-lt"/>
+        <a:ea typeface="+mn-ea"/>
+        <a:cs typeface="+mn-cs"/>
+      </a:defRPr>
+    </a:lvl5pPr>
+    <a:lvl6pPr marL="2286000" algn="l" defTabSz="914400" rtl="0" eaLnBrk="1" latinLnBrk="0" hangingPunct="1">
+      <a:defRPr sz="1200" kern="1200">
+        <a:solidFill>
+          <a:schemeClr val="tx1"/>
+        </a:solidFill>
+        <a:latin typeface="+mn-lt"/>
+        <a:ea typeface="+mn-ea"/>
+        <a:cs typeface="+mn-cs"/>
+      </a:defRPr>
+    </a:lvl6pPr>
+    <a:lvl7pPr marL="2743200" algn="l" defTabSz="914400" rtl="0" eaLnBrk="1" latinLnBrk="0" hangingPunct="1">
+      <a:defRPr sz="1200" kern="1200">
+        <a:solidFill>
+          <a:schemeClr val="tx1"/>
+        </a:solidFill>
+        <a:latin typeface="+mn-lt"/>
+        <a:ea typeface="+mn-ea"/>
+        <a:cs typeface="+mn-cs"/>
+      </a:defRPr>
+    </a:lvl7pPr>
+    <a:lvl8pPr marL="3200400" algn="l" defTabSz="914400" rtl="0" eaLnBrk="1" latinLnBrk="0" hangingPunct="1">
+      <a:defRPr sz="1200" kern="1200">
+        <a:solidFill>
+          <a:schemeClr val="tx1"/>
+        </a:solidFill>
+        <a:latin typeface="+mn-lt"/>
+        <a:ea typeface="+mn-ea"/>
+        <a:cs typeface="+mn-cs"/>
+      </a:defRPr>
+    </a:lvl8pPr>
+    <a:lvl9pPr marL="3657600" algn="l" defTabSz="914400" rtl="0" eaLnBrk="1" latinLnBrk="0" hangingPunct="1">
+      <a:defRPr sz="1200" kern="1200">
+        <a:solidFill>
+          <a:schemeClr val="tx1"/>
+        </a:solidFill>
+        <a:latin typeface="+mn-lt"/>
+        <a:ea typeface="+mn-ea"/>
+        <a:cs typeface="+mn-cs"/>
+      </a:defRPr>
+    </a:lvl9pPr>
+  </p:notesStyle>
+</p:notesMaster>
+</file>
+
+<file path=ppt/notesSlides/notesSlide1.xml><?xml version="1.0" encoding="utf-8"?>
+<p:notes xmlns:a="http://schemas.openxmlformats.org/drawingml/2006/main" xmlns:r="http://schemas.openxmlformats.org/officeDocument/2006/relationships" xmlns:p="http://schemas.openxmlformats.org/presentationml/2006/main">
+  <p:cSld>
+    <p:spTree>
+      <p:nvGrpSpPr>
+        <p:cNvPr id="1" name=""/>
+        <p:cNvGrpSpPr/>
+        <p:nvPr/>
+      </p:nvGrpSpPr>
+      <p:grpSpPr>
+        <a:xfrm>
+          <a:off x="0" y="0"/>
+          <a:ext cx="0" cy="0"/>
+          <a:chOff x="0" y="0"/>
+          <a:chExt cx="0" cy="0"/>
+        </a:xfrm>
+      </p:grpSpPr>
+      <p:sp>
+        <p:nvSpPr>
+          <p:cNvPr id="2" name="Slide Image Placeholder 1"/>
+          <p:cNvSpPr>
+            <a:spLocks noGrp="1" noRot="1" noChangeAspect="1"/>
+          </p:cNvSpPr>
+          <p:nvPr>
+            <p:ph type="sldImg"/>
+          </p:nvPr>
+        </p:nvSpPr>
+        <p:spPr/>
+      </p:sp>
+      <p:sp>
+        <p:nvSpPr>
+          <p:cNvPr id="3" name="Notes Placeholder 2"/>
+          <p:cNvSpPr>
+            <a:spLocks noGrp="1"/>
+          </p:cNvSpPr>
+          <p:nvPr>
+            <p:ph type="body" idx="1"/>
+          </p:nvPr>
+        </p:nvSpPr>
+        <p:spPr/>
+        <p:txBody>
+          <a:bodyPr/>
+          <a:lstStyle/>
+          <a:p>
+            <a:endParaRPr lang="en-TR" dirty="0"/>
+          </a:p>
+        </p:txBody>
+      </p:sp>
+      <p:sp>
+        <p:nvSpPr>
+          <p:cNvPr id="4" name="Slide Number Placeholder 3"/>
+          <p:cNvSpPr>
+            <a:spLocks noGrp="1"/>
+          </p:cNvSpPr>
+          <p:nvPr>
+            <p:ph type="sldNum" sz="quarter" idx="5"/>
+          </p:nvPr>
+        </p:nvSpPr>
+        <p:spPr/>
+        <p:txBody>
+          <a:bodyPr/>
+          <a:lstStyle/>
+          <a:p>
+            <a:fld id="{49C98723-0C31-4D42-919C-E4C19B599C8B}" type="slidenum">
+              <a:rPr lang="en-TR" smtClean="0"/>
+              <a:t>1</a:t>
+            </a:fld>
+            <a:endParaRPr lang="en-TR"/>
+          </a:p>
+        </p:txBody>
+      </p:sp>
+    </p:spTree>
+    <p:extLst>
+      <p:ext uri="{BB962C8B-B14F-4D97-AF65-F5344CB8AC3E}">
+        <p14:creationId xmlns:p14="http://schemas.microsoft.com/office/powerpoint/2010/main" val="2812717518"/>
+      </p:ext>
+    </p:extLst>
+  </p:cSld>
+  <p:clrMapOvr>
+    <a:masterClrMapping/>
+  </p:clrMapOvr>
+</p:notes>
 </file>
 
 <file path=ppt/slideLayouts/slideLayout1.xml><?xml version="1.0" encoding="utf-8"?>
@@ -1541,10 +2399,9 @@
           <a:lstStyle/>
           <a:p>
             <a:r>
-              <a:rPr lang="en-US" smtClean="0"/>
+              <a:rPr lang="en-US"/>
               <a:t>Click to edit Master title style</a:t>
             </a:r>
-            <a:endParaRPr lang="en-US"/>
           </a:p>
         </p:txBody>
       </p:sp>
@@ -1660,10 +2517,9 @@
           </a:lstStyle>
           <a:p>
             <a:r>
-              <a:rPr lang="en-US" smtClean="0"/>
+              <a:rPr lang="en-US"/>
               <a:t>Click to edit Master subtitle style</a:t>
             </a:r>
-            <a:endParaRPr lang="en-US"/>
           </a:p>
         </p:txBody>
       </p:sp>
@@ -1684,7 +2540,7 @@
           <a:p>
             <a:fld id="{5BCAD085-E8A6-8845-BD4E-CB4CCA059FC4}" type="datetimeFigureOut">
               <a:rPr lang="en-US" smtClean="0"/>
-              <a:t>1/27/13</a:t>
+              <a:t>5/24/26</a:t>
             </a:fld>
             <a:endParaRPr lang="en-US"/>
           </a:p>
@@ -1778,10 +2634,9 @@
           <a:lstStyle/>
           <a:p>
             <a:r>
-              <a:rPr lang="en-US" smtClean="0"/>
+              <a:rPr lang="en-US"/>
               <a:t>Click to edit Master title style</a:t>
             </a:r>
-            <a:endParaRPr lang="en-US"/>
           </a:p>
         </p:txBody>
       </p:sp>
@@ -1802,38 +2657,37 @@
           <a:p>
             <a:pPr lvl="0"/>
             <a:r>
-              <a:rPr lang="en-US" smtClean="0"/>
+              <a:rPr lang="en-US"/>
               <a:t>Click to edit Master text styles</a:t>
             </a:r>
           </a:p>
           <a:p>
             <a:pPr lvl="1"/>
             <a:r>
-              <a:rPr lang="en-US" smtClean="0"/>
+              <a:rPr lang="en-US"/>
               <a:t>Second level</a:t>
             </a:r>
           </a:p>
           <a:p>
             <a:pPr lvl="2"/>
             <a:r>
-              <a:rPr lang="en-US" smtClean="0"/>
+              <a:rPr lang="en-US"/>
               <a:t>Third level</a:t>
             </a:r>
           </a:p>
           <a:p>
             <a:pPr lvl="3"/>
             <a:r>
-              <a:rPr lang="en-US" smtClean="0"/>
+              <a:rPr lang="en-US"/>
               <a:t>Fourth level</a:t>
             </a:r>
           </a:p>
           <a:p>
             <a:pPr lvl="4"/>
             <a:r>
-              <a:rPr lang="en-US" smtClean="0"/>
+              <a:rPr lang="en-US"/>
               <a:t>Fifth level</a:t>
             </a:r>
-            <a:endParaRPr lang="en-US"/>
           </a:p>
         </p:txBody>
       </p:sp>
@@ -1854,7 +2708,7 @@
           <a:p>
             <a:fld id="{5BCAD085-E8A6-8845-BD4E-CB4CCA059FC4}" type="datetimeFigureOut">
               <a:rPr lang="en-US" smtClean="0"/>
-              <a:t>1/27/13</a:t>
+              <a:t>5/24/26</a:t>
             </a:fld>
             <a:endParaRPr lang="en-US"/>
           </a:p>
@@ -1953,10 +2807,9 @@
           <a:lstStyle/>
           <a:p>
             <a:r>
-              <a:rPr lang="en-US" smtClean="0"/>
+              <a:rPr lang="en-US"/>
               <a:t>Click to edit Master title style</a:t>
             </a:r>
-            <a:endParaRPr lang="en-US"/>
           </a:p>
         </p:txBody>
       </p:sp>
@@ -1982,38 +2835,37 @@
           <a:p>
             <a:pPr lvl="0"/>
             <a:r>
-              <a:rPr lang="en-US" smtClean="0"/>
+              <a:rPr lang="en-US"/>
               <a:t>Click to edit Master text styles</a:t>
             </a:r>
           </a:p>
           <a:p>
             <a:pPr lvl="1"/>
             <a:r>
-              <a:rPr lang="en-US" smtClean="0"/>
+              <a:rPr lang="en-US"/>
               <a:t>Second level</a:t>
             </a:r>
           </a:p>
           <a:p>
             <a:pPr lvl="2"/>
             <a:r>
-              <a:rPr lang="en-US" smtClean="0"/>
+              <a:rPr lang="en-US"/>
               <a:t>Third level</a:t>
             </a:r>
           </a:p>
           <a:p>
             <a:pPr lvl="3"/>
             <a:r>
-              <a:rPr lang="en-US" smtClean="0"/>
+              <a:rPr lang="en-US"/>
               <a:t>Fourth level</a:t>
             </a:r>
           </a:p>
           <a:p>
             <a:pPr lvl="4"/>
             <a:r>
-              <a:rPr lang="en-US" smtClean="0"/>
+              <a:rPr lang="en-US"/>
               <a:t>Fifth level</a:t>
             </a:r>
-            <a:endParaRPr lang="en-US"/>
           </a:p>
         </p:txBody>
       </p:sp>
@@ -2034,7 +2886,7 @@
           <a:p>
             <a:fld id="{5BCAD085-E8A6-8845-BD4E-CB4CCA059FC4}" type="datetimeFigureOut">
               <a:rPr lang="en-US" smtClean="0"/>
-              <a:t>1/27/13</a:t>
+              <a:t>5/24/26</a:t>
             </a:fld>
             <a:endParaRPr lang="en-US"/>
           </a:p>
@@ -2128,10 +2980,9 @@
           <a:lstStyle/>
           <a:p>
             <a:r>
-              <a:rPr lang="en-US" smtClean="0"/>
+              <a:rPr lang="en-US"/>
               <a:t>Click to edit Master title style</a:t>
             </a:r>
-            <a:endParaRPr lang="en-US"/>
           </a:p>
         </p:txBody>
       </p:sp>
@@ -2152,38 +3003,37 @@
           <a:p>
             <a:pPr lvl="0"/>
             <a:r>
-              <a:rPr lang="en-US" smtClean="0"/>
+              <a:rPr lang="en-US"/>
               <a:t>Click to edit Master text styles</a:t>
             </a:r>
           </a:p>
           <a:p>
             <a:pPr lvl="1"/>
             <a:r>
-              <a:rPr lang="en-US" smtClean="0"/>
+              <a:rPr lang="en-US"/>
               <a:t>Second level</a:t>
             </a:r>
           </a:p>
           <a:p>
             <a:pPr lvl="2"/>
             <a:r>
-              <a:rPr lang="en-US" smtClean="0"/>
+              <a:rPr lang="en-US"/>
               <a:t>Third level</a:t>
             </a:r>
           </a:p>
           <a:p>
             <a:pPr lvl="3"/>
             <a:r>
-              <a:rPr lang="en-US" smtClean="0"/>
+              <a:rPr lang="en-US"/>
               <a:t>Fourth level</a:t>
             </a:r>
           </a:p>
           <a:p>
             <a:pPr lvl="4"/>
             <a:r>
-              <a:rPr lang="en-US" smtClean="0"/>
+              <a:rPr lang="en-US"/>
               <a:t>Fifth level</a:t>
             </a:r>
-            <a:endParaRPr lang="en-US"/>
           </a:p>
         </p:txBody>
       </p:sp>
@@ -2204,7 +3054,7 @@
           <a:p>
             <a:fld id="{5BCAD085-E8A6-8845-BD4E-CB4CCA059FC4}" type="datetimeFigureOut">
               <a:rPr lang="en-US" smtClean="0"/>
-              <a:t>1/27/13</a:t>
+              <a:t>5/24/26</a:t>
             </a:fld>
             <a:endParaRPr lang="en-US"/>
           </a:p>
@@ -2307,10 +3157,9 @@
           </a:lstStyle>
           <a:p>
             <a:r>
-              <a:rPr lang="en-US" smtClean="0"/>
+              <a:rPr lang="en-US"/>
               <a:t>Click to edit Master title style</a:t>
             </a:r>
-            <a:endParaRPr lang="en-US"/>
           </a:p>
         </p:txBody>
       </p:sp>
@@ -2427,7 +3276,7 @@
           <a:p>
             <a:pPr lvl="0"/>
             <a:r>
-              <a:rPr lang="en-US" smtClean="0"/>
+              <a:rPr lang="en-US"/>
               <a:t>Click to edit Master text styles</a:t>
             </a:r>
           </a:p>
@@ -2450,7 +3299,7 @@
           <a:p>
             <a:fld id="{5BCAD085-E8A6-8845-BD4E-CB4CCA059FC4}" type="datetimeFigureOut">
               <a:rPr lang="en-US" smtClean="0"/>
-              <a:t>1/27/13</a:t>
+              <a:t>5/24/26</a:t>
             </a:fld>
             <a:endParaRPr lang="en-US"/>
           </a:p>
@@ -2544,10 +3393,9 @@
           <a:lstStyle/>
           <a:p>
             <a:r>
-              <a:rPr lang="en-US" smtClean="0"/>
+              <a:rPr lang="en-US"/>
               <a:t>Click to edit Master title style</a:t>
             </a:r>
-            <a:endParaRPr lang="en-US"/>
           </a:p>
         </p:txBody>
       </p:sp>
@@ -2601,38 +3449,37 @@
           <a:p>
             <a:pPr lvl="0"/>
             <a:r>
-              <a:rPr lang="en-US" smtClean="0"/>
+              <a:rPr lang="en-US"/>
               <a:t>Click to edit Master text styles</a:t>
             </a:r>
           </a:p>
           <a:p>
             <a:pPr lvl="1"/>
             <a:r>
-              <a:rPr lang="en-US" smtClean="0"/>
+              <a:rPr lang="en-US"/>
               <a:t>Second level</a:t>
             </a:r>
           </a:p>
           <a:p>
             <a:pPr lvl="2"/>
             <a:r>
-              <a:rPr lang="en-US" smtClean="0"/>
+              <a:rPr lang="en-US"/>
               <a:t>Third level</a:t>
             </a:r>
           </a:p>
           <a:p>
             <a:pPr lvl="3"/>
             <a:r>
-              <a:rPr lang="en-US" smtClean="0"/>
+              <a:rPr lang="en-US"/>
               <a:t>Fourth level</a:t>
             </a:r>
           </a:p>
           <a:p>
             <a:pPr lvl="4"/>
             <a:r>
-              <a:rPr lang="en-US" smtClean="0"/>
+              <a:rPr lang="en-US"/>
               <a:t>Fifth level</a:t>
             </a:r>
-            <a:endParaRPr lang="en-US"/>
           </a:p>
         </p:txBody>
       </p:sp>
@@ -2686,38 +3533,37 @@
           <a:p>
             <a:pPr lvl="0"/>
             <a:r>
-              <a:rPr lang="en-US" smtClean="0"/>
+              <a:rPr lang="en-US"/>
               <a:t>Click to edit Master text styles</a:t>
             </a:r>
           </a:p>
           <a:p>
             <a:pPr lvl="1"/>
             <a:r>
-              <a:rPr lang="en-US" smtClean="0"/>
+              <a:rPr lang="en-US"/>
               <a:t>Second level</a:t>
             </a:r>
           </a:p>
           <a:p>
             <a:pPr lvl="2"/>
             <a:r>
-              <a:rPr lang="en-US" smtClean="0"/>
+              <a:rPr lang="en-US"/>
               <a:t>Third level</a:t>
             </a:r>
           </a:p>
           <a:p>
             <a:pPr lvl="3"/>
             <a:r>
-              <a:rPr lang="en-US" smtClean="0"/>
+              <a:rPr lang="en-US"/>
               <a:t>Fourth level</a:t>
             </a:r>
           </a:p>
           <a:p>
             <a:pPr lvl="4"/>
             <a:r>
-              <a:rPr lang="en-US" smtClean="0"/>
+              <a:rPr lang="en-US"/>
               <a:t>Fifth level</a:t>
             </a:r>
-            <a:endParaRPr lang="en-US"/>
           </a:p>
         </p:txBody>
       </p:sp>
@@ -2738,7 +3584,7 @@
           <a:p>
             <a:fld id="{5BCAD085-E8A6-8845-BD4E-CB4CCA059FC4}" type="datetimeFigureOut">
               <a:rPr lang="en-US" smtClean="0"/>
-              <a:t>1/27/13</a:t>
+              <a:t>5/24/26</a:t>
             </a:fld>
             <a:endParaRPr lang="en-US"/>
           </a:p>
@@ -2836,10 +3682,9 @@
           </a:lstStyle>
           <a:p>
             <a:r>
-              <a:rPr lang="en-US" smtClean="0"/>
+              <a:rPr lang="en-US"/>
               <a:t>Click to edit Master title style</a:t>
             </a:r>
-            <a:endParaRPr lang="en-US"/>
           </a:p>
         </p:txBody>
       </p:sp>
@@ -2902,7 +3747,7 @@
           <a:p>
             <a:pPr lvl="0"/>
             <a:r>
-              <a:rPr lang="en-US" smtClean="0"/>
+              <a:rPr lang="en-US"/>
               <a:t>Click to edit Master text styles</a:t>
             </a:r>
           </a:p>
@@ -2958,38 +3803,37 @@
           <a:p>
             <a:pPr lvl="0"/>
             <a:r>
-              <a:rPr lang="en-US" smtClean="0"/>
+              <a:rPr lang="en-US"/>
               <a:t>Click to edit Master text styles</a:t>
             </a:r>
           </a:p>
           <a:p>
             <a:pPr lvl="1"/>
             <a:r>
-              <a:rPr lang="en-US" smtClean="0"/>
+              <a:rPr lang="en-US"/>
               <a:t>Second level</a:t>
             </a:r>
           </a:p>
           <a:p>
             <a:pPr lvl="2"/>
             <a:r>
-              <a:rPr lang="en-US" smtClean="0"/>
+              <a:rPr lang="en-US"/>
               <a:t>Third level</a:t>
             </a:r>
           </a:p>
           <a:p>
             <a:pPr lvl="3"/>
             <a:r>
-              <a:rPr lang="en-US" smtClean="0"/>
+              <a:rPr lang="en-US"/>
               <a:t>Fourth level</a:t>
             </a:r>
           </a:p>
           <a:p>
             <a:pPr lvl="4"/>
             <a:r>
-              <a:rPr lang="en-US" smtClean="0"/>
+              <a:rPr lang="en-US"/>
               <a:t>Fifth level</a:t>
             </a:r>
-            <a:endParaRPr lang="en-US"/>
           </a:p>
         </p:txBody>
       </p:sp>
@@ -3052,7 +3896,7 @@
           <a:p>
             <a:pPr lvl="0"/>
             <a:r>
-              <a:rPr lang="en-US" smtClean="0"/>
+              <a:rPr lang="en-US"/>
               <a:t>Click to edit Master text styles</a:t>
             </a:r>
           </a:p>
@@ -3108,38 +3952,37 @@
           <a:p>
             <a:pPr lvl="0"/>
             <a:r>
-              <a:rPr lang="en-US" smtClean="0"/>
+              <a:rPr lang="en-US"/>
               <a:t>Click to edit Master text styles</a:t>
             </a:r>
           </a:p>
           <a:p>
             <a:pPr lvl="1"/>
             <a:r>
-              <a:rPr lang="en-US" smtClean="0"/>
+              <a:rPr lang="en-US"/>
               <a:t>Second level</a:t>
             </a:r>
           </a:p>
           <a:p>
             <a:pPr lvl="2"/>
             <a:r>
-              <a:rPr lang="en-US" smtClean="0"/>
+              <a:rPr lang="en-US"/>
               <a:t>Third level</a:t>
             </a:r>
           </a:p>
           <a:p>
             <a:pPr lvl="3"/>
             <a:r>
-              <a:rPr lang="en-US" smtClean="0"/>
+              <a:rPr lang="en-US"/>
               <a:t>Fourth level</a:t>
             </a:r>
           </a:p>
           <a:p>
             <a:pPr lvl="4"/>
             <a:r>
-              <a:rPr lang="en-US" smtClean="0"/>
+              <a:rPr lang="en-US"/>
               <a:t>Fifth level</a:t>
             </a:r>
-            <a:endParaRPr lang="en-US"/>
           </a:p>
         </p:txBody>
       </p:sp>
@@ -3160,7 +4003,7 @@
           <a:p>
             <a:fld id="{5BCAD085-E8A6-8845-BD4E-CB4CCA059FC4}" type="datetimeFigureOut">
               <a:rPr lang="en-US" smtClean="0"/>
-              <a:t>1/27/13</a:t>
+              <a:t>5/24/26</a:t>
             </a:fld>
             <a:endParaRPr lang="en-US"/>
           </a:p>
@@ -3254,10 +4097,9 @@
           <a:lstStyle/>
           <a:p>
             <a:r>
-              <a:rPr lang="en-US" smtClean="0"/>
+              <a:rPr lang="en-US"/>
               <a:t>Click to edit Master title style</a:t>
             </a:r>
-            <a:endParaRPr lang="en-US"/>
           </a:p>
         </p:txBody>
       </p:sp>
@@ -3278,7 +4120,7 @@
           <a:p>
             <a:fld id="{5BCAD085-E8A6-8845-BD4E-CB4CCA059FC4}" type="datetimeFigureOut">
               <a:rPr lang="en-US" smtClean="0"/>
-              <a:t>1/27/13</a:t>
+              <a:t>5/24/26</a:t>
             </a:fld>
             <a:endParaRPr lang="en-US"/>
           </a:p>
@@ -3373,7 +4215,7 @@
           <a:p>
             <a:fld id="{5BCAD085-E8A6-8845-BD4E-CB4CCA059FC4}" type="datetimeFigureOut">
               <a:rPr lang="en-US" smtClean="0"/>
-              <a:t>1/27/13</a:t>
+              <a:t>5/24/26</a:t>
             </a:fld>
             <a:endParaRPr lang="en-US"/>
           </a:p>
@@ -3476,10 +4318,9 @@
           </a:lstStyle>
           <a:p>
             <a:r>
-              <a:rPr lang="en-US" smtClean="0"/>
+              <a:rPr lang="en-US"/>
               <a:t>Click to edit Master title style</a:t>
             </a:r>
-            <a:endParaRPr lang="en-US"/>
           </a:p>
         </p:txBody>
       </p:sp>
@@ -3533,38 +4374,37 @@
           <a:p>
             <a:pPr lvl="0"/>
             <a:r>
-              <a:rPr lang="en-US" smtClean="0"/>
+              <a:rPr lang="en-US"/>
               <a:t>Click to edit Master text styles</a:t>
             </a:r>
           </a:p>
           <a:p>
             <a:pPr lvl="1"/>
             <a:r>
-              <a:rPr lang="en-US" smtClean="0"/>
+              <a:rPr lang="en-US"/>
               <a:t>Second level</a:t>
             </a:r>
           </a:p>
           <a:p>
             <a:pPr lvl="2"/>
             <a:r>
-              <a:rPr lang="en-US" smtClean="0"/>
+              <a:rPr lang="en-US"/>
               <a:t>Third level</a:t>
             </a:r>
           </a:p>
           <a:p>
             <a:pPr lvl="3"/>
             <a:r>
-              <a:rPr lang="en-US" smtClean="0"/>
+              <a:rPr lang="en-US"/>
               <a:t>Fourth level</a:t>
             </a:r>
           </a:p>
           <a:p>
             <a:pPr lvl="4"/>
             <a:r>
-              <a:rPr lang="en-US" smtClean="0"/>
+              <a:rPr lang="en-US"/>
               <a:t>Fifth level</a:t>
             </a:r>
-            <a:endParaRPr lang="en-US"/>
           </a:p>
         </p:txBody>
       </p:sp>
@@ -3627,7 +4467,7 @@
           <a:p>
             <a:pPr lvl="0"/>
             <a:r>
-              <a:rPr lang="en-US" smtClean="0"/>
+              <a:rPr lang="en-US"/>
               <a:t>Click to edit Master text styles</a:t>
             </a:r>
           </a:p>
@@ -3650,7 +4490,7 @@
           <a:p>
             <a:fld id="{5BCAD085-E8A6-8845-BD4E-CB4CCA059FC4}" type="datetimeFigureOut">
               <a:rPr lang="en-US" smtClean="0"/>
-              <a:t>1/27/13</a:t>
+              <a:t>5/24/26</a:t>
             </a:fld>
             <a:endParaRPr lang="en-US"/>
           </a:p>
@@ -3753,10 +4593,9 @@
           </a:lstStyle>
           <a:p>
             <a:r>
-              <a:rPr lang="en-US" smtClean="0"/>
+              <a:rPr lang="en-US"/>
               <a:t>Click to edit Master title style</a:t>
             </a:r>
-            <a:endParaRPr lang="en-US"/>
           </a:p>
         </p:txBody>
       </p:sp>
@@ -3880,7 +4719,7 @@
           <a:p>
             <a:pPr lvl="0"/>
             <a:r>
-              <a:rPr lang="en-US" smtClean="0"/>
+              <a:rPr lang="en-US"/>
               <a:t>Click to edit Master text styles</a:t>
             </a:r>
           </a:p>
@@ -3903,7 +4742,7 @@
           <a:p>
             <a:fld id="{5BCAD085-E8A6-8845-BD4E-CB4CCA059FC4}" type="datetimeFigureOut">
               <a:rPr lang="en-US" smtClean="0"/>
-              <a:t>1/27/13</a:t>
+              <a:t>5/24/26</a:t>
             </a:fld>
             <a:endParaRPr lang="en-US"/>
           </a:p>
@@ -4012,10 +4851,9 @@
           <a:lstStyle/>
           <a:p>
             <a:r>
-              <a:rPr lang="en-US" smtClean="0"/>
+              <a:rPr lang="en-US"/>
               <a:t>Click to edit Master title style</a:t>
             </a:r>
-            <a:endParaRPr lang="en-US"/>
           </a:p>
         </p:txBody>
       </p:sp>
@@ -4046,38 +4884,37 @@
           <a:p>
             <a:pPr lvl="0"/>
             <a:r>
-              <a:rPr lang="en-US" smtClean="0"/>
+              <a:rPr lang="en-US"/>
               <a:t>Click to edit Master text styles</a:t>
             </a:r>
           </a:p>
           <a:p>
             <a:pPr lvl="1"/>
             <a:r>
-              <a:rPr lang="en-US" smtClean="0"/>
+              <a:rPr lang="en-US"/>
               <a:t>Second level</a:t>
             </a:r>
           </a:p>
           <a:p>
             <a:pPr lvl="2"/>
             <a:r>
-              <a:rPr lang="en-US" smtClean="0"/>
+              <a:rPr lang="en-US"/>
               <a:t>Third level</a:t>
             </a:r>
           </a:p>
           <a:p>
             <a:pPr lvl="3"/>
             <a:r>
-              <a:rPr lang="en-US" smtClean="0"/>
+              <a:rPr lang="en-US"/>
               <a:t>Fourth level</a:t>
             </a:r>
           </a:p>
           <a:p>
             <a:pPr lvl="4"/>
             <a:r>
-              <a:rPr lang="en-US" smtClean="0"/>
+              <a:rPr lang="en-US"/>
               <a:t>Fifth level</a:t>
             </a:r>
-            <a:endParaRPr lang="en-US"/>
           </a:p>
         </p:txBody>
       </p:sp>
@@ -4116,7 +4953,7 @@
           <a:p>
             <a:fld id="{5BCAD085-E8A6-8845-BD4E-CB4CCA059FC4}" type="datetimeFigureOut">
               <a:rPr lang="en-US" smtClean="0"/>
-              <a:t>1/27/13</a:t>
+              <a:t>5/24/26</a:t>
             </a:fld>
             <a:endParaRPr lang="en-US"/>
           </a:p>
@@ -4475,7 +5312,7 @@
 </file>
 
 <file path=ppt/slides/slide1.xml><?xml version="1.0" encoding="utf-8"?>
-<p:sld xmlns:a="http://schemas.openxmlformats.org/drawingml/2006/main" xmlns:p="http://schemas.openxmlformats.org/presentationml/2006/main" xmlns:r="http://schemas.openxmlformats.org/officeDocument/2006/relationships">
+<p:sld xmlns:a="http://schemas.openxmlformats.org/drawingml/2006/main" xmlns:r="http://schemas.openxmlformats.org/officeDocument/2006/relationships" xmlns:p="http://schemas.openxmlformats.org/presentationml/2006/main">
   <p:cSld>
     <p:spTree>
       <p:nvGrpSpPr>
@@ -4483,7 +5320,14 @@
         <p:cNvGrpSpPr/>
         <p:nvPr/>
       </p:nvGrpSpPr>
-      <p:grpSpPr/>
+      <p:grpSpPr>
+        <a:xfrm>
+          <a:off x="0" y="0"/>
+          <a:ext cx="0" cy="0"/>
+          <a:chOff x="0" y="0"/>
+          <a:chExt cx="0" cy="0"/>
+        </a:xfrm>
+      </p:grpSpPr>
       <p:sp>
         <p:nvSpPr>
           <p:cNvPr id="2" name="Rectangle 1"/>
@@ -4524,6 +5368,7 @@
           <a:lstStyle/>
           <a:p>
             <a:pPr algn="ctr"/>
+            <a:endParaRPr/>
           </a:p>
         </p:txBody>
       </p:sp>
@@ -4544,7 +5389,7 @@
           <a:noFill/>
         </p:spPr>
         <p:txBody>
-          <a:bodyPr wrap="square" anchor="t" lIns="0" rIns="0" tIns="0" bIns="0">
+          <a:bodyPr wrap="square" lIns="0" tIns="0" rIns="0" bIns="0" anchor="t">
             <a:spAutoFit/>
           </a:bodyPr>
           <a:lstStyle/>
@@ -4579,7 +5424,7 @@
           <a:noFill/>
         </p:spPr>
         <p:txBody>
-          <a:bodyPr wrap="square" anchor="t" lIns="0" rIns="0" tIns="0" bIns="0">
+          <a:bodyPr wrap="square" lIns="0" tIns="0" rIns="0" bIns="0" anchor="t">
             <a:spAutoFit/>
           </a:bodyPr>
           <a:lstStyle/>
@@ -4614,7 +5459,7 @@
           <a:noFill/>
         </p:spPr>
         <p:txBody>
-          <a:bodyPr wrap="square" anchor="t" lIns="0" rIns="0" tIns="0" bIns="0">
+          <a:bodyPr wrap="square" lIns="0" tIns="0" rIns="0" bIns="0" anchor="t">
             <a:spAutoFit/>
           </a:bodyPr>
           <a:lstStyle/>
@@ -4649,7 +5494,7 @@
           <a:noFill/>
         </p:spPr>
         <p:txBody>
-          <a:bodyPr wrap="square" anchor="t" lIns="0" rIns="0" tIns="0" bIns="0">
+          <a:bodyPr wrap="square" lIns="0" tIns="0" rIns="0" bIns="0" anchor="t">
             <a:spAutoFit/>
           </a:bodyPr>
           <a:lstStyle/>
@@ -4684,7 +5529,7 @@
           <a:noFill/>
         </p:spPr>
         <p:txBody>
-          <a:bodyPr wrap="square" anchor="t" lIns="0" rIns="0" tIns="0" bIns="0">
+          <a:bodyPr wrap="square" lIns="0" tIns="0" rIns="0" bIns="0" anchor="t">
             <a:spAutoFit/>
           </a:bodyPr>
           <a:lstStyle/>
@@ -4711,7 +5556,7 @@
 </file>
 
 <file path=ppt/slides/slide10.xml><?xml version="1.0" encoding="utf-8"?>
-<p:sld xmlns:a="http://schemas.openxmlformats.org/drawingml/2006/main" xmlns:p="http://schemas.openxmlformats.org/presentationml/2006/main" xmlns:r="http://schemas.openxmlformats.org/officeDocument/2006/relationships">
+<p:sld xmlns:a="http://schemas.openxmlformats.org/drawingml/2006/main" xmlns:r="http://schemas.openxmlformats.org/officeDocument/2006/relationships" xmlns:p="http://schemas.openxmlformats.org/presentationml/2006/main">
   <p:cSld>
     <p:spTree>
       <p:nvGrpSpPr>
@@ -4719,7 +5564,14 @@
         <p:cNvGrpSpPr/>
         <p:nvPr/>
       </p:nvGrpSpPr>
-      <p:grpSpPr/>
+      <p:grpSpPr>
+        <a:xfrm>
+          <a:off x="0" y="0"/>
+          <a:ext cx="0" cy="0"/>
+          <a:chOff x="0" y="0"/>
+          <a:chExt cx="0" cy="0"/>
+        </a:xfrm>
+      </p:grpSpPr>
       <p:sp>
         <p:nvSpPr>
           <p:cNvPr id="2" name="TextBox 1"/>
@@ -4737,7 +5589,7 @@
           <a:noFill/>
         </p:spPr>
         <p:txBody>
-          <a:bodyPr wrap="square" anchor="t" lIns="0" rIns="0" tIns="0" bIns="0">
+          <a:bodyPr wrap="square" lIns="0" tIns="0" rIns="0" bIns="0" anchor="t">
             <a:spAutoFit/>
           </a:bodyPr>
           <a:lstStyle/>
@@ -4776,7 +5628,7 @@
           <a:noFill/>
         </p:spPr>
         <p:txBody>
-          <a:bodyPr wrap="square" anchor="t" lIns="0" rIns="0" tIns="0" bIns="0">
+          <a:bodyPr wrap="square" lIns="0" tIns="0" rIns="0" bIns="0" anchor="t">
             <a:spAutoFit/>
           </a:bodyPr>
           <a:lstStyle/>
@@ -4811,7 +5663,7 @@
           <a:noFill/>
         </p:spPr>
         <p:txBody>
-          <a:bodyPr wrap="square" anchor="t" lIns="0" rIns="0" tIns="0" bIns="0">
+          <a:bodyPr wrap="square" lIns="0" tIns="0" rIns="0" bIns="0" anchor="t">
             <a:spAutoFit/>
           </a:bodyPr>
           <a:lstStyle/>
@@ -4846,7 +5698,7 @@
           <a:noFill/>
         </p:spPr>
         <p:txBody>
-          <a:bodyPr wrap="square" anchor="t" lIns="0" rIns="0" tIns="0" bIns="0">
+          <a:bodyPr wrap="square" lIns="0" tIns="0" rIns="0" bIns="0" anchor="t">
             <a:spAutoFit/>
           </a:bodyPr>
           <a:lstStyle/>
@@ -4878,7 +5730,7 @@
         </p:xfrm>
         <a:graphic>
           <a:graphicData uri="http://schemas.openxmlformats.org/drawingml/2006/chart">
-            <c:chart xmlns:c="http://schemas.openxmlformats.org/drawingml/2006/chart" r:id="rId2"/>
+            <c:chart xmlns:c="http://schemas.openxmlformats.org/drawingml/2006/chart" xmlns:r="http://schemas.openxmlformats.org/officeDocument/2006/relationships" r:id="rId2"/>
           </a:graphicData>
         </a:graphic>
       </p:graphicFrame>
@@ -4899,7 +5751,7 @@
           <a:noFill/>
         </p:spPr>
         <p:txBody>
-          <a:bodyPr wrap="square" anchor="t" lIns="0" rIns="0" tIns="0" bIns="0">
+          <a:bodyPr wrap="square" lIns="0" tIns="0" rIns="0" bIns="0" anchor="t">
             <a:spAutoFit/>
           </a:bodyPr>
           <a:lstStyle/>
@@ -4926,7 +5778,7 @@
 </file>
 
 <file path=ppt/slides/slide11.xml><?xml version="1.0" encoding="utf-8"?>
-<p:sld xmlns:a="http://schemas.openxmlformats.org/drawingml/2006/main" xmlns:p="http://schemas.openxmlformats.org/presentationml/2006/main" xmlns:r="http://schemas.openxmlformats.org/officeDocument/2006/relationships">
+<p:sld xmlns:a="http://schemas.openxmlformats.org/drawingml/2006/main" xmlns:r="http://schemas.openxmlformats.org/officeDocument/2006/relationships" xmlns:p="http://schemas.openxmlformats.org/presentationml/2006/main">
   <p:cSld>
     <p:spTree>
       <p:nvGrpSpPr>
@@ -4934,7 +5786,14 @@
         <p:cNvGrpSpPr/>
         <p:nvPr/>
       </p:nvGrpSpPr>
-      <p:grpSpPr/>
+      <p:grpSpPr>
+        <a:xfrm>
+          <a:off x="0" y="0"/>
+          <a:ext cx="0" cy="0"/>
+          <a:chOff x="0" y="0"/>
+          <a:chExt cx="0" cy="0"/>
+        </a:xfrm>
+      </p:grpSpPr>
       <p:sp>
         <p:nvSpPr>
           <p:cNvPr id="2" name="TextBox 1"/>
@@ -4952,7 +5811,7 @@
           <a:noFill/>
         </p:spPr>
         <p:txBody>
-          <a:bodyPr wrap="square" anchor="t" lIns="0" rIns="0" tIns="0" bIns="0">
+          <a:bodyPr wrap="square" lIns="0" tIns="0" rIns="0" bIns="0" anchor="t">
             <a:spAutoFit/>
           </a:bodyPr>
           <a:lstStyle/>
@@ -4991,7 +5850,7 @@
           <a:noFill/>
         </p:spPr>
         <p:txBody>
-          <a:bodyPr wrap="square" anchor="t" lIns="0" rIns="0" tIns="0" bIns="0">
+          <a:bodyPr wrap="square" lIns="0" tIns="0" rIns="0" bIns="0" anchor="t">
             <a:spAutoFit/>
           </a:bodyPr>
           <a:lstStyle/>
@@ -5026,7 +5885,7 @@
           <a:noFill/>
         </p:spPr>
         <p:txBody>
-          <a:bodyPr wrap="square" anchor="t" lIns="0" rIns="0" tIns="0" bIns="0">
+          <a:bodyPr wrap="square" lIns="0" tIns="0" rIns="0" bIns="0" anchor="t">
             <a:spAutoFit/>
           </a:bodyPr>
           <a:lstStyle/>
@@ -5061,7 +5920,7 @@
           <a:noFill/>
         </p:spPr>
         <p:txBody>
-          <a:bodyPr wrap="square" anchor="t" lIns="0" rIns="0" tIns="0" bIns="0">
+          <a:bodyPr wrap="square" lIns="0" tIns="0" rIns="0" bIns="0" anchor="t">
             <a:spAutoFit/>
           </a:bodyPr>
           <a:lstStyle/>
@@ -5093,7 +5952,7 @@
         </p:xfrm>
         <a:graphic>
           <a:graphicData uri="http://schemas.openxmlformats.org/drawingml/2006/chart">
-            <c:chart xmlns:c="http://schemas.openxmlformats.org/drawingml/2006/chart" r:id="rId2"/>
+            <c:chart xmlns:c="http://schemas.openxmlformats.org/drawingml/2006/chart" xmlns:r="http://schemas.openxmlformats.org/officeDocument/2006/relationships" r:id="rId2"/>
           </a:graphicData>
         </a:graphic>
       </p:graphicFrame>
@@ -5114,7 +5973,7 @@
           <a:noFill/>
         </p:spPr>
         <p:txBody>
-          <a:bodyPr wrap="square" anchor="t" lIns="0" rIns="0" tIns="0" bIns="0">
+          <a:bodyPr wrap="square" lIns="0" tIns="0" rIns="0" bIns="0" anchor="t">
             <a:spAutoFit/>
           </a:bodyPr>
           <a:lstStyle/>
@@ -5141,7 +6000,7 @@
 </file>
 
 <file path=ppt/slides/slide12.xml><?xml version="1.0" encoding="utf-8"?>
-<p:sld xmlns:a="http://schemas.openxmlformats.org/drawingml/2006/main" xmlns:p="http://schemas.openxmlformats.org/presentationml/2006/main" xmlns:r="http://schemas.openxmlformats.org/officeDocument/2006/relationships">
+<p:sld xmlns:a="http://schemas.openxmlformats.org/drawingml/2006/main" xmlns:r="http://schemas.openxmlformats.org/officeDocument/2006/relationships" xmlns:p="http://schemas.openxmlformats.org/presentationml/2006/main">
   <p:cSld>
     <p:spTree>
       <p:nvGrpSpPr>
@@ -5149,7 +6008,14 @@
         <p:cNvGrpSpPr/>
         <p:nvPr/>
       </p:nvGrpSpPr>
-      <p:grpSpPr/>
+      <p:grpSpPr>
+        <a:xfrm>
+          <a:off x="0" y="0"/>
+          <a:ext cx="0" cy="0"/>
+          <a:chOff x="0" y="0"/>
+          <a:chExt cx="0" cy="0"/>
+        </a:xfrm>
+      </p:grpSpPr>
       <p:sp>
         <p:nvSpPr>
           <p:cNvPr id="2" name="TextBox 1"/>
@@ -5167,7 +6033,7 @@
           <a:noFill/>
         </p:spPr>
         <p:txBody>
-          <a:bodyPr wrap="square" anchor="t" lIns="0" rIns="0" tIns="0" bIns="0">
+          <a:bodyPr wrap="square" lIns="0" tIns="0" rIns="0" bIns="0" anchor="t">
             <a:spAutoFit/>
           </a:bodyPr>
           <a:lstStyle/>
@@ -5206,7 +6072,7 @@
           <a:noFill/>
         </p:spPr>
         <p:txBody>
-          <a:bodyPr wrap="square" anchor="t" lIns="0" rIns="0" tIns="0" bIns="0">
+          <a:bodyPr wrap="square" lIns="0" tIns="0" rIns="0" bIns="0" anchor="t">
             <a:spAutoFit/>
           </a:bodyPr>
           <a:lstStyle/>
@@ -5244,7 +6110,7 @@
         </p:blipFill>
         <p:spPr>
           <a:xfrm>
-            <a:off x="3337560" y="1828800"/>
+            <a:off x="3019508" y="1835426"/>
             <a:ext cx="5486400" cy="4572000"/>
           </a:xfrm>
           <a:prstGeom prst="rect">
@@ -5269,7 +6135,7 @@
           <a:noFill/>
         </p:spPr>
         <p:txBody>
-          <a:bodyPr wrap="square" anchor="t" lIns="0" rIns="0" tIns="0" bIns="0">
+          <a:bodyPr wrap="square" lIns="0" tIns="0" rIns="0" bIns="0" anchor="t">
             <a:spAutoFit/>
           </a:bodyPr>
           <a:lstStyle/>
@@ -5296,7 +6162,7 @@
 </file>
 
 <file path=ppt/slides/slide13.xml><?xml version="1.0" encoding="utf-8"?>
-<p:sld xmlns:a="http://schemas.openxmlformats.org/drawingml/2006/main" xmlns:p="http://schemas.openxmlformats.org/presentationml/2006/main" xmlns:r="http://schemas.openxmlformats.org/officeDocument/2006/relationships">
+<p:sld xmlns:a="http://schemas.openxmlformats.org/drawingml/2006/main" xmlns:r="http://schemas.openxmlformats.org/officeDocument/2006/relationships" xmlns:p="http://schemas.openxmlformats.org/presentationml/2006/main">
   <p:cSld>
     <p:spTree>
       <p:nvGrpSpPr>
@@ -5304,7 +6170,14 @@
         <p:cNvGrpSpPr/>
         <p:nvPr/>
       </p:nvGrpSpPr>
-      <p:grpSpPr/>
+      <p:grpSpPr>
+        <a:xfrm>
+          <a:off x="0" y="0"/>
+          <a:ext cx="0" cy="0"/>
+          <a:chOff x="0" y="0"/>
+          <a:chExt cx="0" cy="0"/>
+        </a:xfrm>
+      </p:grpSpPr>
       <p:sp>
         <p:nvSpPr>
           <p:cNvPr id="2" name="TextBox 1"/>
@@ -5322,7 +6195,7 @@
           <a:noFill/>
         </p:spPr>
         <p:txBody>
-          <a:bodyPr wrap="square" anchor="t" lIns="0" rIns="0" tIns="0" bIns="0">
+          <a:bodyPr wrap="square" lIns="0" tIns="0" rIns="0" bIns="0" anchor="t">
             <a:spAutoFit/>
           </a:bodyPr>
           <a:lstStyle/>
@@ -5363,9 +6236,27 @@
                 <a:tableStyleId>{5C22544A-7EE6-4342-B048-85BDC9FD1C3A}</a:tableStyleId>
               </a:tblPr>
               <a:tblGrid>
-                <a:gridCol w="6858000"/>
-                <a:gridCol w="2103120"/>
-                <a:gridCol w="2103120"/>
+                <a:gridCol w="6858000">
+                  <a:extLst>
+                    <a:ext uri="{9D8B030D-6E8A-4147-A177-3AD203B41FA5}">
+                      <a16:colId xmlns:a16="http://schemas.microsoft.com/office/drawing/2014/main" val="20000"/>
+                    </a:ext>
+                  </a:extLst>
+                </a:gridCol>
+                <a:gridCol w="2103120">
+                  <a:extLst>
+                    <a:ext uri="{9D8B030D-6E8A-4147-A177-3AD203B41FA5}">
+                      <a16:colId xmlns:a16="http://schemas.microsoft.com/office/drawing/2014/main" val="20001"/>
+                    </a:ext>
+                  </a:extLst>
+                </a:gridCol>
+                <a:gridCol w="2103120">
+                  <a:extLst>
+                    <a:ext uri="{9D8B030D-6E8A-4147-A177-3AD203B41FA5}">
+                      <a16:colId xmlns:a16="http://schemas.microsoft.com/office/drawing/2014/main" val="20002"/>
+                    </a:ext>
+                  </a:extLst>
+                </a:gridCol>
               </a:tblGrid>
               <a:tr h="457200">
                 <a:tc>
@@ -5437,6 +6328,11 @@
                     </a:solidFill>
                   </a:tcPr>
                 </a:tc>
+                <a:extLst>
+                  <a:ext uri="{0D108BD9-81ED-4DB2-BD59-A6C34878D82A}">
+                    <a16:rowId xmlns:a16="http://schemas.microsoft.com/office/drawing/2014/main" val="10000"/>
+                  </a:ext>
+                </a:extLst>
               </a:tr>
               <a:tr h="457200">
                 <a:tc>
@@ -5508,6 +6404,11 @@
                     </a:solidFill>
                   </a:tcPr>
                 </a:tc>
+                <a:extLst>
+                  <a:ext uri="{0D108BD9-81ED-4DB2-BD59-A6C34878D82A}">
+                    <a16:rowId xmlns:a16="http://schemas.microsoft.com/office/drawing/2014/main" val="10001"/>
+                  </a:ext>
+                </a:extLst>
               </a:tr>
               <a:tr h="457200">
                 <a:tc>
@@ -5579,6 +6480,11 @@
                     </a:solidFill>
                   </a:tcPr>
                 </a:tc>
+                <a:extLst>
+                  <a:ext uri="{0D108BD9-81ED-4DB2-BD59-A6C34878D82A}">
+                    <a16:rowId xmlns:a16="http://schemas.microsoft.com/office/drawing/2014/main" val="10002"/>
+                  </a:ext>
+                </a:extLst>
               </a:tr>
               <a:tr h="457200">
                 <a:tc>
@@ -5650,6 +6556,11 @@
                     </a:solidFill>
                   </a:tcPr>
                 </a:tc>
+                <a:extLst>
+                  <a:ext uri="{0D108BD9-81ED-4DB2-BD59-A6C34878D82A}">
+                    <a16:rowId xmlns:a16="http://schemas.microsoft.com/office/drawing/2014/main" val="10003"/>
+                  </a:ext>
+                </a:extLst>
               </a:tr>
               <a:tr h="457200">
                 <a:tc>
@@ -5721,6 +6632,11 @@
                     </a:solidFill>
                   </a:tcPr>
                 </a:tc>
+                <a:extLst>
+                  <a:ext uri="{0D108BD9-81ED-4DB2-BD59-A6C34878D82A}">
+                    <a16:rowId xmlns:a16="http://schemas.microsoft.com/office/drawing/2014/main" val="10004"/>
+                  </a:ext>
+                </a:extLst>
               </a:tr>
               <a:tr h="457200">
                 <a:tc>
@@ -5792,6 +6708,11 @@
                     </a:solidFill>
                   </a:tcPr>
                 </a:tc>
+                <a:extLst>
+                  <a:ext uri="{0D108BD9-81ED-4DB2-BD59-A6C34878D82A}">
+                    <a16:rowId xmlns:a16="http://schemas.microsoft.com/office/drawing/2014/main" val="10005"/>
+                  </a:ext>
+                </a:extLst>
               </a:tr>
               <a:tr h="457200">
                 <a:tc>
@@ -5863,6 +6784,11 @@
                     </a:solidFill>
                   </a:tcPr>
                 </a:tc>
+                <a:extLst>
+                  <a:ext uri="{0D108BD9-81ED-4DB2-BD59-A6C34878D82A}">
+                    <a16:rowId xmlns:a16="http://schemas.microsoft.com/office/drawing/2014/main" val="10006"/>
+                  </a:ext>
+                </a:extLst>
               </a:tr>
               <a:tr h="457200">
                 <a:tc>
@@ -5934,6 +6860,11 @@
                     </a:solidFill>
                   </a:tcPr>
                 </a:tc>
+                <a:extLst>
+                  <a:ext uri="{0D108BD9-81ED-4DB2-BD59-A6C34878D82A}">
+                    <a16:rowId xmlns:a16="http://schemas.microsoft.com/office/drawing/2014/main" val="10007"/>
+                  </a:ext>
+                </a:extLst>
               </a:tr>
             </a:tbl>
           </a:graphicData>
@@ -5956,7 +6887,7 @@
           <a:noFill/>
         </p:spPr>
         <p:txBody>
-          <a:bodyPr wrap="square" anchor="t" lIns="0" rIns="0" tIns="0" bIns="0">
+          <a:bodyPr wrap="square" lIns="0" tIns="0" rIns="0" bIns="0" anchor="t">
             <a:spAutoFit/>
           </a:bodyPr>
           <a:lstStyle/>
@@ -5995,7 +6926,7 @@
           <a:noFill/>
         </p:spPr>
         <p:txBody>
-          <a:bodyPr wrap="square" anchor="t" lIns="0" rIns="0" tIns="0" bIns="0">
+          <a:bodyPr wrap="square" lIns="0" tIns="0" rIns="0" bIns="0" anchor="t">
             <a:spAutoFit/>
           </a:bodyPr>
           <a:lstStyle/>
@@ -6022,7 +6953,7 @@
 </file>
 
 <file path=ppt/slides/slide14.xml><?xml version="1.0" encoding="utf-8"?>
-<p:sld xmlns:a="http://schemas.openxmlformats.org/drawingml/2006/main" xmlns:p="http://schemas.openxmlformats.org/presentationml/2006/main" xmlns:r="http://schemas.openxmlformats.org/officeDocument/2006/relationships">
+<p:sld xmlns:a="http://schemas.openxmlformats.org/drawingml/2006/main" xmlns:r="http://schemas.openxmlformats.org/officeDocument/2006/relationships" xmlns:p="http://schemas.openxmlformats.org/presentationml/2006/main">
   <p:cSld>
     <p:spTree>
       <p:nvGrpSpPr>
@@ -6030,7 +6961,14 @@
         <p:cNvGrpSpPr/>
         <p:nvPr/>
       </p:nvGrpSpPr>
-      <p:grpSpPr/>
+      <p:grpSpPr>
+        <a:xfrm>
+          <a:off x="0" y="0"/>
+          <a:ext cx="0" cy="0"/>
+          <a:chOff x="0" y="0"/>
+          <a:chExt cx="0" cy="0"/>
+        </a:xfrm>
+      </p:grpSpPr>
       <p:sp>
         <p:nvSpPr>
           <p:cNvPr id="2" name="TextBox 1"/>
@@ -6048,7 +6986,7 @@
           <a:noFill/>
         </p:spPr>
         <p:txBody>
-          <a:bodyPr wrap="square" anchor="t" lIns="0" rIns="0" tIns="0" bIns="0">
+          <a:bodyPr wrap="square" lIns="0" tIns="0" rIns="0" bIns="0" anchor="t">
             <a:spAutoFit/>
           </a:bodyPr>
           <a:lstStyle/>
@@ -6087,7 +7025,7 @@
           <a:noFill/>
         </p:spPr>
         <p:txBody>
-          <a:bodyPr wrap="square" anchor="t" lIns="0" rIns="0" tIns="0" bIns="0">
+          <a:bodyPr wrap="square" lIns="0" tIns="0" rIns="0" bIns="0" anchor="t">
             <a:spAutoFit/>
           </a:bodyPr>
           <a:lstStyle/>
@@ -6150,7 +7088,7 @@
           <a:noFill/>
         </p:spPr>
         <p:txBody>
-          <a:bodyPr wrap="square" anchor="t" lIns="0" rIns="0" tIns="0" bIns="0">
+          <a:bodyPr wrap="square" lIns="0" tIns="0" rIns="0" bIns="0" anchor="t">
             <a:spAutoFit/>
           </a:bodyPr>
           <a:lstStyle/>
@@ -6177,7 +7115,7 @@
 </file>
 
 <file path=ppt/slides/slide15.xml><?xml version="1.0" encoding="utf-8"?>
-<p:sld xmlns:a="http://schemas.openxmlformats.org/drawingml/2006/main" xmlns:p="http://schemas.openxmlformats.org/presentationml/2006/main" xmlns:r="http://schemas.openxmlformats.org/officeDocument/2006/relationships">
+<p:sld xmlns:a="http://schemas.openxmlformats.org/drawingml/2006/main" xmlns:r="http://schemas.openxmlformats.org/officeDocument/2006/relationships" xmlns:p="http://schemas.openxmlformats.org/presentationml/2006/main">
   <p:cSld>
     <p:spTree>
       <p:nvGrpSpPr>
@@ -6185,7 +7123,14 @@
         <p:cNvGrpSpPr/>
         <p:nvPr/>
       </p:nvGrpSpPr>
-      <p:grpSpPr/>
+      <p:grpSpPr>
+        <a:xfrm>
+          <a:off x="0" y="0"/>
+          <a:ext cx="0" cy="0"/>
+          <a:chOff x="0" y="0"/>
+          <a:chExt cx="0" cy="0"/>
+        </a:xfrm>
+      </p:grpSpPr>
       <p:sp>
         <p:nvSpPr>
           <p:cNvPr id="2" name="TextBox 1"/>
@@ -6203,7 +7148,7 @@
           <a:noFill/>
         </p:spPr>
         <p:txBody>
-          <a:bodyPr wrap="square" anchor="t" lIns="0" rIns="0" tIns="0" bIns="0">
+          <a:bodyPr wrap="square" lIns="0" tIns="0" rIns="0" bIns="0" anchor="t">
             <a:spAutoFit/>
           </a:bodyPr>
           <a:lstStyle/>
@@ -6242,7 +7187,7 @@
           <a:noFill/>
         </p:spPr>
         <p:txBody>
-          <a:bodyPr wrap="square" anchor="t" lIns="0" rIns="0" tIns="0" bIns="0">
+          <a:bodyPr wrap="square" lIns="0" tIns="0" rIns="0" bIns="0" anchor="t">
             <a:spAutoFit/>
           </a:bodyPr>
           <a:lstStyle/>
@@ -6281,7 +7226,7 @@
           <a:noFill/>
         </p:spPr>
         <p:txBody>
-          <a:bodyPr wrap="square" anchor="t" lIns="0" rIns="0" tIns="0" bIns="0">
+          <a:bodyPr wrap="square" lIns="0" tIns="0" rIns="0" bIns="0" anchor="t">
             <a:spAutoFit/>
           </a:bodyPr>
           <a:lstStyle/>
@@ -6316,7 +7261,7 @@
           <a:noFill/>
         </p:spPr>
         <p:txBody>
-          <a:bodyPr wrap="square" anchor="t" lIns="0" rIns="0" tIns="0" bIns="0">
+          <a:bodyPr wrap="square" lIns="0" tIns="0" rIns="0" bIns="0" anchor="t">
             <a:spAutoFit/>
           </a:bodyPr>
           <a:lstStyle/>
@@ -6355,7 +7300,7 @@
           <a:noFill/>
         </p:spPr>
         <p:txBody>
-          <a:bodyPr wrap="square" anchor="t" lIns="0" rIns="0" tIns="0" bIns="0">
+          <a:bodyPr wrap="square" lIns="0" tIns="0" rIns="0" bIns="0" anchor="t">
             <a:spAutoFit/>
           </a:bodyPr>
           <a:lstStyle/>
@@ -6390,7 +7335,7 @@
           <a:noFill/>
         </p:spPr>
         <p:txBody>
-          <a:bodyPr wrap="square" anchor="t" lIns="0" rIns="0" tIns="0" bIns="0">
+          <a:bodyPr wrap="square" lIns="0" tIns="0" rIns="0" bIns="0" anchor="t">
             <a:spAutoFit/>
           </a:bodyPr>
           <a:lstStyle/>
@@ -6429,7 +7374,7 @@
           <a:noFill/>
         </p:spPr>
         <p:txBody>
-          <a:bodyPr wrap="square" anchor="t" lIns="0" rIns="0" tIns="0" bIns="0">
+          <a:bodyPr wrap="square" lIns="0" tIns="0" rIns="0" bIns="0" anchor="t">
             <a:spAutoFit/>
           </a:bodyPr>
           <a:lstStyle/>
@@ -6464,7 +7409,7 @@
           <a:noFill/>
         </p:spPr>
         <p:txBody>
-          <a:bodyPr wrap="square" anchor="t" lIns="0" rIns="0" tIns="0" bIns="0">
+          <a:bodyPr wrap="square" lIns="0" tIns="0" rIns="0" bIns="0" anchor="t">
             <a:spAutoFit/>
           </a:bodyPr>
           <a:lstStyle/>
@@ -6503,7 +7448,7 @@
           <a:noFill/>
         </p:spPr>
         <p:txBody>
-          <a:bodyPr wrap="square" anchor="t" lIns="0" rIns="0" tIns="0" bIns="0">
+          <a:bodyPr wrap="square" lIns="0" tIns="0" rIns="0" bIns="0" anchor="t">
             <a:spAutoFit/>
           </a:bodyPr>
           <a:lstStyle/>
@@ -6538,7 +7483,7 @@
           <a:noFill/>
         </p:spPr>
         <p:txBody>
-          <a:bodyPr wrap="square" anchor="t" lIns="0" rIns="0" tIns="0" bIns="0">
+          <a:bodyPr wrap="square" lIns="0" tIns="0" rIns="0" bIns="0" anchor="t">
             <a:spAutoFit/>
           </a:bodyPr>
           <a:lstStyle/>
@@ -6577,7 +7522,7 @@
           <a:noFill/>
         </p:spPr>
         <p:txBody>
-          <a:bodyPr wrap="square" anchor="t" lIns="0" rIns="0" tIns="0" bIns="0">
+          <a:bodyPr wrap="square" lIns="0" tIns="0" rIns="0" bIns="0" anchor="t">
             <a:spAutoFit/>
           </a:bodyPr>
           <a:lstStyle/>
@@ -6604,7 +7549,7 @@
 </file>
 
 <file path=ppt/slides/slide16.xml><?xml version="1.0" encoding="utf-8"?>
-<p:sld xmlns:a="http://schemas.openxmlformats.org/drawingml/2006/main" xmlns:p="http://schemas.openxmlformats.org/presentationml/2006/main" xmlns:r="http://schemas.openxmlformats.org/officeDocument/2006/relationships">
+<p:sld xmlns:a="http://schemas.openxmlformats.org/drawingml/2006/main" xmlns:r="http://schemas.openxmlformats.org/officeDocument/2006/relationships" xmlns:p="http://schemas.openxmlformats.org/presentationml/2006/main">
   <p:cSld>
     <p:spTree>
       <p:nvGrpSpPr>
@@ -6612,7 +7557,14 @@
         <p:cNvGrpSpPr/>
         <p:nvPr/>
       </p:nvGrpSpPr>
-      <p:grpSpPr/>
+      <p:grpSpPr>
+        <a:xfrm>
+          <a:off x="0" y="0"/>
+          <a:ext cx="0" cy="0"/>
+          <a:chOff x="0" y="0"/>
+          <a:chExt cx="0" cy="0"/>
+        </a:xfrm>
+      </p:grpSpPr>
       <p:sp>
         <p:nvSpPr>
           <p:cNvPr id="2" name="TextBox 1"/>
@@ -6630,7 +7582,7 @@
           <a:noFill/>
         </p:spPr>
         <p:txBody>
-          <a:bodyPr wrap="square" anchor="t" lIns="0" rIns="0" tIns="0" bIns="0">
+          <a:bodyPr wrap="square" lIns="0" tIns="0" rIns="0" bIns="0" anchor="t">
             <a:spAutoFit/>
           </a:bodyPr>
           <a:lstStyle/>
@@ -6669,7 +7621,7 @@
           <a:noFill/>
         </p:spPr>
         <p:txBody>
-          <a:bodyPr wrap="square" anchor="t" lIns="0" rIns="0" tIns="0" bIns="0">
+          <a:bodyPr wrap="square" lIns="0" tIns="0" rIns="0" bIns="0" anchor="t">
             <a:spAutoFit/>
           </a:bodyPr>
           <a:lstStyle/>
@@ -6708,7 +7660,7 @@
           <a:noFill/>
         </p:spPr>
         <p:txBody>
-          <a:bodyPr wrap="square" anchor="t" lIns="0" rIns="0" tIns="0" bIns="0">
+          <a:bodyPr wrap="square" lIns="0" tIns="0" rIns="0" bIns="0" anchor="t">
             <a:spAutoFit/>
           </a:bodyPr>
           <a:lstStyle/>
@@ -6743,7 +7695,7 @@
           <a:noFill/>
         </p:spPr>
         <p:txBody>
-          <a:bodyPr wrap="square" anchor="t" lIns="0" rIns="0" tIns="0" bIns="0">
+          <a:bodyPr wrap="square" lIns="0" tIns="0" rIns="0" bIns="0" anchor="t">
             <a:spAutoFit/>
           </a:bodyPr>
           <a:lstStyle/>
@@ -6778,7 +7730,7 @@
           <a:noFill/>
         </p:spPr>
         <p:txBody>
-          <a:bodyPr wrap="square" anchor="t" lIns="0" rIns="0" tIns="0" bIns="0">
+          <a:bodyPr wrap="square" lIns="0" tIns="0" rIns="0" bIns="0" anchor="t">
             <a:spAutoFit/>
           </a:bodyPr>
           <a:lstStyle/>
@@ -6813,7 +7765,7 @@
           <a:noFill/>
         </p:spPr>
         <p:txBody>
-          <a:bodyPr wrap="square" anchor="t" lIns="0" rIns="0" tIns="0" bIns="0">
+          <a:bodyPr wrap="square" lIns="0" tIns="0" rIns="0" bIns="0" anchor="t">
             <a:spAutoFit/>
           </a:bodyPr>
           <a:lstStyle/>
@@ -6848,7 +7800,7 @@
           <a:noFill/>
         </p:spPr>
         <p:txBody>
-          <a:bodyPr wrap="square" anchor="t" lIns="0" rIns="0" tIns="0" bIns="0">
+          <a:bodyPr wrap="square" lIns="0" tIns="0" rIns="0" bIns="0" anchor="t">
             <a:spAutoFit/>
           </a:bodyPr>
           <a:lstStyle/>
@@ -6883,7 +7835,7 @@
           <a:noFill/>
         </p:spPr>
         <p:txBody>
-          <a:bodyPr wrap="square" anchor="t" lIns="0" rIns="0" tIns="0" bIns="0">
+          <a:bodyPr wrap="square" lIns="0" tIns="0" rIns="0" bIns="0" anchor="t">
             <a:spAutoFit/>
           </a:bodyPr>
           <a:lstStyle/>
@@ -6918,7 +7870,7 @@
           <a:noFill/>
         </p:spPr>
         <p:txBody>
-          <a:bodyPr wrap="square" anchor="t" lIns="0" rIns="0" tIns="0" bIns="0">
+          <a:bodyPr wrap="square" lIns="0" tIns="0" rIns="0" bIns="0" anchor="t">
             <a:spAutoFit/>
           </a:bodyPr>
           <a:lstStyle/>
@@ -6953,7 +7905,7 @@
           <a:noFill/>
         </p:spPr>
         <p:txBody>
-          <a:bodyPr wrap="square" anchor="t" lIns="0" rIns="0" tIns="0" bIns="0">
+          <a:bodyPr wrap="square" lIns="0" tIns="0" rIns="0" bIns="0" anchor="t">
             <a:spAutoFit/>
           </a:bodyPr>
           <a:lstStyle/>
@@ -6988,7 +7940,7 @@
           <a:noFill/>
         </p:spPr>
         <p:txBody>
-          <a:bodyPr wrap="square" anchor="t" lIns="0" rIns="0" tIns="0" bIns="0">
+          <a:bodyPr wrap="square" lIns="0" tIns="0" rIns="0" bIns="0" anchor="t">
             <a:spAutoFit/>
           </a:bodyPr>
           <a:lstStyle/>
@@ -7024,7 +7976,7 @@
         </p:xfrm>
         <a:graphic>
           <a:graphicData uri="http://schemas.openxmlformats.org/drawingml/2006/chart">
-            <c:chart xmlns:c="http://schemas.openxmlformats.org/drawingml/2006/chart" r:id="rId2"/>
+            <c:chart xmlns:c="http://schemas.openxmlformats.org/drawingml/2006/chart" xmlns:r="http://schemas.openxmlformats.org/officeDocument/2006/relationships" r:id="rId2"/>
           </a:graphicData>
         </a:graphic>
       </p:graphicFrame>
@@ -7045,7 +7997,7 @@
           <a:noFill/>
         </p:spPr>
         <p:txBody>
-          <a:bodyPr wrap="square" anchor="t" lIns="0" rIns="0" tIns="0" bIns="0">
+          <a:bodyPr wrap="square" lIns="0" tIns="0" rIns="0" bIns="0" anchor="t">
             <a:spAutoFit/>
           </a:bodyPr>
           <a:lstStyle/>
@@ -7084,7 +8036,7 @@
           <a:noFill/>
         </p:spPr>
         <p:txBody>
-          <a:bodyPr wrap="square" anchor="t" lIns="0" rIns="0" tIns="0" bIns="0">
+          <a:bodyPr wrap="square" lIns="0" tIns="0" rIns="0" bIns="0" anchor="t">
             <a:spAutoFit/>
           </a:bodyPr>
           <a:lstStyle/>
@@ -7111,7 +8063,7 @@
 </file>
 
 <file path=ppt/slides/slide17.xml><?xml version="1.0" encoding="utf-8"?>
-<p:sld xmlns:a="http://schemas.openxmlformats.org/drawingml/2006/main" xmlns:p="http://schemas.openxmlformats.org/presentationml/2006/main" xmlns:r="http://schemas.openxmlformats.org/officeDocument/2006/relationships">
+<p:sld xmlns:a="http://schemas.openxmlformats.org/drawingml/2006/main" xmlns:r="http://schemas.openxmlformats.org/officeDocument/2006/relationships" xmlns:p="http://schemas.openxmlformats.org/presentationml/2006/main">
   <p:cSld>
     <p:spTree>
       <p:nvGrpSpPr>
@@ -7119,7 +8071,14 @@
         <p:cNvGrpSpPr/>
         <p:nvPr/>
       </p:nvGrpSpPr>
-      <p:grpSpPr/>
+      <p:grpSpPr>
+        <a:xfrm>
+          <a:off x="0" y="0"/>
+          <a:ext cx="0" cy="0"/>
+          <a:chOff x="0" y="0"/>
+          <a:chExt cx="0" cy="0"/>
+        </a:xfrm>
+      </p:grpSpPr>
       <p:sp>
         <p:nvSpPr>
           <p:cNvPr id="2" name="TextBox 1"/>
@@ -7137,7 +8096,7 @@
           <a:noFill/>
         </p:spPr>
         <p:txBody>
-          <a:bodyPr wrap="square" anchor="t" lIns="0" rIns="0" tIns="0" bIns="0">
+          <a:bodyPr wrap="square" lIns="0" tIns="0" rIns="0" bIns="0" anchor="t">
             <a:spAutoFit/>
           </a:bodyPr>
           <a:lstStyle/>
@@ -7176,7 +8135,7 @@
           <a:noFill/>
         </p:spPr>
         <p:txBody>
-          <a:bodyPr wrap="square" anchor="t" lIns="0" rIns="0" tIns="0" bIns="0">
+          <a:bodyPr wrap="square" lIns="0" tIns="0" rIns="0" bIns="0" anchor="t">
             <a:spAutoFit/>
           </a:bodyPr>
           <a:lstStyle/>
@@ -7239,7 +8198,7 @@
           <a:noFill/>
         </p:spPr>
         <p:txBody>
-          <a:bodyPr wrap="square" anchor="t" lIns="0" rIns="0" tIns="0" bIns="0">
+          <a:bodyPr wrap="square" lIns="0" tIns="0" rIns="0" bIns="0" anchor="t">
             <a:spAutoFit/>
           </a:bodyPr>
           <a:lstStyle/>
@@ -7266,7 +8225,7 @@
 </file>
 
 <file path=ppt/slides/slide18.xml><?xml version="1.0" encoding="utf-8"?>
-<p:sld xmlns:a="http://schemas.openxmlformats.org/drawingml/2006/main" xmlns:p="http://schemas.openxmlformats.org/presentationml/2006/main" xmlns:r="http://schemas.openxmlformats.org/officeDocument/2006/relationships">
+<p:sld xmlns:a="http://schemas.openxmlformats.org/drawingml/2006/main" xmlns:r="http://schemas.openxmlformats.org/officeDocument/2006/relationships" xmlns:p="http://schemas.openxmlformats.org/presentationml/2006/main">
   <p:cSld>
     <p:spTree>
       <p:nvGrpSpPr>
@@ -7274,7 +8233,14 @@
         <p:cNvGrpSpPr/>
         <p:nvPr/>
       </p:nvGrpSpPr>
-      <p:grpSpPr/>
+      <p:grpSpPr>
+        <a:xfrm>
+          <a:off x="0" y="0"/>
+          <a:ext cx="0" cy="0"/>
+          <a:chOff x="0" y="0"/>
+          <a:chExt cx="0" cy="0"/>
+        </a:xfrm>
+      </p:grpSpPr>
       <p:sp>
         <p:nvSpPr>
           <p:cNvPr id="2" name="TextBox 1"/>
@@ -7292,7 +8258,7 @@
           <a:noFill/>
         </p:spPr>
         <p:txBody>
-          <a:bodyPr wrap="square" anchor="t" lIns="0" rIns="0" tIns="0" bIns="0">
+          <a:bodyPr wrap="square" lIns="0" tIns="0" rIns="0" bIns="0" anchor="t">
             <a:spAutoFit/>
           </a:bodyPr>
           <a:lstStyle/>
@@ -7331,7 +8297,7 @@
           <a:noFill/>
         </p:spPr>
         <p:txBody>
-          <a:bodyPr wrap="square" anchor="t" lIns="0" rIns="0" tIns="0" bIns="0">
+          <a:bodyPr wrap="square" lIns="0" tIns="0" rIns="0" bIns="0" anchor="t">
             <a:spAutoFit/>
           </a:bodyPr>
           <a:lstStyle/>
@@ -7394,7 +8360,7 @@
           <a:noFill/>
         </p:spPr>
         <p:txBody>
-          <a:bodyPr wrap="square" anchor="t" lIns="0" rIns="0" tIns="0" bIns="0">
+          <a:bodyPr wrap="square" lIns="0" tIns="0" rIns="0" bIns="0" anchor="t">
             <a:spAutoFit/>
           </a:bodyPr>
           <a:lstStyle/>
@@ -7421,7 +8387,7 @@
 </file>
 
 <file path=ppt/slides/slide19.xml><?xml version="1.0" encoding="utf-8"?>
-<p:sld xmlns:a="http://schemas.openxmlformats.org/drawingml/2006/main" xmlns:p="http://schemas.openxmlformats.org/presentationml/2006/main" xmlns:r="http://schemas.openxmlformats.org/officeDocument/2006/relationships">
+<p:sld xmlns:a="http://schemas.openxmlformats.org/drawingml/2006/main" xmlns:r="http://schemas.openxmlformats.org/officeDocument/2006/relationships" xmlns:p="http://schemas.openxmlformats.org/presentationml/2006/main">
   <p:cSld>
     <p:spTree>
       <p:nvGrpSpPr>
@@ -7429,7 +8395,14 @@
         <p:cNvGrpSpPr/>
         <p:nvPr/>
       </p:nvGrpSpPr>
-      <p:grpSpPr/>
+      <p:grpSpPr>
+        <a:xfrm>
+          <a:off x="0" y="0"/>
+          <a:ext cx="0" cy="0"/>
+          <a:chOff x="0" y="0"/>
+          <a:chExt cx="0" cy="0"/>
+        </a:xfrm>
+      </p:grpSpPr>
       <p:sp>
         <p:nvSpPr>
           <p:cNvPr id="2" name="TextBox 1"/>
@@ -7447,7 +8420,7 @@
           <a:noFill/>
         </p:spPr>
         <p:txBody>
-          <a:bodyPr wrap="square" anchor="t" lIns="0" rIns="0" tIns="0" bIns="0">
+          <a:bodyPr wrap="square" lIns="0" tIns="0" rIns="0" bIns="0" anchor="t">
             <a:spAutoFit/>
           </a:bodyPr>
           <a:lstStyle/>
@@ -7486,7 +8459,7 @@
           <a:noFill/>
         </p:spPr>
         <p:txBody>
-          <a:bodyPr wrap="square" anchor="t" lIns="0" rIns="0" tIns="0" bIns="0">
+          <a:bodyPr wrap="square" lIns="0" tIns="0" rIns="0" bIns="0" anchor="t">
             <a:spAutoFit/>
           </a:bodyPr>
           <a:lstStyle/>
@@ -7549,7 +8522,7 @@
           <a:noFill/>
         </p:spPr>
         <p:txBody>
-          <a:bodyPr wrap="square" anchor="t" lIns="0" rIns="0" tIns="0" bIns="0">
+          <a:bodyPr wrap="square" lIns="0" tIns="0" rIns="0" bIns="0" anchor="t">
             <a:spAutoFit/>
           </a:bodyPr>
           <a:lstStyle/>
@@ -7576,7 +8549,7 @@
 </file>
 
 <file path=ppt/slides/slide2.xml><?xml version="1.0" encoding="utf-8"?>
-<p:sld xmlns:a="http://schemas.openxmlformats.org/drawingml/2006/main" xmlns:p="http://schemas.openxmlformats.org/presentationml/2006/main" xmlns:r="http://schemas.openxmlformats.org/officeDocument/2006/relationships">
+<p:sld xmlns:a="http://schemas.openxmlformats.org/drawingml/2006/main" xmlns:r="http://schemas.openxmlformats.org/officeDocument/2006/relationships" xmlns:p="http://schemas.openxmlformats.org/presentationml/2006/main">
   <p:cSld>
     <p:spTree>
       <p:nvGrpSpPr>
@@ -7584,7 +8557,14 @@
         <p:cNvGrpSpPr/>
         <p:nvPr/>
       </p:nvGrpSpPr>
-      <p:grpSpPr/>
+      <p:grpSpPr>
+        <a:xfrm>
+          <a:off x="0" y="0"/>
+          <a:ext cx="0" cy="0"/>
+          <a:chOff x="0" y="0"/>
+          <a:chExt cx="0" cy="0"/>
+        </a:xfrm>
+      </p:grpSpPr>
       <p:sp>
         <p:nvSpPr>
           <p:cNvPr id="2" name="TextBox 1"/>
@@ -7602,7 +8582,7 @@
           <a:noFill/>
         </p:spPr>
         <p:txBody>
-          <a:bodyPr wrap="square" anchor="t" lIns="0" rIns="0" tIns="0" bIns="0">
+          <a:bodyPr wrap="square" lIns="0" tIns="0" rIns="0" bIns="0" anchor="t">
             <a:spAutoFit/>
           </a:bodyPr>
           <a:lstStyle/>
@@ -7641,7 +8621,7 @@
           <a:noFill/>
         </p:spPr>
         <p:txBody>
-          <a:bodyPr wrap="square" anchor="t" lIns="0" rIns="0" tIns="0" bIns="0">
+          <a:bodyPr wrap="square" lIns="0" tIns="0" rIns="0" bIns="0" anchor="t">
             <a:spAutoFit/>
           </a:bodyPr>
           <a:lstStyle/>
@@ -7680,7 +8660,7 @@
           <a:noFill/>
         </p:spPr>
         <p:txBody>
-          <a:bodyPr wrap="square" anchor="t" lIns="0" rIns="0" tIns="0" bIns="0">
+          <a:bodyPr wrap="square" lIns="0" tIns="0" rIns="0" bIns="0" anchor="t">
             <a:spAutoFit/>
           </a:bodyPr>
           <a:lstStyle/>
@@ -7715,7 +8695,7 @@
           <a:noFill/>
         </p:spPr>
         <p:txBody>
-          <a:bodyPr wrap="square" anchor="t" lIns="0" rIns="0" tIns="0" bIns="0">
+          <a:bodyPr wrap="square" lIns="0" tIns="0" rIns="0" bIns="0" anchor="t">
             <a:spAutoFit/>
           </a:bodyPr>
           <a:lstStyle/>
@@ -7754,7 +8734,7 @@
           <a:noFill/>
         </p:spPr>
         <p:txBody>
-          <a:bodyPr wrap="square" anchor="t" lIns="0" rIns="0" tIns="0" bIns="0">
+          <a:bodyPr wrap="square" lIns="0" tIns="0" rIns="0" bIns="0" anchor="t">
             <a:spAutoFit/>
           </a:bodyPr>
           <a:lstStyle/>
@@ -7789,7 +8769,7 @@
           <a:noFill/>
         </p:spPr>
         <p:txBody>
-          <a:bodyPr wrap="square" anchor="t" lIns="0" rIns="0" tIns="0" bIns="0">
+          <a:bodyPr wrap="square" lIns="0" tIns="0" rIns="0" bIns="0" anchor="t">
             <a:spAutoFit/>
           </a:bodyPr>
           <a:lstStyle/>
@@ -7828,7 +8808,7 @@
           <a:noFill/>
         </p:spPr>
         <p:txBody>
-          <a:bodyPr wrap="square" anchor="t" lIns="0" rIns="0" tIns="0" bIns="0">
+          <a:bodyPr wrap="square" lIns="0" tIns="0" rIns="0" bIns="0" anchor="t">
             <a:spAutoFit/>
           </a:bodyPr>
           <a:lstStyle/>
@@ -7863,7 +8843,7 @@
           <a:noFill/>
         </p:spPr>
         <p:txBody>
-          <a:bodyPr wrap="square" anchor="t" lIns="0" rIns="0" tIns="0" bIns="0">
+          <a:bodyPr wrap="square" lIns="0" tIns="0" rIns="0" bIns="0" anchor="t">
             <a:spAutoFit/>
           </a:bodyPr>
           <a:lstStyle/>
@@ -7902,7 +8882,7 @@
           <a:noFill/>
         </p:spPr>
         <p:txBody>
-          <a:bodyPr wrap="square" anchor="t" lIns="0" rIns="0" tIns="0" bIns="0">
+          <a:bodyPr wrap="square" lIns="0" tIns="0" rIns="0" bIns="0" anchor="t">
             <a:spAutoFit/>
           </a:bodyPr>
           <a:lstStyle/>
@@ -7929,7 +8909,7 @@
 </file>
 
 <file path=ppt/slides/slide20.xml><?xml version="1.0" encoding="utf-8"?>
-<p:sld xmlns:a="http://schemas.openxmlformats.org/drawingml/2006/main" xmlns:p="http://schemas.openxmlformats.org/presentationml/2006/main" xmlns:r="http://schemas.openxmlformats.org/officeDocument/2006/relationships">
+<p:sld xmlns:a="http://schemas.openxmlformats.org/drawingml/2006/main" xmlns:r="http://schemas.openxmlformats.org/officeDocument/2006/relationships" xmlns:p="http://schemas.openxmlformats.org/presentationml/2006/main">
   <p:cSld>
     <p:spTree>
       <p:nvGrpSpPr>
@@ -7937,7 +8917,14 @@
         <p:cNvGrpSpPr/>
         <p:nvPr/>
       </p:nvGrpSpPr>
-      <p:grpSpPr/>
+      <p:grpSpPr>
+        <a:xfrm>
+          <a:off x="0" y="0"/>
+          <a:ext cx="0" cy="0"/>
+          <a:chOff x="0" y="0"/>
+          <a:chExt cx="0" cy="0"/>
+        </a:xfrm>
+      </p:grpSpPr>
       <p:sp>
         <p:nvSpPr>
           <p:cNvPr id="2" name="TextBox 1"/>
@@ -7955,7 +8942,7 @@
           <a:noFill/>
         </p:spPr>
         <p:txBody>
-          <a:bodyPr wrap="square" anchor="t" lIns="0" rIns="0" tIns="0" bIns="0">
+          <a:bodyPr wrap="square" lIns="0" tIns="0" rIns="0" bIns="0" anchor="t">
             <a:spAutoFit/>
           </a:bodyPr>
           <a:lstStyle/>
@@ -7996,12 +8983,48 @@
                 <a:tableStyleId>{5C22544A-7EE6-4342-B048-85BDC9FD1C3A}</a:tableStyleId>
               </a:tblPr>
               <a:tblGrid>
-                <a:gridCol w="3108960"/>
-                <a:gridCol w="1554480"/>
-                <a:gridCol w="1554480"/>
-                <a:gridCol w="1554480"/>
-                <a:gridCol w="1554480"/>
-                <a:gridCol w="1737360"/>
+                <a:gridCol w="3108960">
+                  <a:extLst>
+                    <a:ext uri="{9D8B030D-6E8A-4147-A177-3AD203B41FA5}">
+                      <a16:colId xmlns:a16="http://schemas.microsoft.com/office/drawing/2014/main" val="20000"/>
+                    </a:ext>
+                  </a:extLst>
+                </a:gridCol>
+                <a:gridCol w="1554480">
+                  <a:extLst>
+                    <a:ext uri="{9D8B030D-6E8A-4147-A177-3AD203B41FA5}">
+                      <a16:colId xmlns:a16="http://schemas.microsoft.com/office/drawing/2014/main" val="20001"/>
+                    </a:ext>
+                  </a:extLst>
+                </a:gridCol>
+                <a:gridCol w="1554480">
+                  <a:extLst>
+                    <a:ext uri="{9D8B030D-6E8A-4147-A177-3AD203B41FA5}">
+                      <a16:colId xmlns:a16="http://schemas.microsoft.com/office/drawing/2014/main" val="20002"/>
+                    </a:ext>
+                  </a:extLst>
+                </a:gridCol>
+                <a:gridCol w="1554480">
+                  <a:extLst>
+                    <a:ext uri="{9D8B030D-6E8A-4147-A177-3AD203B41FA5}">
+                      <a16:colId xmlns:a16="http://schemas.microsoft.com/office/drawing/2014/main" val="20003"/>
+                    </a:ext>
+                  </a:extLst>
+                </a:gridCol>
+                <a:gridCol w="1554480">
+                  <a:extLst>
+                    <a:ext uri="{9D8B030D-6E8A-4147-A177-3AD203B41FA5}">
+                      <a16:colId xmlns:a16="http://schemas.microsoft.com/office/drawing/2014/main" val="20004"/>
+                    </a:ext>
+                  </a:extLst>
+                </a:gridCol>
+                <a:gridCol w="1737360">
+                  <a:extLst>
+                    <a:ext uri="{9D8B030D-6E8A-4147-A177-3AD203B41FA5}">
+                      <a16:colId xmlns:a16="http://schemas.microsoft.com/office/drawing/2014/main" val="20005"/>
+                    </a:ext>
+                  </a:extLst>
+                </a:gridCol>
               </a:tblGrid>
               <a:tr h="329184">
                 <a:tc>
@@ -8021,7 +9044,7 @@
                       </a:r>
                     </a:p>
                   </a:txBody>
-                  <a:tcPr marL="91440" marR="91440" marT="27432" marB="27432">
+                  <a:tcPr marT="27432" marB="27432">
                     <a:solidFill>
                       <a:srgbClr val="E8E8E8"/>
                     </a:solidFill>
@@ -8044,7 +9067,7 @@
                       </a:r>
                     </a:p>
                   </a:txBody>
-                  <a:tcPr marL="91440" marR="91440" marT="27432" marB="27432">
+                  <a:tcPr marT="27432" marB="27432">
                     <a:solidFill>
                       <a:srgbClr val="E8E8E8"/>
                     </a:solidFill>
@@ -8067,7 +9090,7 @@
                       </a:r>
                     </a:p>
                   </a:txBody>
-                  <a:tcPr marL="91440" marR="91440" marT="27432" marB="27432">
+                  <a:tcPr marT="27432" marB="27432">
                     <a:solidFill>
                       <a:srgbClr val="E8E8E8"/>
                     </a:solidFill>
@@ -8090,7 +9113,7 @@
                       </a:r>
                     </a:p>
                   </a:txBody>
-                  <a:tcPr marL="91440" marR="91440" marT="27432" marB="27432">
+                  <a:tcPr marT="27432" marB="27432">
                     <a:solidFill>
                       <a:srgbClr val="E8E8E8"/>
                     </a:solidFill>
@@ -8113,7 +9136,7 @@
                       </a:r>
                     </a:p>
                   </a:txBody>
-                  <a:tcPr marL="91440" marR="91440" marT="27432" marB="27432">
+                  <a:tcPr marT="27432" marB="27432">
                     <a:solidFill>
                       <a:srgbClr val="E8E8E8"/>
                     </a:solidFill>
@@ -8136,12 +9159,17 @@
                       </a:r>
                     </a:p>
                   </a:txBody>
-                  <a:tcPr marL="91440" marR="91440" marT="27432" marB="27432">
+                  <a:tcPr marT="27432" marB="27432">
                     <a:solidFill>
                       <a:srgbClr val="E8E8E8"/>
                     </a:solidFill>
                   </a:tcPr>
                 </a:tc>
+                <a:extLst>
+                  <a:ext uri="{0D108BD9-81ED-4DB2-BD59-A6C34878D82A}">
+                    <a16:rowId xmlns:a16="http://schemas.microsoft.com/office/drawing/2014/main" val="10000"/>
+                  </a:ext>
+                </a:extLst>
               </a:tr>
               <a:tr h="329184">
                 <a:tc>
@@ -8161,7 +9189,7 @@
                       </a:r>
                     </a:p>
                   </a:txBody>
-                  <a:tcPr marL="91440" marR="91440" marT="27432" marB="27432">
+                  <a:tcPr marT="27432" marB="27432">
                     <a:solidFill>
                       <a:srgbClr val="FFFFFF"/>
                     </a:solidFill>
@@ -8184,7 +9212,7 @@
                       </a:r>
                     </a:p>
                   </a:txBody>
-                  <a:tcPr marL="91440" marR="91440" marT="27432" marB="27432">
+                  <a:tcPr marT="27432" marB="27432">
                     <a:solidFill>
                       <a:srgbClr val="FFFFFF"/>
                     </a:solidFill>
@@ -8207,7 +9235,7 @@
                       </a:r>
                     </a:p>
                   </a:txBody>
-                  <a:tcPr marL="91440" marR="91440" marT="27432" marB="27432">
+                  <a:tcPr marT="27432" marB="27432">
                     <a:solidFill>
                       <a:srgbClr val="FFFFFF"/>
                     </a:solidFill>
@@ -8230,7 +9258,7 @@
                       </a:r>
                     </a:p>
                   </a:txBody>
-                  <a:tcPr marL="91440" marR="91440" marT="27432" marB="27432">
+                  <a:tcPr marT="27432" marB="27432">
                     <a:solidFill>
                       <a:srgbClr val="FFFFFF"/>
                     </a:solidFill>
@@ -8253,7 +9281,7 @@
                       </a:r>
                     </a:p>
                   </a:txBody>
-                  <a:tcPr marL="91440" marR="91440" marT="27432" marB="27432">
+                  <a:tcPr marT="27432" marB="27432">
                     <a:solidFill>
                       <a:srgbClr val="FFFFFF"/>
                     </a:solidFill>
@@ -8276,12 +9304,17 @@
                       </a:r>
                     </a:p>
                   </a:txBody>
-                  <a:tcPr marL="91440" marR="91440" marT="27432" marB="27432">
+                  <a:tcPr marT="27432" marB="27432">
                     <a:solidFill>
                       <a:srgbClr val="FFFFFF"/>
                     </a:solidFill>
                   </a:tcPr>
                 </a:tc>
+                <a:extLst>
+                  <a:ext uri="{0D108BD9-81ED-4DB2-BD59-A6C34878D82A}">
+                    <a16:rowId xmlns:a16="http://schemas.microsoft.com/office/drawing/2014/main" val="10001"/>
+                  </a:ext>
+                </a:extLst>
               </a:tr>
               <a:tr h="329184">
                 <a:tc>
@@ -8301,7 +9334,7 @@
                       </a:r>
                     </a:p>
                   </a:txBody>
-                  <a:tcPr marL="91440" marR="91440" marT="27432" marB="27432">
+                  <a:tcPr marT="27432" marB="27432">
                     <a:solidFill>
                       <a:srgbClr val="FFFFFF"/>
                     </a:solidFill>
@@ -8324,7 +9357,7 @@
                       </a:r>
                     </a:p>
                   </a:txBody>
-                  <a:tcPr marL="91440" marR="91440" marT="27432" marB="27432">
+                  <a:tcPr marT="27432" marB="27432">
                     <a:solidFill>
                       <a:srgbClr val="FFFFFF"/>
                     </a:solidFill>
@@ -8347,7 +9380,7 @@
                       </a:r>
                     </a:p>
                   </a:txBody>
-                  <a:tcPr marL="91440" marR="91440" marT="27432" marB="27432">
+                  <a:tcPr marT="27432" marB="27432">
                     <a:solidFill>
                       <a:srgbClr val="FFFFFF"/>
                     </a:solidFill>
@@ -8370,7 +9403,7 @@
                       </a:r>
                     </a:p>
                   </a:txBody>
-                  <a:tcPr marL="91440" marR="91440" marT="27432" marB="27432">
+                  <a:tcPr marT="27432" marB="27432">
                     <a:solidFill>
                       <a:srgbClr val="FFFFFF"/>
                     </a:solidFill>
@@ -8393,7 +9426,7 @@
                       </a:r>
                     </a:p>
                   </a:txBody>
-                  <a:tcPr marL="91440" marR="91440" marT="27432" marB="27432">
+                  <a:tcPr marT="27432" marB="27432">
                     <a:solidFill>
                       <a:srgbClr val="FFFFFF"/>
                     </a:solidFill>
@@ -8416,12 +9449,17 @@
                       </a:r>
                     </a:p>
                   </a:txBody>
-                  <a:tcPr marL="91440" marR="91440" marT="27432" marB="27432">
+                  <a:tcPr marT="27432" marB="27432">
                     <a:solidFill>
                       <a:srgbClr val="FFFFFF"/>
                     </a:solidFill>
                   </a:tcPr>
                 </a:tc>
+                <a:extLst>
+                  <a:ext uri="{0D108BD9-81ED-4DB2-BD59-A6C34878D82A}">
+                    <a16:rowId xmlns:a16="http://schemas.microsoft.com/office/drawing/2014/main" val="10002"/>
+                  </a:ext>
+                </a:extLst>
               </a:tr>
               <a:tr h="329184">
                 <a:tc>
@@ -8441,7 +9479,7 @@
                       </a:r>
                     </a:p>
                   </a:txBody>
-                  <a:tcPr marL="91440" marR="91440" marT="27432" marB="27432">
+                  <a:tcPr marT="27432" marB="27432">
                     <a:solidFill>
                       <a:srgbClr val="FFFFFF"/>
                     </a:solidFill>
@@ -8464,7 +9502,7 @@
                       </a:r>
                     </a:p>
                   </a:txBody>
-                  <a:tcPr marL="91440" marR="91440" marT="27432" marB="27432">
+                  <a:tcPr marT="27432" marB="27432">
                     <a:solidFill>
                       <a:srgbClr val="FFFFFF"/>
                     </a:solidFill>
@@ -8487,7 +9525,7 @@
                       </a:r>
                     </a:p>
                   </a:txBody>
-                  <a:tcPr marL="91440" marR="91440" marT="27432" marB="27432">
+                  <a:tcPr marT="27432" marB="27432">
                     <a:solidFill>
                       <a:srgbClr val="FFFFFF"/>
                     </a:solidFill>
@@ -8510,7 +9548,7 @@
                       </a:r>
                     </a:p>
                   </a:txBody>
-                  <a:tcPr marL="91440" marR="91440" marT="27432" marB="27432">
+                  <a:tcPr marT="27432" marB="27432">
                     <a:solidFill>
                       <a:srgbClr val="FFFFFF"/>
                     </a:solidFill>
@@ -8533,7 +9571,7 @@
                       </a:r>
                     </a:p>
                   </a:txBody>
-                  <a:tcPr marL="91440" marR="91440" marT="27432" marB="27432">
+                  <a:tcPr marT="27432" marB="27432">
                     <a:solidFill>
                       <a:srgbClr val="FFFFFF"/>
                     </a:solidFill>
@@ -8556,12 +9594,17 @@
                       </a:r>
                     </a:p>
                   </a:txBody>
-                  <a:tcPr marL="91440" marR="91440" marT="27432" marB="27432">
+                  <a:tcPr marT="27432" marB="27432">
                     <a:solidFill>
                       <a:srgbClr val="FFFFFF"/>
                     </a:solidFill>
                   </a:tcPr>
                 </a:tc>
+                <a:extLst>
+                  <a:ext uri="{0D108BD9-81ED-4DB2-BD59-A6C34878D82A}">
+                    <a16:rowId xmlns:a16="http://schemas.microsoft.com/office/drawing/2014/main" val="10003"/>
+                  </a:ext>
+                </a:extLst>
               </a:tr>
               <a:tr h="329184">
                 <a:tc>
@@ -8581,7 +9624,7 @@
                       </a:r>
                     </a:p>
                   </a:txBody>
-                  <a:tcPr marL="91440" marR="91440" marT="27432" marB="27432">
+                  <a:tcPr marT="27432" marB="27432">
                     <a:solidFill>
                       <a:srgbClr val="FFFFFF"/>
                     </a:solidFill>
@@ -8604,7 +9647,7 @@
                       </a:r>
                     </a:p>
                   </a:txBody>
-                  <a:tcPr marL="91440" marR="91440" marT="27432" marB="27432">
+                  <a:tcPr marT="27432" marB="27432">
                     <a:solidFill>
                       <a:srgbClr val="FFFFFF"/>
                     </a:solidFill>
@@ -8627,7 +9670,7 @@
                       </a:r>
                     </a:p>
                   </a:txBody>
-                  <a:tcPr marL="91440" marR="91440" marT="27432" marB="27432">
+                  <a:tcPr marT="27432" marB="27432">
                     <a:solidFill>
                       <a:srgbClr val="FFFFFF"/>
                     </a:solidFill>
@@ -8650,7 +9693,7 @@
                       </a:r>
                     </a:p>
                   </a:txBody>
-                  <a:tcPr marL="91440" marR="91440" marT="27432" marB="27432">
+                  <a:tcPr marT="27432" marB="27432">
                     <a:solidFill>
                       <a:srgbClr val="FFFFFF"/>
                     </a:solidFill>
@@ -8673,7 +9716,7 @@
                       </a:r>
                     </a:p>
                   </a:txBody>
-                  <a:tcPr marL="91440" marR="91440" marT="27432" marB="27432">
+                  <a:tcPr marT="27432" marB="27432">
                     <a:solidFill>
                       <a:srgbClr val="FFFFFF"/>
                     </a:solidFill>
@@ -8696,12 +9739,17 @@
                       </a:r>
                     </a:p>
                   </a:txBody>
-                  <a:tcPr marL="91440" marR="91440" marT="27432" marB="27432">
+                  <a:tcPr marT="27432" marB="27432">
                     <a:solidFill>
                       <a:srgbClr val="FFFFFF"/>
                     </a:solidFill>
                   </a:tcPr>
                 </a:tc>
+                <a:extLst>
+                  <a:ext uri="{0D108BD9-81ED-4DB2-BD59-A6C34878D82A}">
+                    <a16:rowId xmlns:a16="http://schemas.microsoft.com/office/drawing/2014/main" val="10004"/>
+                  </a:ext>
+                </a:extLst>
               </a:tr>
               <a:tr h="329184">
                 <a:tc>
@@ -8721,7 +9769,7 @@
                       </a:r>
                     </a:p>
                   </a:txBody>
-                  <a:tcPr marL="91440" marR="91440" marT="27432" marB="27432">
+                  <a:tcPr marT="27432" marB="27432">
                     <a:solidFill>
                       <a:srgbClr val="FFFFFF"/>
                     </a:solidFill>
@@ -8744,7 +9792,7 @@
                       </a:r>
                     </a:p>
                   </a:txBody>
-                  <a:tcPr marL="91440" marR="91440" marT="27432" marB="27432">
+                  <a:tcPr marT="27432" marB="27432">
                     <a:solidFill>
                       <a:srgbClr val="FFFFFF"/>
                     </a:solidFill>
@@ -8767,7 +9815,7 @@
                       </a:r>
                     </a:p>
                   </a:txBody>
-                  <a:tcPr marL="91440" marR="91440" marT="27432" marB="27432">
+                  <a:tcPr marT="27432" marB="27432">
                     <a:solidFill>
                       <a:srgbClr val="FFFFFF"/>
                     </a:solidFill>
@@ -8790,7 +9838,7 @@
                       </a:r>
                     </a:p>
                   </a:txBody>
-                  <a:tcPr marL="91440" marR="91440" marT="27432" marB="27432">
+                  <a:tcPr marT="27432" marB="27432">
                     <a:solidFill>
                       <a:srgbClr val="FFFFFF"/>
                     </a:solidFill>
@@ -8813,7 +9861,7 @@
                       </a:r>
                     </a:p>
                   </a:txBody>
-                  <a:tcPr marL="91440" marR="91440" marT="27432" marB="27432">
+                  <a:tcPr marT="27432" marB="27432">
                     <a:solidFill>
                       <a:srgbClr val="FFFFFF"/>
                     </a:solidFill>
@@ -8836,12 +9884,17 @@
                       </a:r>
                     </a:p>
                   </a:txBody>
-                  <a:tcPr marL="91440" marR="91440" marT="27432" marB="27432">
+                  <a:tcPr marT="27432" marB="27432">
                     <a:solidFill>
                       <a:srgbClr val="FFFFFF"/>
                     </a:solidFill>
                   </a:tcPr>
                 </a:tc>
+                <a:extLst>
+                  <a:ext uri="{0D108BD9-81ED-4DB2-BD59-A6C34878D82A}">
+                    <a16:rowId xmlns:a16="http://schemas.microsoft.com/office/drawing/2014/main" val="10005"/>
+                  </a:ext>
+                </a:extLst>
               </a:tr>
               <a:tr h="329184">
                 <a:tc>
@@ -8861,7 +9914,7 @@
                       </a:r>
                     </a:p>
                   </a:txBody>
-                  <a:tcPr marL="91440" marR="91440" marT="27432" marB="27432">
+                  <a:tcPr marT="27432" marB="27432">
                     <a:solidFill>
                       <a:srgbClr val="FFFFFF"/>
                     </a:solidFill>
@@ -8884,7 +9937,7 @@
                       </a:r>
                     </a:p>
                   </a:txBody>
-                  <a:tcPr marL="91440" marR="91440" marT="27432" marB="27432">
+                  <a:tcPr marT="27432" marB="27432">
                     <a:solidFill>
                       <a:srgbClr val="FFFFFF"/>
                     </a:solidFill>
@@ -8907,7 +9960,7 @@
                       </a:r>
                     </a:p>
                   </a:txBody>
-                  <a:tcPr marL="91440" marR="91440" marT="27432" marB="27432">
+                  <a:tcPr marT="27432" marB="27432">
                     <a:solidFill>
                       <a:srgbClr val="FFFFFF"/>
                     </a:solidFill>
@@ -8930,7 +9983,7 @@
                       </a:r>
                     </a:p>
                   </a:txBody>
-                  <a:tcPr marL="91440" marR="91440" marT="27432" marB="27432">
+                  <a:tcPr marT="27432" marB="27432">
                     <a:solidFill>
                       <a:srgbClr val="FFFFFF"/>
                     </a:solidFill>
@@ -8953,7 +10006,7 @@
                       </a:r>
                     </a:p>
                   </a:txBody>
-                  <a:tcPr marL="91440" marR="91440" marT="27432" marB="27432">
+                  <a:tcPr marT="27432" marB="27432">
                     <a:solidFill>
                       <a:srgbClr val="FFFFFF"/>
                     </a:solidFill>
@@ -8976,12 +10029,17 @@
                       </a:r>
                     </a:p>
                   </a:txBody>
-                  <a:tcPr marL="91440" marR="91440" marT="27432" marB="27432">
+                  <a:tcPr marT="27432" marB="27432">
                     <a:solidFill>
                       <a:srgbClr val="FFFFFF"/>
                     </a:solidFill>
                   </a:tcPr>
                 </a:tc>
+                <a:extLst>
+                  <a:ext uri="{0D108BD9-81ED-4DB2-BD59-A6C34878D82A}">
+                    <a16:rowId xmlns:a16="http://schemas.microsoft.com/office/drawing/2014/main" val="10006"/>
+                  </a:ext>
+                </a:extLst>
               </a:tr>
               <a:tr h="329184">
                 <a:tc>
@@ -9001,7 +10059,7 @@
                       </a:r>
                     </a:p>
                   </a:txBody>
-                  <a:tcPr marL="91440" marR="91440" marT="27432" marB="27432">
+                  <a:tcPr marT="27432" marB="27432">
                     <a:solidFill>
                       <a:srgbClr val="FFFFFF"/>
                     </a:solidFill>
@@ -9024,7 +10082,7 @@
                       </a:r>
                     </a:p>
                   </a:txBody>
-                  <a:tcPr marL="91440" marR="91440" marT="27432" marB="27432">
+                  <a:tcPr marT="27432" marB="27432">
                     <a:solidFill>
                       <a:srgbClr val="FFFFFF"/>
                     </a:solidFill>
@@ -9047,7 +10105,7 @@
                       </a:r>
                     </a:p>
                   </a:txBody>
-                  <a:tcPr marL="91440" marR="91440" marT="27432" marB="27432">
+                  <a:tcPr marT="27432" marB="27432">
                     <a:solidFill>
                       <a:srgbClr val="FFFFFF"/>
                     </a:solidFill>
@@ -9070,7 +10128,7 @@
                       </a:r>
                     </a:p>
                   </a:txBody>
-                  <a:tcPr marL="91440" marR="91440" marT="27432" marB="27432">
+                  <a:tcPr marT="27432" marB="27432">
                     <a:solidFill>
                       <a:srgbClr val="FFFFFF"/>
                     </a:solidFill>
@@ -9093,7 +10151,7 @@
                       </a:r>
                     </a:p>
                   </a:txBody>
-                  <a:tcPr marL="91440" marR="91440" marT="27432" marB="27432">
+                  <a:tcPr marT="27432" marB="27432">
                     <a:solidFill>
                       <a:srgbClr val="FFFFFF"/>
                     </a:solidFill>
@@ -9116,12 +10174,17 @@
                       </a:r>
                     </a:p>
                   </a:txBody>
-                  <a:tcPr marL="91440" marR="91440" marT="27432" marB="27432">
+                  <a:tcPr marT="27432" marB="27432">
                     <a:solidFill>
                       <a:srgbClr val="FFFFFF"/>
                     </a:solidFill>
                   </a:tcPr>
                 </a:tc>
+                <a:extLst>
+                  <a:ext uri="{0D108BD9-81ED-4DB2-BD59-A6C34878D82A}">
+                    <a16:rowId xmlns:a16="http://schemas.microsoft.com/office/drawing/2014/main" val="10007"/>
+                  </a:ext>
+                </a:extLst>
               </a:tr>
               <a:tr h="329184">
                 <a:tc>
@@ -9141,7 +10204,7 @@
                       </a:r>
                     </a:p>
                   </a:txBody>
-                  <a:tcPr marL="91440" marR="91440" marT="27432" marB="27432">
+                  <a:tcPr marT="27432" marB="27432">
                     <a:solidFill>
                       <a:srgbClr val="FFFFFF"/>
                     </a:solidFill>
@@ -9164,7 +10227,7 @@
                       </a:r>
                     </a:p>
                   </a:txBody>
-                  <a:tcPr marL="91440" marR="91440" marT="27432" marB="27432">
+                  <a:tcPr marT="27432" marB="27432">
                     <a:solidFill>
                       <a:srgbClr val="FFFFFF"/>
                     </a:solidFill>
@@ -9187,7 +10250,7 @@
                       </a:r>
                     </a:p>
                   </a:txBody>
-                  <a:tcPr marL="91440" marR="91440" marT="27432" marB="27432">
+                  <a:tcPr marT="27432" marB="27432">
                     <a:solidFill>
                       <a:srgbClr val="FFFFFF"/>
                     </a:solidFill>
@@ -9210,7 +10273,7 @@
                       </a:r>
                     </a:p>
                   </a:txBody>
-                  <a:tcPr marL="91440" marR="91440" marT="27432" marB="27432">
+                  <a:tcPr marT="27432" marB="27432">
                     <a:solidFill>
                       <a:srgbClr val="FFFFFF"/>
                     </a:solidFill>
@@ -9233,7 +10296,7 @@
                       </a:r>
                     </a:p>
                   </a:txBody>
-                  <a:tcPr marL="91440" marR="91440" marT="27432" marB="27432">
+                  <a:tcPr marT="27432" marB="27432">
                     <a:solidFill>
                       <a:srgbClr val="FFFFFF"/>
                     </a:solidFill>
@@ -9256,12 +10319,17 @@
                       </a:r>
                     </a:p>
                   </a:txBody>
-                  <a:tcPr marL="91440" marR="91440" marT="27432" marB="27432">
+                  <a:tcPr marT="27432" marB="27432">
                     <a:solidFill>
                       <a:srgbClr val="FFFFFF"/>
                     </a:solidFill>
                   </a:tcPr>
                 </a:tc>
+                <a:extLst>
+                  <a:ext uri="{0D108BD9-81ED-4DB2-BD59-A6C34878D82A}">
+                    <a16:rowId xmlns:a16="http://schemas.microsoft.com/office/drawing/2014/main" val="10008"/>
+                  </a:ext>
+                </a:extLst>
               </a:tr>
               <a:tr h="329184">
                 <a:tc>
@@ -9281,7 +10349,7 @@
                       </a:r>
                     </a:p>
                   </a:txBody>
-                  <a:tcPr marL="91440" marR="91440" marT="27432" marB="27432">
+                  <a:tcPr marT="27432" marB="27432">
                     <a:solidFill>
                       <a:srgbClr val="FFFFFF"/>
                     </a:solidFill>
@@ -9304,7 +10372,7 @@
                       </a:r>
                     </a:p>
                   </a:txBody>
-                  <a:tcPr marL="91440" marR="91440" marT="27432" marB="27432">
+                  <a:tcPr marT="27432" marB="27432">
                     <a:solidFill>
                       <a:srgbClr val="FFFFFF"/>
                     </a:solidFill>
@@ -9327,7 +10395,7 @@
                       </a:r>
                     </a:p>
                   </a:txBody>
-                  <a:tcPr marL="91440" marR="91440" marT="27432" marB="27432">
+                  <a:tcPr marT="27432" marB="27432">
                     <a:solidFill>
                       <a:srgbClr val="FFFFFF"/>
                     </a:solidFill>
@@ -9350,7 +10418,7 @@
                       </a:r>
                     </a:p>
                   </a:txBody>
-                  <a:tcPr marL="91440" marR="91440" marT="27432" marB="27432">
+                  <a:tcPr marT="27432" marB="27432">
                     <a:solidFill>
                       <a:srgbClr val="FFFFFF"/>
                     </a:solidFill>
@@ -9373,7 +10441,7 @@
                       </a:r>
                     </a:p>
                   </a:txBody>
-                  <a:tcPr marL="91440" marR="91440" marT="27432" marB="27432">
+                  <a:tcPr marT="27432" marB="27432">
                     <a:solidFill>
                       <a:srgbClr val="FFFFFF"/>
                     </a:solidFill>
@@ -9396,12 +10464,17 @@
                       </a:r>
                     </a:p>
                   </a:txBody>
-                  <a:tcPr marL="91440" marR="91440" marT="27432" marB="27432">
+                  <a:tcPr marT="27432" marB="27432">
                     <a:solidFill>
                       <a:srgbClr val="FFFFFF"/>
                     </a:solidFill>
                   </a:tcPr>
                 </a:tc>
+                <a:extLst>
+                  <a:ext uri="{0D108BD9-81ED-4DB2-BD59-A6C34878D82A}">
+                    <a16:rowId xmlns:a16="http://schemas.microsoft.com/office/drawing/2014/main" val="10009"/>
+                  </a:ext>
+                </a:extLst>
               </a:tr>
               <a:tr h="329184">
                 <a:tc>
@@ -9421,7 +10494,7 @@
                       </a:r>
                     </a:p>
                   </a:txBody>
-                  <a:tcPr marL="91440" marR="91440" marT="27432" marB="27432">
+                  <a:tcPr marT="27432" marB="27432">
                     <a:solidFill>
                       <a:srgbClr val="FFFFFF"/>
                     </a:solidFill>
@@ -9444,7 +10517,7 @@
                       </a:r>
                     </a:p>
                   </a:txBody>
-                  <a:tcPr marL="91440" marR="91440" marT="27432" marB="27432">
+                  <a:tcPr marT="27432" marB="27432">
                     <a:solidFill>
                       <a:srgbClr val="FFFFFF"/>
                     </a:solidFill>
@@ -9467,7 +10540,7 @@
                       </a:r>
                     </a:p>
                   </a:txBody>
-                  <a:tcPr marL="91440" marR="91440" marT="27432" marB="27432">
+                  <a:tcPr marT="27432" marB="27432">
                     <a:solidFill>
                       <a:srgbClr val="FFFFFF"/>
                     </a:solidFill>
@@ -9490,7 +10563,7 @@
                       </a:r>
                     </a:p>
                   </a:txBody>
-                  <a:tcPr marL="91440" marR="91440" marT="27432" marB="27432">
+                  <a:tcPr marT="27432" marB="27432">
                     <a:solidFill>
                       <a:srgbClr val="FFFFFF"/>
                     </a:solidFill>
@@ -9513,7 +10586,7 @@
                       </a:r>
                     </a:p>
                   </a:txBody>
-                  <a:tcPr marL="91440" marR="91440" marT="27432" marB="27432">
+                  <a:tcPr marT="27432" marB="27432">
                     <a:solidFill>
                       <a:srgbClr val="FFFFFF"/>
                     </a:solidFill>
@@ -9536,12 +10609,17 @@
                       </a:r>
                     </a:p>
                   </a:txBody>
-                  <a:tcPr marL="91440" marR="91440" marT="27432" marB="27432">
+                  <a:tcPr marT="27432" marB="27432">
                     <a:solidFill>
                       <a:srgbClr val="FFFFFF"/>
                     </a:solidFill>
                   </a:tcPr>
                 </a:tc>
+                <a:extLst>
+                  <a:ext uri="{0D108BD9-81ED-4DB2-BD59-A6C34878D82A}">
+                    <a16:rowId xmlns:a16="http://schemas.microsoft.com/office/drawing/2014/main" val="10010"/>
+                  </a:ext>
+                </a:extLst>
               </a:tr>
               <a:tr h="329184">
                 <a:tc>
@@ -9561,7 +10639,7 @@
                       </a:r>
                     </a:p>
                   </a:txBody>
-                  <a:tcPr marL="91440" marR="91440" marT="27432" marB="27432">
+                  <a:tcPr marT="27432" marB="27432">
                     <a:solidFill>
                       <a:srgbClr val="FFFFFF"/>
                     </a:solidFill>
@@ -9584,7 +10662,7 @@
                       </a:r>
                     </a:p>
                   </a:txBody>
-                  <a:tcPr marL="91440" marR="91440" marT="27432" marB="27432">
+                  <a:tcPr marT="27432" marB="27432">
                     <a:solidFill>
                       <a:srgbClr val="FFFFFF"/>
                     </a:solidFill>
@@ -9607,7 +10685,7 @@
                       </a:r>
                     </a:p>
                   </a:txBody>
-                  <a:tcPr marL="91440" marR="91440" marT="27432" marB="27432">
+                  <a:tcPr marT="27432" marB="27432">
                     <a:solidFill>
                       <a:srgbClr val="FFFFFF"/>
                     </a:solidFill>
@@ -9630,7 +10708,7 @@
                       </a:r>
                     </a:p>
                   </a:txBody>
-                  <a:tcPr marL="91440" marR="91440" marT="27432" marB="27432">
+                  <a:tcPr marT="27432" marB="27432">
                     <a:solidFill>
                       <a:srgbClr val="FFFFFF"/>
                     </a:solidFill>
@@ -9653,7 +10731,7 @@
                       </a:r>
                     </a:p>
                   </a:txBody>
-                  <a:tcPr marL="91440" marR="91440" marT="27432" marB="27432">
+                  <a:tcPr marT="27432" marB="27432">
                     <a:solidFill>
                       <a:srgbClr val="FFFFFF"/>
                     </a:solidFill>
@@ -9676,12 +10754,17 @@
                       </a:r>
                     </a:p>
                   </a:txBody>
-                  <a:tcPr marL="91440" marR="91440" marT="27432" marB="27432">
+                  <a:tcPr marT="27432" marB="27432">
                     <a:solidFill>
                       <a:srgbClr val="FFFFFF"/>
                     </a:solidFill>
                   </a:tcPr>
                 </a:tc>
+                <a:extLst>
+                  <a:ext uri="{0D108BD9-81ED-4DB2-BD59-A6C34878D82A}">
+                    <a16:rowId xmlns:a16="http://schemas.microsoft.com/office/drawing/2014/main" val="10011"/>
+                  </a:ext>
+                </a:extLst>
               </a:tr>
               <a:tr h="329184">
                 <a:tc>
@@ -9701,7 +10784,7 @@
                       </a:r>
                     </a:p>
                   </a:txBody>
-                  <a:tcPr marL="91440" marR="91440" marT="27432" marB="27432">
+                  <a:tcPr marT="27432" marB="27432">
                     <a:solidFill>
                       <a:srgbClr val="FFFFFF"/>
                     </a:solidFill>
@@ -9724,7 +10807,7 @@
                       </a:r>
                     </a:p>
                   </a:txBody>
-                  <a:tcPr marL="91440" marR="91440" marT="27432" marB="27432">
+                  <a:tcPr marT="27432" marB="27432">
                     <a:solidFill>
                       <a:srgbClr val="FFFFFF"/>
                     </a:solidFill>
@@ -9747,7 +10830,7 @@
                       </a:r>
                     </a:p>
                   </a:txBody>
-                  <a:tcPr marL="91440" marR="91440" marT="27432" marB="27432">
+                  <a:tcPr marT="27432" marB="27432">
                     <a:solidFill>
                       <a:srgbClr val="FFFFFF"/>
                     </a:solidFill>
@@ -9770,7 +10853,7 @@
                       </a:r>
                     </a:p>
                   </a:txBody>
-                  <a:tcPr marL="91440" marR="91440" marT="27432" marB="27432">
+                  <a:tcPr marT="27432" marB="27432">
                     <a:solidFill>
                       <a:srgbClr val="FFFFFF"/>
                     </a:solidFill>
@@ -9793,7 +10876,7 @@
                       </a:r>
                     </a:p>
                   </a:txBody>
-                  <a:tcPr marL="91440" marR="91440" marT="27432" marB="27432">
+                  <a:tcPr marT="27432" marB="27432">
                     <a:solidFill>
                       <a:srgbClr val="FFFFFF"/>
                     </a:solidFill>
@@ -9816,12 +10899,17 @@
                       </a:r>
                     </a:p>
                   </a:txBody>
-                  <a:tcPr marL="91440" marR="91440" marT="27432" marB="27432">
+                  <a:tcPr marT="27432" marB="27432">
                     <a:solidFill>
                       <a:srgbClr val="FFFFFF"/>
                     </a:solidFill>
                   </a:tcPr>
                 </a:tc>
+                <a:extLst>
+                  <a:ext uri="{0D108BD9-81ED-4DB2-BD59-A6C34878D82A}">
+                    <a16:rowId xmlns:a16="http://schemas.microsoft.com/office/drawing/2014/main" val="10012"/>
+                  </a:ext>
+                </a:extLst>
               </a:tr>
             </a:tbl>
           </a:graphicData>
@@ -9844,7 +10932,7 @@
           <a:noFill/>
         </p:spPr>
         <p:txBody>
-          <a:bodyPr wrap="square" anchor="t" lIns="0" rIns="0" tIns="0" bIns="0">
+          <a:bodyPr wrap="square" lIns="0" tIns="0" rIns="0" bIns="0" anchor="t">
             <a:spAutoFit/>
           </a:bodyPr>
           <a:lstStyle/>
@@ -9883,7 +10971,7 @@
           <a:noFill/>
         </p:spPr>
         <p:txBody>
-          <a:bodyPr wrap="square" anchor="t" lIns="0" rIns="0" tIns="0" bIns="0">
+          <a:bodyPr wrap="square" lIns="0" tIns="0" rIns="0" bIns="0" anchor="t">
             <a:spAutoFit/>
           </a:bodyPr>
           <a:lstStyle/>
@@ -9910,7 +10998,7 @@
 </file>
 
 <file path=ppt/slides/slide21.xml><?xml version="1.0" encoding="utf-8"?>
-<p:sld xmlns:a="http://schemas.openxmlformats.org/drawingml/2006/main" xmlns:p="http://schemas.openxmlformats.org/presentationml/2006/main" xmlns:r="http://schemas.openxmlformats.org/officeDocument/2006/relationships">
+<p:sld xmlns:a="http://schemas.openxmlformats.org/drawingml/2006/main" xmlns:r="http://schemas.openxmlformats.org/officeDocument/2006/relationships" xmlns:p="http://schemas.openxmlformats.org/presentationml/2006/main">
   <p:cSld>
     <p:spTree>
       <p:nvGrpSpPr>
@@ -9918,7 +11006,14 @@
         <p:cNvGrpSpPr/>
         <p:nvPr/>
       </p:nvGrpSpPr>
-      <p:grpSpPr/>
+      <p:grpSpPr>
+        <a:xfrm>
+          <a:off x="0" y="0"/>
+          <a:ext cx="0" cy="0"/>
+          <a:chOff x="0" y="0"/>
+          <a:chExt cx="0" cy="0"/>
+        </a:xfrm>
+      </p:grpSpPr>
       <p:sp>
         <p:nvSpPr>
           <p:cNvPr id="2" name="TextBox 1"/>
@@ -9936,7 +11031,7 @@
           <a:noFill/>
         </p:spPr>
         <p:txBody>
-          <a:bodyPr wrap="square" anchor="t" lIns="0" rIns="0" tIns="0" bIns="0">
+          <a:bodyPr wrap="square" lIns="0" tIns="0" rIns="0" bIns="0" anchor="t">
             <a:spAutoFit/>
           </a:bodyPr>
           <a:lstStyle/>
@@ -9975,7 +11070,7 @@
           <a:noFill/>
         </p:spPr>
         <p:txBody>
-          <a:bodyPr wrap="square" anchor="t" lIns="0" rIns="0" tIns="0" bIns="0">
+          <a:bodyPr wrap="square" lIns="0" tIns="0" rIns="0" bIns="0" anchor="t">
             <a:spAutoFit/>
           </a:bodyPr>
           <a:lstStyle/>
@@ -10014,7 +11109,7 @@
           <a:noFill/>
         </p:spPr>
         <p:txBody>
-          <a:bodyPr wrap="square" anchor="t" lIns="0" rIns="0" tIns="0" bIns="0">
+          <a:bodyPr wrap="square" lIns="0" tIns="0" rIns="0" bIns="0" anchor="t">
             <a:spAutoFit/>
           </a:bodyPr>
           <a:lstStyle/>
@@ -10049,7 +11144,7 @@
           <a:noFill/>
         </p:spPr>
         <p:txBody>
-          <a:bodyPr wrap="square" anchor="t" lIns="0" rIns="0" tIns="0" bIns="0">
+          <a:bodyPr wrap="square" lIns="0" tIns="0" rIns="0" bIns="0" anchor="t">
             <a:spAutoFit/>
           </a:bodyPr>
           <a:lstStyle/>
@@ -10084,7 +11179,7 @@
           <a:noFill/>
         </p:spPr>
         <p:txBody>
-          <a:bodyPr wrap="square" anchor="t" lIns="0" rIns="0" tIns="0" bIns="0">
+          <a:bodyPr wrap="square" lIns="0" tIns="0" rIns="0" bIns="0" anchor="t">
             <a:spAutoFit/>
           </a:bodyPr>
           <a:lstStyle/>
@@ -10119,7 +11214,7 @@
           <a:noFill/>
         </p:spPr>
         <p:txBody>
-          <a:bodyPr wrap="square" anchor="t" lIns="0" rIns="0" tIns="0" bIns="0">
+          <a:bodyPr wrap="square" lIns="0" tIns="0" rIns="0" bIns="0" anchor="t">
             <a:spAutoFit/>
           </a:bodyPr>
           <a:lstStyle/>
@@ -10154,7 +11249,7 @@
           <a:noFill/>
         </p:spPr>
         <p:txBody>
-          <a:bodyPr wrap="square" anchor="t" lIns="0" rIns="0" tIns="0" bIns="0">
+          <a:bodyPr wrap="square" lIns="0" tIns="0" rIns="0" bIns="0" anchor="t">
             <a:spAutoFit/>
           </a:bodyPr>
           <a:lstStyle/>
@@ -10189,7 +11284,7 @@
           <a:noFill/>
         </p:spPr>
         <p:txBody>
-          <a:bodyPr wrap="square" anchor="t" lIns="0" rIns="0" tIns="0" bIns="0">
+          <a:bodyPr wrap="square" lIns="0" tIns="0" rIns="0" bIns="0" anchor="t">
             <a:spAutoFit/>
           </a:bodyPr>
           <a:lstStyle/>
@@ -10224,7 +11319,7 @@
           <a:noFill/>
         </p:spPr>
         <p:txBody>
-          <a:bodyPr wrap="square" anchor="t" lIns="0" rIns="0" tIns="0" bIns="0">
+          <a:bodyPr wrap="square" lIns="0" tIns="0" rIns="0" bIns="0" anchor="t">
             <a:spAutoFit/>
           </a:bodyPr>
           <a:lstStyle/>
@@ -10263,7 +11358,7 @@
           <a:noFill/>
         </p:spPr>
         <p:txBody>
-          <a:bodyPr wrap="square" anchor="t" lIns="0" rIns="0" tIns="0" bIns="0">
+          <a:bodyPr wrap="square" lIns="0" tIns="0" rIns="0" bIns="0" anchor="t">
             <a:spAutoFit/>
           </a:bodyPr>
           <a:lstStyle/>
@@ -10290,7 +11385,7 @@
 </file>
 
 <file path=ppt/slides/slide22.xml><?xml version="1.0" encoding="utf-8"?>
-<p:sld xmlns:a="http://schemas.openxmlformats.org/drawingml/2006/main" xmlns:p="http://schemas.openxmlformats.org/presentationml/2006/main" xmlns:r="http://schemas.openxmlformats.org/officeDocument/2006/relationships">
+<p:sld xmlns:a="http://schemas.openxmlformats.org/drawingml/2006/main" xmlns:r="http://schemas.openxmlformats.org/officeDocument/2006/relationships" xmlns:p="http://schemas.openxmlformats.org/presentationml/2006/main">
   <p:cSld>
     <p:spTree>
       <p:nvGrpSpPr>
@@ -10298,7 +11393,14 @@
         <p:cNvGrpSpPr/>
         <p:nvPr/>
       </p:nvGrpSpPr>
-      <p:grpSpPr/>
+      <p:grpSpPr>
+        <a:xfrm>
+          <a:off x="0" y="0"/>
+          <a:ext cx="0" cy="0"/>
+          <a:chOff x="0" y="0"/>
+          <a:chExt cx="0" cy="0"/>
+        </a:xfrm>
+      </p:grpSpPr>
       <p:sp>
         <p:nvSpPr>
           <p:cNvPr id="2" name="TextBox 1"/>
@@ -10316,7 +11418,7 @@
           <a:noFill/>
         </p:spPr>
         <p:txBody>
-          <a:bodyPr wrap="square" anchor="t" lIns="0" rIns="0" tIns="0" bIns="0">
+          <a:bodyPr wrap="square" lIns="0" tIns="0" rIns="0" bIns="0" anchor="t">
             <a:spAutoFit/>
           </a:bodyPr>
           <a:lstStyle/>
@@ -10355,7 +11457,7 @@
           <a:noFill/>
         </p:spPr>
         <p:txBody>
-          <a:bodyPr wrap="square" anchor="t" lIns="0" rIns="0" tIns="0" bIns="0">
+          <a:bodyPr wrap="square" lIns="0" tIns="0" rIns="0" bIns="0" anchor="t">
             <a:spAutoFit/>
           </a:bodyPr>
           <a:lstStyle/>
@@ -10391,7 +11493,7 @@
         </p:xfrm>
         <a:graphic>
           <a:graphicData uri="http://schemas.openxmlformats.org/drawingml/2006/chart">
-            <c:chart xmlns:c="http://schemas.openxmlformats.org/drawingml/2006/chart" r:id="rId2"/>
+            <c:chart xmlns:c="http://schemas.openxmlformats.org/drawingml/2006/chart" xmlns:r="http://schemas.openxmlformats.org/officeDocument/2006/relationships" r:id="rId2"/>
           </a:graphicData>
         </a:graphic>
       </p:graphicFrame>
@@ -10412,7 +11514,7 @@
           <a:noFill/>
         </p:spPr>
         <p:txBody>
-          <a:bodyPr wrap="square" anchor="t" lIns="0" rIns="0" tIns="0" bIns="0">
+          <a:bodyPr wrap="square" lIns="0" tIns="0" rIns="0" bIns="0" anchor="t">
             <a:spAutoFit/>
           </a:bodyPr>
           <a:lstStyle/>
@@ -10451,7 +11553,7 @@
           <a:noFill/>
         </p:spPr>
         <p:txBody>
-          <a:bodyPr wrap="square" anchor="t" lIns="0" rIns="0" tIns="0" bIns="0">
+          <a:bodyPr wrap="square" lIns="0" tIns="0" rIns="0" bIns="0" anchor="t">
             <a:spAutoFit/>
           </a:bodyPr>
           <a:lstStyle/>
@@ -10478,7 +11580,7 @@
 </file>
 
 <file path=ppt/slides/slide23.xml><?xml version="1.0" encoding="utf-8"?>
-<p:sld xmlns:a="http://schemas.openxmlformats.org/drawingml/2006/main" xmlns:p="http://schemas.openxmlformats.org/presentationml/2006/main" xmlns:r="http://schemas.openxmlformats.org/officeDocument/2006/relationships">
+<p:sld xmlns:a="http://schemas.openxmlformats.org/drawingml/2006/main" xmlns:r="http://schemas.openxmlformats.org/officeDocument/2006/relationships" xmlns:p="http://schemas.openxmlformats.org/presentationml/2006/main">
   <p:cSld>
     <p:spTree>
       <p:nvGrpSpPr>
@@ -10486,7 +11588,14 @@
         <p:cNvGrpSpPr/>
         <p:nvPr/>
       </p:nvGrpSpPr>
-      <p:grpSpPr/>
+      <p:grpSpPr>
+        <a:xfrm>
+          <a:off x="0" y="0"/>
+          <a:ext cx="0" cy="0"/>
+          <a:chOff x="0" y="0"/>
+          <a:chExt cx="0" cy="0"/>
+        </a:xfrm>
+      </p:grpSpPr>
       <p:sp>
         <p:nvSpPr>
           <p:cNvPr id="2" name="TextBox 1"/>
@@ -10504,7 +11613,7 @@
           <a:noFill/>
         </p:spPr>
         <p:txBody>
-          <a:bodyPr wrap="square" anchor="t" lIns="0" rIns="0" tIns="0" bIns="0">
+          <a:bodyPr wrap="square" lIns="0" tIns="0" rIns="0" bIns="0" anchor="t">
             <a:spAutoFit/>
           </a:bodyPr>
           <a:lstStyle/>
@@ -10543,7 +11652,7 @@
           <a:noFill/>
         </p:spPr>
         <p:txBody>
-          <a:bodyPr wrap="square" anchor="t" lIns="0" rIns="0" tIns="0" bIns="0">
+          <a:bodyPr wrap="square" lIns="0" tIns="0" rIns="0" bIns="0" anchor="t">
             <a:spAutoFit/>
           </a:bodyPr>
           <a:lstStyle/>
@@ -10578,7 +11687,7 @@
           <a:noFill/>
         </p:spPr>
         <p:txBody>
-          <a:bodyPr wrap="square" anchor="t" lIns="0" rIns="0" tIns="0" bIns="0">
+          <a:bodyPr wrap="square" lIns="0" tIns="0" rIns="0" bIns="0" anchor="t">
             <a:spAutoFit/>
           </a:bodyPr>
           <a:lstStyle/>
@@ -10613,7 +11722,7 @@
           <a:noFill/>
         </p:spPr>
         <p:txBody>
-          <a:bodyPr wrap="square" anchor="t" lIns="0" rIns="0" tIns="0" bIns="0">
+          <a:bodyPr wrap="square" lIns="0" tIns="0" rIns="0" bIns="0" anchor="t">
             <a:spAutoFit/>
           </a:bodyPr>
           <a:lstStyle/>
@@ -10652,7 +11761,7 @@
           <a:noFill/>
         </p:spPr>
         <p:txBody>
-          <a:bodyPr wrap="square" anchor="t" lIns="0" rIns="0" tIns="0" bIns="0">
+          <a:bodyPr wrap="square" lIns="0" tIns="0" rIns="0" bIns="0" anchor="t">
             <a:spAutoFit/>
           </a:bodyPr>
           <a:lstStyle/>
@@ -10687,7 +11796,7 @@
           <a:noFill/>
         </p:spPr>
         <p:txBody>
-          <a:bodyPr wrap="square" anchor="t" lIns="0" rIns="0" tIns="0" bIns="0">
+          <a:bodyPr wrap="square" lIns="0" tIns="0" rIns="0" bIns="0" anchor="t">
             <a:spAutoFit/>
           </a:bodyPr>
           <a:lstStyle/>
@@ -10722,7 +11831,7 @@
           <a:noFill/>
         </p:spPr>
         <p:txBody>
-          <a:bodyPr wrap="square" anchor="t" lIns="0" rIns="0" tIns="0" bIns="0">
+          <a:bodyPr wrap="square" lIns="0" tIns="0" rIns="0" bIns="0" anchor="t">
             <a:spAutoFit/>
           </a:bodyPr>
           <a:lstStyle/>
@@ -10761,7 +11870,7 @@
           <a:noFill/>
         </p:spPr>
         <p:txBody>
-          <a:bodyPr wrap="square" anchor="t" lIns="0" rIns="0" tIns="0" bIns="0">
+          <a:bodyPr wrap="square" lIns="0" tIns="0" rIns="0" bIns="0" anchor="t">
             <a:spAutoFit/>
           </a:bodyPr>
           <a:lstStyle/>
@@ -10796,7 +11905,7 @@
           <a:noFill/>
         </p:spPr>
         <p:txBody>
-          <a:bodyPr wrap="square" anchor="t" lIns="0" rIns="0" tIns="0" bIns="0">
+          <a:bodyPr wrap="square" lIns="0" tIns="0" rIns="0" bIns="0" anchor="t">
             <a:spAutoFit/>
           </a:bodyPr>
           <a:lstStyle/>
@@ -10831,7 +11940,7 @@
           <a:noFill/>
         </p:spPr>
         <p:txBody>
-          <a:bodyPr wrap="square" anchor="t" lIns="0" rIns="0" tIns="0" bIns="0">
+          <a:bodyPr wrap="square" lIns="0" tIns="0" rIns="0" bIns="0" anchor="t">
             <a:spAutoFit/>
           </a:bodyPr>
           <a:lstStyle/>
@@ -10870,7 +11979,7 @@
           <a:noFill/>
         </p:spPr>
         <p:txBody>
-          <a:bodyPr wrap="square" anchor="t" lIns="0" rIns="0" tIns="0" bIns="0">
+          <a:bodyPr wrap="square" lIns="0" tIns="0" rIns="0" bIns="0" anchor="t">
             <a:spAutoFit/>
           </a:bodyPr>
           <a:lstStyle/>
@@ -10905,7 +12014,7 @@
           <a:noFill/>
         </p:spPr>
         <p:txBody>
-          <a:bodyPr wrap="square" anchor="t" lIns="0" rIns="0" tIns="0" bIns="0">
+          <a:bodyPr wrap="square" lIns="0" tIns="0" rIns="0" bIns="0" anchor="t">
             <a:spAutoFit/>
           </a:bodyPr>
           <a:lstStyle/>
@@ -10940,7 +12049,7 @@
           <a:noFill/>
         </p:spPr>
         <p:txBody>
-          <a:bodyPr wrap="square" anchor="t" lIns="0" rIns="0" tIns="0" bIns="0">
+          <a:bodyPr wrap="square" lIns="0" tIns="0" rIns="0" bIns="0" anchor="t">
             <a:spAutoFit/>
           </a:bodyPr>
           <a:lstStyle/>
@@ -10979,7 +12088,7 @@
           <a:noFill/>
         </p:spPr>
         <p:txBody>
-          <a:bodyPr wrap="square" anchor="t" lIns="0" rIns="0" tIns="0" bIns="0">
+          <a:bodyPr wrap="square" lIns="0" tIns="0" rIns="0" bIns="0" anchor="t">
             <a:spAutoFit/>
           </a:bodyPr>
           <a:lstStyle/>
@@ -11014,7 +12123,7 @@
           <a:noFill/>
         </p:spPr>
         <p:txBody>
-          <a:bodyPr wrap="square" anchor="t" lIns="0" rIns="0" tIns="0" bIns="0">
+          <a:bodyPr wrap="square" lIns="0" tIns="0" rIns="0" bIns="0" anchor="t">
             <a:spAutoFit/>
           </a:bodyPr>
           <a:lstStyle/>
@@ -11049,7 +12158,7 @@
           <a:noFill/>
         </p:spPr>
         <p:txBody>
-          <a:bodyPr wrap="square" anchor="t" lIns="0" rIns="0" tIns="0" bIns="0">
+          <a:bodyPr wrap="square" lIns="0" tIns="0" rIns="0" bIns="0" anchor="t">
             <a:spAutoFit/>
           </a:bodyPr>
           <a:lstStyle/>
@@ -11088,7 +12197,7 @@
           <a:noFill/>
         </p:spPr>
         <p:txBody>
-          <a:bodyPr wrap="square" anchor="t" lIns="0" rIns="0" tIns="0" bIns="0">
+          <a:bodyPr wrap="square" lIns="0" tIns="0" rIns="0" bIns="0" anchor="t">
             <a:spAutoFit/>
           </a:bodyPr>
           <a:lstStyle/>
@@ -11115,7 +12224,7 @@
 </file>
 
 <file path=ppt/slides/slide24.xml><?xml version="1.0" encoding="utf-8"?>
-<p:sld xmlns:a="http://schemas.openxmlformats.org/drawingml/2006/main" xmlns:p="http://schemas.openxmlformats.org/presentationml/2006/main" xmlns:r="http://schemas.openxmlformats.org/officeDocument/2006/relationships">
+<p:sld xmlns:a="http://schemas.openxmlformats.org/drawingml/2006/main" xmlns:r="http://schemas.openxmlformats.org/officeDocument/2006/relationships" xmlns:p="http://schemas.openxmlformats.org/presentationml/2006/main">
   <p:cSld>
     <p:spTree>
       <p:nvGrpSpPr>
@@ -11123,7 +12232,14 @@
         <p:cNvGrpSpPr/>
         <p:nvPr/>
       </p:nvGrpSpPr>
-      <p:grpSpPr/>
+      <p:grpSpPr>
+        <a:xfrm>
+          <a:off x="0" y="0"/>
+          <a:ext cx="0" cy="0"/>
+          <a:chOff x="0" y="0"/>
+          <a:chExt cx="0" cy="0"/>
+        </a:xfrm>
+      </p:grpSpPr>
       <p:sp>
         <p:nvSpPr>
           <p:cNvPr id="2" name="Rectangle 1"/>
@@ -11164,6 +12280,7 @@
           <a:lstStyle/>
           <a:p>
             <a:pPr algn="ctr"/>
+            <a:endParaRPr/>
           </a:p>
         </p:txBody>
       </p:sp>
@@ -11184,7 +12301,7 @@
           <a:noFill/>
         </p:spPr>
         <p:txBody>
-          <a:bodyPr wrap="square" anchor="t" lIns="0" rIns="0" tIns="0" bIns="0">
+          <a:bodyPr wrap="square" lIns="0" tIns="0" rIns="0" bIns="0" anchor="t">
             <a:spAutoFit/>
           </a:bodyPr>
           <a:lstStyle/>
@@ -11219,7 +12336,7 @@
           <a:noFill/>
         </p:spPr>
         <p:txBody>
-          <a:bodyPr wrap="square" anchor="t" lIns="0" rIns="0" tIns="0" bIns="0">
+          <a:bodyPr wrap="square" lIns="0" tIns="0" rIns="0" bIns="0" anchor="t">
             <a:spAutoFit/>
           </a:bodyPr>
           <a:lstStyle/>
@@ -11254,7 +12371,7 @@
           <a:noFill/>
         </p:spPr>
         <p:txBody>
-          <a:bodyPr wrap="square" anchor="t" lIns="0" rIns="0" tIns="0" bIns="0">
+          <a:bodyPr wrap="square" lIns="0" tIns="0" rIns="0" bIns="0" anchor="t">
             <a:spAutoFit/>
           </a:bodyPr>
           <a:lstStyle/>
@@ -11289,7 +12406,7 @@
           <a:noFill/>
         </p:spPr>
         <p:txBody>
-          <a:bodyPr wrap="square" anchor="t" lIns="0" rIns="0" tIns="0" bIns="0">
+          <a:bodyPr wrap="square" lIns="0" tIns="0" rIns="0" bIns="0" anchor="t">
             <a:spAutoFit/>
           </a:bodyPr>
           <a:lstStyle/>
@@ -11324,7 +12441,7 @@
           <a:noFill/>
         </p:spPr>
         <p:txBody>
-          <a:bodyPr wrap="square" anchor="t" lIns="0" rIns="0" tIns="0" bIns="0">
+          <a:bodyPr wrap="square" lIns="0" tIns="0" rIns="0" bIns="0" anchor="t">
             <a:spAutoFit/>
           </a:bodyPr>
           <a:lstStyle/>
@@ -11351,7 +12468,7 @@
 </file>
 
 <file path=ppt/slides/slide3.xml><?xml version="1.0" encoding="utf-8"?>
-<p:sld xmlns:a="http://schemas.openxmlformats.org/drawingml/2006/main" xmlns:p="http://schemas.openxmlformats.org/presentationml/2006/main" xmlns:r="http://schemas.openxmlformats.org/officeDocument/2006/relationships">
+<p:sld xmlns:a="http://schemas.openxmlformats.org/drawingml/2006/main" xmlns:r="http://schemas.openxmlformats.org/officeDocument/2006/relationships" xmlns:p="http://schemas.openxmlformats.org/presentationml/2006/main">
   <p:cSld>
     <p:spTree>
       <p:nvGrpSpPr>
@@ -11359,7 +12476,14 @@
         <p:cNvGrpSpPr/>
         <p:nvPr/>
       </p:nvGrpSpPr>
-      <p:grpSpPr/>
+      <p:grpSpPr>
+        <a:xfrm>
+          <a:off x="0" y="0"/>
+          <a:ext cx="0" cy="0"/>
+          <a:chOff x="0" y="0"/>
+          <a:chExt cx="0" cy="0"/>
+        </a:xfrm>
+      </p:grpSpPr>
       <p:sp>
         <p:nvSpPr>
           <p:cNvPr id="2" name="TextBox 1"/>
@@ -11368,7 +12492,7 @@
         </p:nvSpPr>
         <p:spPr>
           <a:xfrm>
-            <a:off x="548640" y="365760"/>
+            <a:off x="548640" y="182880"/>
             <a:ext cx="11064240" cy="914400"/>
           </a:xfrm>
           <a:prstGeom prst="rect">
@@ -11377,7 +12501,7 @@
           <a:noFill/>
         </p:spPr>
         <p:txBody>
-          <a:bodyPr wrap="square" anchor="t" lIns="0" rIns="0" tIns="0" bIns="0">
+          <a:bodyPr wrap="square" lIns="0" tIns="0" rIns="0" bIns="0" anchor="t">
             <a:spAutoFit/>
           </a:bodyPr>
           <a:lstStyle/>
@@ -11407,8 +12531,8 @@
         </p:nvSpPr>
         <p:spPr>
           <a:xfrm>
-            <a:off x="548640" y="1188720"/>
-            <a:ext cx="5943600" cy="5303520"/>
+            <a:off x="495631" y="649357"/>
+            <a:ext cx="5943600" cy="5796523"/>
           </a:xfrm>
           <a:prstGeom prst="rect">
             <a:avLst/>
@@ -11416,7 +12540,7 @@
           <a:noFill/>
         </p:spPr>
         <p:txBody>
-          <a:bodyPr wrap="square" anchor="t" lIns="0" rIns="0" tIns="0" bIns="0">
+          <a:bodyPr wrap="square" lIns="0" tIns="0" rIns="0" bIns="0" anchor="t">
             <a:spAutoFit/>
           </a:bodyPr>
           <a:lstStyle/>
@@ -11430,7 +12554,7 @@
               </a:spcAft>
             </a:pPr>
             <a:r>
-              <a:rPr sz="6800" b="1" i="0">
+              <a:rPr sz="6800" b="1" i="0" dirty="0">
                 <a:solidFill>
                   <a:srgbClr val="000000"/>
                 </a:solidFill>
@@ -11449,13 +12573,94 @@
               </a:spcAft>
             </a:pPr>
             <a:r>
-              <a:rPr sz="1500" b="0" i="0">
+              <a:rPr sz="1500" b="0" i="0" dirty="0" err="1">
                 <a:solidFill>
                   <a:srgbClr val="707070"/>
                 </a:solidFill>
                 <a:latin typeface="Calibri"/>
               </a:rPr>
-              <a:t>ClinVar / OpenCRAVAT missense variants</a:t>
+              <a:t>ClinVar</a:t>
+            </a:r>
+            <a:r>
+              <a:rPr sz="1500" b="0" i="0" dirty="0">
+                <a:solidFill>
+                  <a:srgbClr val="707070"/>
+                </a:solidFill>
+                <a:latin typeface="Calibri"/>
+              </a:rPr>
+              <a:t> </a:t>
+            </a:r>
+            <a:r>
+              <a:rPr lang="tr-TR" sz="1500" b="0" i="0" dirty="0" err="1">
+                <a:solidFill>
+                  <a:srgbClr val="707070"/>
+                </a:solidFill>
+                <a:latin typeface="Calibri"/>
+              </a:rPr>
+              <a:t>found</a:t>
+            </a:r>
+            <a:r>
+              <a:rPr lang="tr-TR" sz="1500" b="0" i="0" dirty="0">
+                <a:solidFill>
+                  <a:srgbClr val="707070"/>
+                </a:solidFill>
+                <a:latin typeface="Calibri"/>
+              </a:rPr>
+              <a:t> -&gt;</a:t>
+            </a:r>
+            <a:r>
+              <a:rPr sz="1500" b="0" i="0" dirty="0">
+                <a:solidFill>
+                  <a:srgbClr val="707070"/>
+                </a:solidFill>
+                <a:latin typeface="Calibri"/>
+              </a:rPr>
+              <a:t> </a:t>
+            </a:r>
+            <a:r>
+              <a:rPr sz="1500" b="0" i="0" dirty="0" err="1">
+                <a:solidFill>
+                  <a:srgbClr val="707070"/>
+                </a:solidFill>
+                <a:latin typeface="Calibri"/>
+              </a:rPr>
+              <a:t>OpenCRAVAT</a:t>
+            </a:r>
+            <a:r>
+              <a:rPr sz="1500" b="0" i="0" dirty="0">
+                <a:solidFill>
+                  <a:srgbClr val="707070"/>
+                </a:solidFill>
+                <a:latin typeface="Calibri"/>
+              </a:rPr>
+              <a:t> </a:t>
+            </a:r>
+            <a:r>
+              <a:rPr lang="tr-TR" sz="1500" b="0" i="0" dirty="0" err="1">
+                <a:solidFill>
+                  <a:srgbClr val="707070"/>
+                </a:solidFill>
+                <a:latin typeface="Calibri"/>
+              </a:rPr>
+              <a:t>annotated</a:t>
+            </a:r>
+            <a:r>
+              <a:rPr lang="tr-TR" sz="1500" b="0" i="0" dirty="0">
+                <a:solidFill>
+                  <a:srgbClr val="707070"/>
+                </a:solidFill>
+                <a:latin typeface="Calibri"/>
+              </a:rPr>
+              <a:t> </a:t>
+            </a:r>
+            <a:r>
+              <a:rPr sz="1500" b="0" i="0" dirty="0">
+                <a:solidFill>
+                  <a:srgbClr val="707070"/>
+                </a:solidFill>
+                <a:latin typeface="Calibri"/>
+              </a:rPr>
+              <a:t>missense variants</a:t>
             </a:r>
           </a:p>
           <a:p>
@@ -11468,7 +12673,7 @@
               </a:spcAft>
             </a:pPr>
             <a:r>
-              <a:rPr sz="4200" b="1" i="0">
+              <a:rPr sz="4200" b="1" i="0" dirty="0">
                 <a:solidFill>
                   <a:srgbClr val="000000"/>
                 </a:solidFill>
@@ -11487,7 +12692,7 @@
               </a:spcAft>
             </a:pPr>
             <a:r>
-              <a:rPr sz="1500" b="0" i="0">
+              <a:rPr sz="1500" b="0" i="0" dirty="0">
                 <a:solidFill>
                   <a:srgbClr val="707070"/>
                 </a:solidFill>
@@ -11506,7 +12711,7 @@
               </a:spcAft>
             </a:pPr>
             <a:r>
-              <a:rPr sz="4200" b="1" i="0">
+              <a:rPr sz="4200" b="1" i="0" dirty="0">
                 <a:solidFill>
                   <a:srgbClr val="000000"/>
                 </a:solidFill>
@@ -11525,7 +12730,7 @@
               </a:spcAft>
             </a:pPr>
             <a:r>
-              <a:rPr sz="1500" b="0" i="0">
+              <a:rPr sz="1500" b="0" i="0" dirty="0">
                 <a:solidFill>
                   <a:srgbClr val="707070"/>
                 </a:solidFill>
@@ -11544,7 +12749,7 @@
               </a:spcAft>
             </a:pPr>
             <a:r>
-              <a:rPr sz="4200" b="1" i="0">
+              <a:rPr sz="4200" b="1" i="0" dirty="0">
                 <a:solidFill>
                   <a:srgbClr val="000000"/>
                 </a:solidFill>
@@ -11552,85 +12757,13 @@
               </a:rPr>
               <a:t>5,428</a:t>
             </a:r>
-          </a:p>
-          <a:p>
-            <a:pPr algn="l">
-              <a:lnSpc>
-                <a:spcPct val="115000"/>
-              </a:lnSpc>
-            </a:pPr>
-            <a:r>
-              <a:rPr sz="1500" b="0" i="0">
-                <a:solidFill>
-                  <a:srgbClr val="707070"/>
-                </a:solidFill>
-                <a:latin typeface="Calibri"/>
-              </a:rPr>
-              <a:t>strict-VUS rows in the curated pro-set</a:t>
-            </a:r>
-          </a:p>
-        </p:txBody>
-      </p:sp>
-      <p:sp>
-        <p:nvSpPr>
-          <p:cNvPr id="4" name="TextBox 3"/>
-          <p:cNvSpPr txBox="1"/>
-          <p:nvPr/>
-        </p:nvSpPr>
-        <p:spPr>
-          <a:xfrm>
-            <a:off x="6858000" y="1188720"/>
-            <a:ext cx="4937760" cy="365760"/>
-          </a:xfrm>
-          <a:prstGeom prst="rect">
-            <a:avLst/>
-          </a:prstGeom>
-          <a:noFill/>
-        </p:spPr>
-        <p:txBody>
-          <a:bodyPr wrap="square" anchor="t" lIns="0" rIns="0" tIns="0" bIns="0">
-            <a:spAutoFit/>
-          </a:bodyPr>
-          <a:lstStyle/>
-          <a:p>
-            <a:pPr algn="l">
-              <a:lnSpc>
-                <a:spcPct val="130000"/>
-              </a:lnSpc>
-            </a:pPr>
-            <a:r>
-              <a:rPr sz="1400" b="0" i="1">
-                <a:solidFill>
-                  <a:srgbClr val="707070"/>
-                </a:solidFill>
-                <a:latin typeface="Calibri"/>
-              </a:rPr>
-              <a:t>Four task definitions used in the project</a:t>
-            </a:r>
-          </a:p>
-        </p:txBody>
-      </p:sp>
-      <p:sp>
-        <p:nvSpPr>
-          <p:cNvPr id="5" name="TextBox 4"/>
-          <p:cNvSpPr txBox="1"/>
-          <p:nvPr/>
-        </p:nvSpPr>
-        <p:spPr>
-          <a:xfrm>
-            <a:off x="6858000" y="1645920"/>
-            <a:ext cx="4937760" cy="4754880"/>
-          </a:xfrm>
-          <a:prstGeom prst="rect">
-            <a:avLst/>
-          </a:prstGeom>
-          <a:noFill/>
-        </p:spPr>
-        <p:txBody>
-          <a:bodyPr wrap="square" anchor="t" lIns="0" rIns="0" tIns="0" bIns="0">
-            <a:spAutoFit/>
-          </a:bodyPr>
-          <a:lstStyle/>
+            <a:endParaRPr lang="tr-TR" sz="4200" b="1" dirty="0">
+              <a:solidFill>
+                <a:srgbClr val="000000"/>
+              </a:solidFill>
+              <a:latin typeface="Georgia"/>
+            </a:endParaRPr>
+          </a:p>
           <a:p>
             <a:pPr algn="l">
               <a:lnSpc>
@@ -11641,6 +12774,201 @@
               </a:spcAft>
             </a:pPr>
             <a:r>
+              <a:rPr sz="1500" b="0" i="0" dirty="0">
+                <a:solidFill>
+                  <a:srgbClr val="707070"/>
+                </a:solidFill>
+                <a:latin typeface="Calibri"/>
+              </a:rPr>
+              <a:t>V</a:t>
+            </a:r>
+            <a:r>
+              <a:rPr lang="tr-TR" sz="1500" b="0" i="0" dirty="0" err="1">
+                <a:solidFill>
+                  <a:srgbClr val="707070"/>
+                </a:solidFill>
+                <a:latin typeface="Calibri"/>
+              </a:rPr>
+              <a:t>ariants</a:t>
+            </a:r>
+            <a:r>
+              <a:rPr lang="tr-TR" sz="1500" b="0" i="0" dirty="0">
+                <a:solidFill>
+                  <a:srgbClr val="707070"/>
+                </a:solidFill>
+                <a:latin typeface="Calibri"/>
+              </a:rPr>
+              <a:t> of </a:t>
+            </a:r>
+            <a:r>
+              <a:rPr lang="tr-TR" sz="1500" dirty="0" err="1">
+                <a:solidFill>
+                  <a:srgbClr val="707070"/>
+                </a:solidFill>
+                <a:latin typeface="Calibri"/>
+              </a:rPr>
+              <a:t>unknown</a:t>
+            </a:r>
+            <a:r>
+              <a:rPr lang="tr-TR" sz="1500" dirty="0">
+                <a:solidFill>
+                  <a:srgbClr val="707070"/>
+                </a:solidFill>
+                <a:latin typeface="Calibri"/>
+              </a:rPr>
+              <a:t> </a:t>
+            </a:r>
+            <a:r>
+              <a:rPr lang="tr-TR" sz="1500" dirty="0" err="1">
+                <a:solidFill>
+                  <a:srgbClr val="707070"/>
+                </a:solidFill>
+                <a:latin typeface="Calibri"/>
+              </a:rPr>
+              <a:t>significance</a:t>
+            </a:r>
+            <a:r>
+              <a:rPr lang="tr-TR" sz="1500" dirty="0">
+                <a:solidFill>
+                  <a:srgbClr val="707070"/>
+                </a:solidFill>
+                <a:latin typeface="Calibri"/>
+              </a:rPr>
+              <a:t> (VUS)</a:t>
+            </a:r>
+            <a:r>
+              <a:rPr sz="1500" b="0" i="0" dirty="0">
+                <a:solidFill>
+                  <a:srgbClr val="707070"/>
+                </a:solidFill>
+                <a:latin typeface="Calibri"/>
+              </a:rPr>
+              <a:t> rows in the curated</a:t>
+            </a:r>
+            <a:r>
+              <a:rPr lang="tr-TR" sz="1500" dirty="0">
+                <a:solidFill>
+                  <a:srgbClr val="707070"/>
+                </a:solidFill>
+                <a:latin typeface="Calibri"/>
+              </a:rPr>
+              <a:t> </a:t>
+            </a:r>
+            <a:r>
+              <a:rPr lang="tr-TR" sz="1500" dirty="0" err="1">
+                <a:solidFill>
+                  <a:srgbClr val="707070"/>
+                </a:solidFill>
+                <a:latin typeface="Calibri"/>
+              </a:rPr>
+              <a:t>dataset</a:t>
+            </a:r>
+            <a:endParaRPr sz="1500" b="0" i="0" dirty="0">
+              <a:solidFill>
+                <a:srgbClr val="707070"/>
+              </a:solidFill>
+              <a:latin typeface="Calibri"/>
+            </a:endParaRPr>
+          </a:p>
+        </p:txBody>
+      </p:sp>
+      <p:sp>
+        <p:nvSpPr>
+          <p:cNvPr id="4" name="TextBox 3"/>
+          <p:cNvSpPr txBox="1"/>
+          <p:nvPr/>
+        </p:nvSpPr>
+        <p:spPr>
+          <a:xfrm>
+            <a:off x="6858000" y="1188720"/>
+            <a:ext cx="4937760" cy="257443"/>
+          </a:xfrm>
+          <a:prstGeom prst="rect">
+            <a:avLst/>
+          </a:prstGeom>
+          <a:noFill/>
+        </p:spPr>
+        <p:txBody>
+          <a:bodyPr wrap="square" lIns="0" tIns="0" rIns="0" bIns="0" anchor="t">
+            <a:spAutoFit/>
+          </a:bodyPr>
+          <a:lstStyle/>
+          <a:p>
+            <a:pPr algn="l">
+              <a:lnSpc>
+                <a:spcPct val="130000"/>
+              </a:lnSpc>
+            </a:pPr>
+            <a:r>
+              <a:rPr sz="1400" b="0" i="1" dirty="0">
+                <a:solidFill>
+                  <a:srgbClr val="707070"/>
+                </a:solidFill>
+                <a:latin typeface="Calibri"/>
+              </a:rPr>
+              <a:t>Four</a:t>
+            </a:r>
+            <a:r>
+              <a:rPr lang="tr-TR" sz="1400" b="0" i="1" dirty="0">
+                <a:solidFill>
+                  <a:srgbClr val="707070"/>
+                </a:solidFill>
+                <a:latin typeface="Calibri"/>
+              </a:rPr>
+              <a:t> </a:t>
+            </a:r>
+            <a:r>
+              <a:rPr lang="tr-TR" sz="1400" b="0" i="1" dirty="0" err="1">
+                <a:solidFill>
+                  <a:srgbClr val="707070"/>
+                </a:solidFill>
+                <a:latin typeface="Calibri"/>
+              </a:rPr>
+              <a:t>classification</a:t>
+            </a:r>
+            <a:r>
+              <a:rPr sz="1400" b="0" i="1" dirty="0">
+                <a:solidFill>
+                  <a:srgbClr val="707070"/>
+                </a:solidFill>
+                <a:latin typeface="Calibri"/>
+              </a:rPr>
+              <a:t> task definitions used in the project</a:t>
+            </a:r>
+          </a:p>
+        </p:txBody>
+      </p:sp>
+      <p:sp>
+        <p:nvSpPr>
+          <p:cNvPr id="5" name="TextBox 4"/>
+          <p:cNvSpPr txBox="1"/>
+          <p:nvPr/>
+        </p:nvSpPr>
+        <p:spPr>
+          <a:xfrm>
+            <a:off x="6858000" y="1645920"/>
+            <a:ext cx="4937760" cy="4754880"/>
+          </a:xfrm>
+          <a:prstGeom prst="rect">
+            <a:avLst/>
+          </a:prstGeom>
+          <a:noFill/>
+        </p:spPr>
+        <p:txBody>
+          <a:bodyPr wrap="square" lIns="0" tIns="0" rIns="0" bIns="0" anchor="t">
+            <a:spAutoFit/>
+          </a:bodyPr>
+          <a:lstStyle/>
+          <a:p>
+            <a:pPr algn="l">
+              <a:lnSpc>
+                <a:spcPct val="115000"/>
+              </a:lnSpc>
+              <a:spcAft>
+                <a:spcPts val="400"/>
+              </a:spcAft>
+            </a:pPr>
+            <a:r>
               <a:rPr sz="2200" b="1" i="0">
                 <a:solidFill>
                   <a:srgbClr val="000000"/>
@@ -11799,7 +13127,7 @@
           <a:noFill/>
         </p:spPr>
         <p:txBody>
-          <a:bodyPr wrap="square" anchor="t" lIns="0" rIns="0" tIns="0" bIns="0">
+          <a:bodyPr wrap="square" lIns="0" tIns="0" rIns="0" bIns="0" anchor="t">
             <a:spAutoFit/>
           </a:bodyPr>
           <a:lstStyle/>
@@ -11826,7 +13154,7 @@
 </file>
 
 <file path=ppt/slides/slide4.xml><?xml version="1.0" encoding="utf-8"?>
-<p:sld xmlns:a="http://schemas.openxmlformats.org/drawingml/2006/main" xmlns:p="http://schemas.openxmlformats.org/presentationml/2006/main" xmlns:r="http://schemas.openxmlformats.org/officeDocument/2006/relationships">
+<p:sld xmlns:a="http://schemas.openxmlformats.org/drawingml/2006/main" xmlns:r="http://schemas.openxmlformats.org/officeDocument/2006/relationships" xmlns:p="http://schemas.openxmlformats.org/presentationml/2006/main">
   <p:cSld>
     <p:spTree>
       <p:nvGrpSpPr>
@@ -11834,7 +13162,14 @@
         <p:cNvGrpSpPr/>
         <p:nvPr/>
       </p:nvGrpSpPr>
-      <p:grpSpPr/>
+      <p:grpSpPr>
+        <a:xfrm>
+          <a:off x="0" y="0"/>
+          <a:ext cx="0" cy="0"/>
+          <a:chOff x="0" y="0"/>
+          <a:chExt cx="0" cy="0"/>
+        </a:xfrm>
+      </p:grpSpPr>
       <p:sp>
         <p:nvSpPr>
           <p:cNvPr id="2" name="TextBox 1"/>
@@ -11852,7 +13187,7 @@
           <a:noFill/>
         </p:spPr>
         <p:txBody>
-          <a:bodyPr wrap="square" anchor="t" lIns="0" rIns="0" tIns="0" bIns="0">
+          <a:bodyPr wrap="square" lIns="0" tIns="0" rIns="0" bIns="0" anchor="t">
             <a:spAutoFit/>
           </a:bodyPr>
           <a:lstStyle/>
@@ -11891,7 +13226,7 @@
           <a:noFill/>
         </p:spPr>
         <p:txBody>
-          <a:bodyPr wrap="square" anchor="t" lIns="0" rIns="0" tIns="0" bIns="0">
+          <a:bodyPr wrap="square" lIns="0" tIns="0" rIns="0" bIns="0" anchor="t">
             <a:spAutoFit/>
           </a:bodyPr>
           <a:lstStyle/>
@@ -11954,7 +13289,7 @@
           <a:noFill/>
         </p:spPr>
         <p:txBody>
-          <a:bodyPr wrap="square" anchor="t" lIns="0" rIns="0" tIns="0" bIns="0">
+          <a:bodyPr wrap="square" lIns="0" tIns="0" rIns="0" bIns="0" anchor="t">
             <a:spAutoFit/>
           </a:bodyPr>
           <a:lstStyle/>
@@ -11981,7 +13316,7 @@
 </file>
 
 <file path=ppt/slides/slide5.xml><?xml version="1.0" encoding="utf-8"?>
-<p:sld xmlns:a="http://schemas.openxmlformats.org/drawingml/2006/main" xmlns:p="http://schemas.openxmlformats.org/presentationml/2006/main" xmlns:r="http://schemas.openxmlformats.org/officeDocument/2006/relationships">
+<p:sld xmlns:a="http://schemas.openxmlformats.org/drawingml/2006/main" xmlns:r="http://schemas.openxmlformats.org/officeDocument/2006/relationships" xmlns:p="http://schemas.openxmlformats.org/presentationml/2006/main">
   <p:cSld>
     <p:spTree>
       <p:nvGrpSpPr>
@@ -11989,7 +13324,14 @@
         <p:cNvGrpSpPr/>
         <p:nvPr/>
       </p:nvGrpSpPr>
-      <p:grpSpPr/>
+      <p:grpSpPr>
+        <a:xfrm>
+          <a:off x="0" y="0"/>
+          <a:ext cx="0" cy="0"/>
+          <a:chOff x="0" y="0"/>
+          <a:chExt cx="0" cy="0"/>
+        </a:xfrm>
+      </p:grpSpPr>
       <p:sp>
         <p:nvSpPr>
           <p:cNvPr id="2" name="TextBox 1"/>
@@ -12007,7 +13349,7 @@
           <a:noFill/>
         </p:spPr>
         <p:txBody>
-          <a:bodyPr wrap="square" anchor="t" lIns="0" rIns="0" tIns="0" bIns="0">
+          <a:bodyPr wrap="square" lIns="0" tIns="0" rIns="0" bIns="0" anchor="t">
             <a:spAutoFit/>
           </a:bodyPr>
           <a:lstStyle/>
@@ -12046,7 +13388,7 @@
           <a:noFill/>
         </p:spPr>
         <p:txBody>
-          <a:bodyPr wrap="square" anchor="t" lIns="0" rIns="0" tIns="0" bIns="0">
+          <a:bodyPr wrap="square" lIns="0" tIns="0" rIns="0" bIns="0" anchor="t">
             <a:spAutoFit/>
           </a:bodyPr>
           <a:lstStyle/>
@@ -12109,7 +13451,7 @@
           <a:noFill/>
         </p:spPr>
         <p:txBody>
-          <a:bodyPr wrap="square" anchor="t" lIns="0" rIns="0" tIns="0" bIns="0">
+          <a:bodyPr wrap="square" lIns="0" tIns="0" rIns="0" bIns="0" anchor="t">
             <a:spAutoFit/>
           </a:bodyPr>
           <a:lstStyle/>
@@ -12136,7 +13478,7 @@
 </file>
 
 <file path=ppt/slides/slide6.xml><?xml version="1.0" encoding="utf-8"?>
-<p:sld xmlns:a="http://schemas.openxmlformats.org/drawingml/2006/main" xmlns:p="http://schemas.openxmlformats.org/presentationml/2006/main" xmlns:r="http://schemas.openxmlformats.org/officeDocument/2006/relationships">
+<p:sld xmlns:a="http://schemas.openxmlformats.org/drawingml/2006/main" xmlns:r="http://schemas.openxmlformats.org/officeDocument/2006/relationships" xmlns:p="http://schemas.openxmlformats.org/presentationml/2006/main">
   <p:cSld>
     <p:spTree>
       <p:nvGrpSpPr>
@@ -12144,7 +13486,14 @@
         <p:cNvGrpSpPr/>
         <p:nvPr/>
       </p:nvGrpSpPr>
-      <p:grpSpPr/>
+      <p:grpSpPr>
+        <a:xfrm>
+          <a:off x="0" y="0"/>
+          <a:ext cx="0" cy="0"/>
+          <a:chOff x="0" y="0"/>
+          <a:chExt cx="0" cy="0"/>
+        </a:xfrm>
+      </p:grpSpPr>
       <p:sp>
         <p:nvSpPr>
           <p:cNvPr id="2" name="TextBox 1"/>
@@ -12162,7 +13511,7 @@
           <a:noFill/>
         </p:spPr>
         <p:txBody>
-          <a:bodyPr wrap="square" anchor="t" lIns="0" rIns="0" tIns="0" bIns="0">
+          <a:bodyPr wrap="square" lIns="0" tIns="0" rIns="0" bIns="0" anchor="t">
             <a:spAutoFit/>
           </a:bodyPr>
           <a:lstStyle/>
@@ -12201,7 +13550,7 @@
           <a:noFill/>
         </p:spPr>
         <p:txBody>
-          <a:bodyPr wrap="square" anchor="t" lIns="0" rIns="0" tIns="0" bIns="0">
+          <a:bodyPr wrap="square" lIns="0" tIns="0" rIns="0" bIns="0" anchor="t">
             <a:spAutoFit/>
           </a:bodyPr>
           <a:lstStyle/>
@@ -12264,7 +13613,7 @@
           <a:noFill/>
         </p:spPr>
         <p:txBody>
-          <a:bodyPr wrap="square" anchor="t" lIns="0" rIns="0" tIns="0" bIns="0">
+          <a:bodyPr wrap="square" lIns="0" tIns="0" rIns="0" bIns="0" anchor="t">
             <a:spAutoFit/>
           </a:bodyPr>
           <a:lstStyle/>
@@ -12291,7 +13640,7 @@
 </file>
 
 <file path=ppt/slides/slide7.xml><?xml version="1.0" encoding="utf-8"?>
-<p:sld xmlns:a="http://schemas.openxmlformats.org/drawingml/2006/main" xmlns:p="http://schemas.openxmlformats.org/presentationml/2006/main" xmlns:r="http://schemas.openxmlformats.org/officeDocument/2006/relationships">
+<p:sld xmlns:a="http://schemas.openxmlformats.org/drawingml/2006/main" xmlns:r="http://schemas.openxmlformats.org/officeDocument/2006/relationships" xmlns:p="http://schemas.openxmlformats.org/presentationml/2006/main">
   <p:cSld>
     <p:spTree>
       <p:nvGrpSpPr>
@@ -12299,7 +13648,14 @@
         <p:cNvGrpSpPr/>
         <p:nvPr/>
       </p:nvGrpSpPr>
-      <p:grpSpPr/>
+      <p:grpSpPr>
+        <a:xfrm>
+          <a:off x="0" y="0"/>
+          <a:ext cx="0" cy="0"/>
+          <a:chOff x="0" y="0"/>
+          <a:chExt cx="0" cy="0"/>
+        </a:xfrm>
+      </p:grpSpPr>
       <p:sp>
         <p:nvSpPr>
           <p:cNvPr id="2" name="TextBox 1"/>
@@ -12317,7 +13673,7 @@
           <a:noFill/>
         </p:spPr>
         <p:txBody>
-          <a:bodyPr wrap="square" anchor="t" lIns="0" rIns="0" tIns="0" bIns="0">
+          <a:bodyPr wrap="square" lIns="0" tIns="0" rIns="0" bIns="0" anchor="t">
             <a:spAutoFit/>
           </a:bodyPr>
           <a:lstStyle/>
@@ -12356,7 +13712,7 @@
           <a:noFill/>
         </p:spPr>
         <p:txBody>
-          <a:bodyPr wrap="square" anchor="t" lIns="0" rIns="0" tIns="0" bIns="0">
+          <a:bodyPr wrap="square" lIns="0" tIns="0" rIns="0" bIns="0" anchor="t">
             <a:spAutoFit/>
           </a:bodyPr>
           <a:lstStyle/>
@@ -12395,7 +13751,7 @@
           <a:noFill/>
         </p:spPr>
         <p:txBody>
-          <a:bodyPr wrap="square" anchor="t" lIns="0" rIns="0" tIns="0" bIns="0">
+          <a:bodyPr wrap="square" lIns="0" tIns="0" rIns="0" bIns="0" anchor="t">
             <a:spAutoFit/>
           </a:bodyPr>
           <a:lstStyle/>
@@ -12409,7 +13765,7 @@
               </a:spcAft>
             </a:pPr>
             <a:r>
-              <a:rPr sz="1800" b="1" i="0">
+              <a:rPr sz="1800" b="1" i="0" dirty="0">
                 <a:solidFill>
                   <a:srgbClr val="202020"/>
                 </a:solidFill>
@@ -12428,7 +13784,7 @@
               </a:spcAft>
             </a:pPr>
             <a:r>
-              <a:rPr sz="1500" b="0" i="0">
+              <a:rPr sz="1500" b="0" i="0" dirty="0">
                 <a:solidFill>
                   <a:srgbClr val="404040"/>
                 </a:solidFill>
@@ -12447,7 +13803,7 @@
               </a:spcAft>
             </a:pPr>
             <a:r>
-              <a:rPr sz="1500" b="0" i="0">
+              <a:rPr sz="1500" b="0" i="0" dirty="0" err="1">
                 <a:solidFill>
                   <a:srgbClr val="404040"/>
                 </a:solidFill>
@@ -12455,6 +13811,12 @@
               </a:rPr>
               <a:t>NearestCentroid</a:t>
             </a:r>
+            <a:endParaRPr sz="1500" b="0" i="0" dirty="0">
+              <a:solidFill>
+                <a:srgbClr val="404040"/>
+              </a:solidFill>
+              <a:latin typeface="Calibri"/>
+            </a:endParaRPr>
           </a:p>
           <a:p>
             <a:pPr algn="l">
@@ -12466,13 +13828,22 @@
               </a:spcAft>
             </a:pPr>
             <a:r>
-              <a:rPr sz="1500" b="0" i="0">
+              <a:rPr sz="1500" b="0" i="0" dirty="0" err="1">
                 <a:solidFill>
                   <a:srgbClr val="404040"/>
                 </a:solidFill>
                 <a:latin typeface="Calibri"/>
               </a:rPr>
-              <a:t>CosineSimilarity (custom)</a:t>
+              <a:t>CosineSimilarity</a:t>
+            </a:r>
+            <a:r>
+              <a:rPr sz="1500" b="0" i="0" dirty="0">
+                <a:solidFill>
+                  <a:srgbClr val="404040"/>
+                </a:solidFill>
+                <a:latin typeface="Calibri"/>
+              </a:rPr>
+              <a:t> (custom)</a:t>
             </a:r>
           </a:p>
           <a:p>
@@ -12485,7 +13856,7 @@
               </a:spcAft>
             </a:pPr>
             <a:r>
-              <a:rPr sz="1500" b="0" i="0">
+              <a:rPr sz="1500" b="0" i="0" dirty="0" err="1">
                 <a:solidFill>
                   <a:srgbClr val="404040"/>
                 </a:solidFill>
@@ -12493,6 +13864,12 @@
               </a:rPr>
               <a:t>DecisionTree</a:t>
             </a:r>
+            <a:endParaRPr sz="1500" b="0" i="0" dirty="0">
+              <a:solidFill>
+                <a:srgbClr val="404040"/>
+              </a:solidFill>
+              <a:latin typeface="Calibri"/>
+            </a:endParaRPr>
           </a:p>
           <a:p>
             <a:pPr algn="l">
@@ -12504,7 +13881,7 @@
               </a:spcAft>
             </a:pPr>
             <a:r>
-              <a:rPr sz="1500" b="0" i="0">
+              <a:rPr sz="1500" b="0" i="0" dirty="0">
                 <a:solidFill>
                   <a:srgbClr val="404040"/>
                 </a:solidFill>
@@ -12523,7 +13900,7 @@
               </a:spcAft>
             </a:pPr>
             <a:r>
-              <a:rPr sz="1500" b="0" i="0">
+              <a:rPr sz="1500" b="0" i="0" dirty="0">
                 <a:solidFill>
                   <a:srgbClr val="404040"/>
                 </a:solidFill>
@@ -12542,7 +13919,7 @@
               </a:spcAft>
             </a:pPr>
             <a:r>
-              <a:rPr sz="1500" b="0" i="0">
+              <a:rPr sz="1500" b="0" i="0" dirty="0" err="1">
                 <a:solidFill>
                   <a:srgbClr val="404040"/>
                 </a:solidFill>
@@ -12550,6 +13927,12 @@
               </a:rPr>
               <a:t>LinearSVC</a:t>
             </a:r>
+            <a:endParaRPr sz="1500" b="0" i="0" dirty="0">
+              <a:solidFill>
+                <a:srgbClr val="404040"/>
+              </a:solidFill>
+              <a:latin typeface="Calibri"/>
+            </a:endParaRPr>
           </a:p>
           <a:p>
             <a:pPr algn="l">
@@ -12561,7 +13944,7 @@
               </a:spcAft>
             </a:pPr>
             <a:r>
-              <a:rPr sz="1500" b="0" i="0">
+              <a:rPr sz="1500" b="0" i="0" dirty="0" err="1">
                 <a:solidFill>
                   <a:srgbClr val="404040"/>
                 </a:solidFill>
@@ -12569,6 +13952,12 @@
               </a:rPr>
               <a:t>RidgeClassifier</a:t>
             </a:r>
+            <a:endParaRPr sz="1500" b="0" i="0" dirty="0">
+              <a:solidFill>
+                <a:srgbClr val="404040"/>
+              </a:solidFill>
+              <a:latin typeface="Calibri"/>
+            </a:endParaRPr>
           </a:p>
           <a:p>
             <a:pPr algn="l">
@@ -12580,7 +13969,7 @@
               </a:spcAft>
             </a:pPr>
             <a:r>
-              <a:rPr sz="1500" b="0" i="0">
+              <a:rPr sz="1500" b="0" i="0" dirty="0" err="1">
                 <a:solidFill>
                   <a:srgbClr val="404040"/>
                 </a:solidFill>
@@ -12588,6 +13977,12 @@
               </a:rPr>
               <a:t>SGDClassifier</a:t>
             </a:r>
+            <a:endParaRPr sz="1500" b="0" i="0" dirty="0">
+              <a:solidFill>
+                <a:srgbClr val="404040"/>
+              </a:solidFill>
+              <a:latin typeface="Calibri"/>
+            </a:endParaRPr>
           </a:p>
           <a:p>
             <a:pPr algn="l">
@@ -12599,7 +13994,7 @@
               </a:spcAft>
             </a:pPr>
             <a:r>
-              <a:rPr sz="1500" b="0" i="0">
+              <a:rPr sz="1500" b="0" i="0" dirty="0">
                 <a:solidFill>
                   <a:srgbClr val="000000"/>
                 </a:solidFill>
@@ -12618,7 +14013,7 @@
               </a:spcAft>
             </a:pPr>
             <a:r>
-              <a:rPr sz="1800" b="1" i="0">
+              <a:rPr sz="1800" b="1" i="0" dirty="0">
                 <a:solidFill>
                   <a:srgbClr val="202020"/>
                 </a:solidFill>
@@ -12637,7 +14032,7 @@
               </a:spcAft>
             </a:pPr>
             <a:r>
-              <a:rPr sz="1500" b="0" i="0">
+              <a:rPr sz="1500" b="0" i="0" dirty="0" err="1">
                 <a:solidFill>
                   <a:srgbClr val="404040"/>
                 </a:solidFill>
@@ -12645,6 +14040,12 @@
               </a:rPr>
               <a:t>HistGradientBoosting</a:t>
             </a:r>
+            <a:endParaRPr sz="1500" b="0" i="0" dirty="0">
+              <a:solidFill>
+                <a:srgbClr val="404040"/>
+              </a:solidFill>
+              <a:latin typeface="Calibri"/>
+            </a:endParaRPr>
           </a:p>
         </p:txBody>
       </p:sp>
@@ -12665,7 +14066,7 @@
           <a:noFill/>
         </p:spPr>
         <p:txBody>
-          <a:bodyPr wrap="square" anchor="t" lIns="0" rIns="0" tIns="0" bIns="0">
+          <a:bodyPr wrap="square" lIns="0" tIns="0" rIns="0" bIns="0" anchor="t">
             <a:spAutoFit/>
           </a:bodyPr>
           <a:lstStyle/>
@@ -12704,7 +14105,7 @@
           <a:noFill/>
         </p:spPr>
         <p:txBody>
-          <a:bodyPr wrap="square" anchor="t" lIns="0" rIns="0" tIns="0" bIns="0">
+          <a:bodyPr wrap="square" lIns="0" tIns="0" rIns="0" bIns="0" anchor="t">
             <a:spAutoFit/>
           </a:bodyPr>
           <a:lstStyle/>
@@ -12739,7 +14140,7 @@
           <a:noFill/>
         </p:spPr>
         <p:txBody>
-          <a:bodyPr wrap="square" anchor="t" lIns="0" rIns="0" tIns="0" bIns="0">
+          <a:bodyPr wrap="square" lIns="0" tIns="0" rIns="0" bIns="0" anchor="t">
             <a:spAutoFit/>
           </a:bodyPr>
           <a:lstStyle/>
@@ -12778,7 +14179,7 @@
           <a:noFill/>
         </p:spPr>
         <p:txBody>
-          <a:bodyPr wrap="square" anchor="t" lIns="0" rIns="0" tIns="0" bIns="0">
+          <a:bodyPr wrap="square" lIns="0" tIns="0" rIns="0" bIns="0" anchor="t">
             <a:spAutoFit/>
           </a:bodyPr>
           <a:lstStyle/>
@@ -12813,7 +14214,7 @@
           <a:noFill/>
         </p:spPr>
         <p:txBody>
-          <a:bodyPr wrap="square" anchor="t" lIns="0" rIns="0" tIns="0" bIns="0">
+          <a:bodyPr wrap="square" lIns="0" tIns="0" rIns="0" bIns="0" anchor="t">
             <a:spAutoFit/>
           </a:bodyPr>
           <a:lstStyle/>
@@ -12852,7 +14253,7 @@
           <a:noFill/>
         </p:spPr>
         <p:txBody>
-          <a:bodyPr wrap="square" anchor="t" lIns="0" rIns="0" tIns="0" bIns="0">
+          <a:bodyPr wrap="square" lIns="0" tIns="0" rIns="0" bIns="0" anchor="t">
             <a:spAutoFit/>
           </a:bodyPr>
           <a:lstStyle/>
@@ -12887,7 +14288,7 @@
           <a:noFill/>
         </p:spPr>
         <p:txBody>
-          <a:bodyPr wrap="square" anchor="t" lIns="0" rIns="0" tIns="0" bIns="0">
+          <a:bodyPr wrap="square" lIns="0" tIns="0" rIns="0" bIns="0" anchor="t">
             <a:spAutoFit/>
           </a:bodyPr>
           <a:lstStyle/>
@@ -12926,7 +14327,7 @@
           <a:noFill/>
         </p:spPr>
         <p:txBody>
-          <a:bodyPr wrap="square" anchor="t" lIns="0" rIns="0" tIns="0" bIns="0">
+          <a:bodyPr wrap="square" lIns="0" tIns="0" rIns="0" bIns="0" anchor="t">
             <a:spAutoFit/>
           </a:bodyPr>
           <a:lstStyle/>
@@ -12961,7 +14362,7 @@
           <a:noFill/>
         </p:spPr>
         <p:txBody>
-          <a:bodyPr wrap="square" anchor="t" lIns="0" rIns="0" tIns="0" bIns="0">
+          <a:bodyPr wrap="square" lIns="0" tIns="0" rIns="0" bIns="0" anchor="t">
             <a:spAutoFit/>
           </a:bodyPr>
           <a:lstStyle/>
@@ -13000,7 +14401,7 @@
           <a:noFill/>
         </p:spPr>
         <p:txBody>
-          <a:bodyPr wrap="square" anchor="t" lIns="0" rIns="0" tIns="0" bIns="0">
+          <a:bodyPr wrap="square" lIns="0" tIns="0" rIns="0" bIns="0" anchor="t">
             <a:spAutoFit/>
           </a:bodyPr>
           <a:lstStyle/>
@@ -13035,7 +14436,7 @@
           <a:noFill/>
         </p:spPr>
         <p:txBody>
-          <a:bodyPr wrap="square" anchor="t" lIns="0" rIns="0" tIns="0" bIns="0">
+          <a:bodyPr wrap="square" lIns="0" tIns="0" rIns="0" bIns="0" anchor="t">
             <a:spAutoFit/>
           </a:bodyPr>
           <a:lstStyle/>
@@ -13074,7 +14475,7 @@
           <a:noFill/>
         </p:spPr>
         <p:txBody>
-          <a:bodyPr wrap="square" anchor="t" lIns="0" rIns="0" tIns="0" bIns="0">
+          <a:bodyPr wrap="square" lIns="0" tIns="0" rIns="0" bIns="0" anchor="t">
             <a:spAutoFit/>
           </a:bodyPr>
           <a:lstStyle/>
@@ -13113,7 +14514,7 @@
           <a:noFill/>
         </p:spPr>
         <p:txBody>
-          <a:bodyPr wrap="square" anchor="t" lIns="0" rIns="0" tIns="0" bIns="0">
+          <a:bodyPr wrap="square" lIns="0" tIns="0" rIns="0" bIns="0" anchor="t">
             <a:spAutoFit/>
           </a:bodyPr>
           <a:lstStyle/>
@@ -13140,7 +14541,7 @@
 </file>
 
 <file path=ppt/slides/slide8.xml><?xml version="1.0" encoding="utf-8"?>
-<p:sld xmlns:a="http://schemas.openxmlformats.org/drawingml/2006/main" xmlns:p="http://schemas.openxmlformats.org/presentationml/2006/main" xmlns:r="http://schemas.openxmlformats.org/officeDocument/2006/relationships">
+<p:sld xmlns:a="http://schemas.openxmlformats.org/drawingml/2006/main" xmlns:r="http://schemas.openxmlformats.org/officeDocument/2006/relationships" xmlns:p="http://schemas.openxmlformats.org/presentationml/2006/main">
   <p:cSld>
     <p:spTree>
       <p:nvGrpSpPr>
@@ -13148,7 +14549,14 @@
         <p:cNvGrpSpPr/>
         <p:nvPr/>
       </p:nvGrpSpPr>
-      <p:grpSpPr/>
+      <p:grpSpPr>
+        <a:xfrm>
+          <a:off x="0" y="0"/>
+          <a:ext cx="0" cy="0"/>
+          <a:chOff x="0" y="0"/>
+          <a:chExt cx="0" cy="0"/>
+        </a:xfrm>
+      </p:grpSpPr>
       <p:sp>
         <p:nvSpPr>
           <p:cNvPr id="2" name="TextBox 1"/>
@@ -13157,7 +14565,7 @@
         </p:nvSpPr>
         <p:spPr>
           <a:xfrm>
-            <a:off x="548640" y="365760"/>
+            <a:off x="548640" y="112633"/>
             <a:ext cx="11064240" cy="914400"/>
           </a:xfrm>
           <a:prstGeom prst="rect">
@@ -13166,7 +14574,7 @@
           <a:noFill/>
         </p:spPr>
         <p:txBody>
-          <a:bodyPr wrap="square" anchor="t" lIns="0" rIns="0" tIns="0" bIns="0">
+          <a:bodyPr wrap="square" lIns="0" tIns="0" rIns="0" bIns="0" anchor="t">
             <a:spAutoFit/>
           </a:bodyPr>
           <a:lstStyle/>
@@ -13177,7 +14585,7 @@
               </a:lnSpc>
             </a:pPr>
             <a:r>
-              <a:rPr sz="3200" b="1" i="0">
+              <a:rPr sz="3200" b="1" i="0" dirty="0">
                 <a:solidFill>
                   <a:srgbClr val="000000"/>
                 </a:solidFill>
@@ -13196,8 +14604,8 @@
         </p:nvSpPr>
         <p:spPr>
           <a:xfrm>
-            <a:off x="548640" y="1188720"/>
-            <a:ext cx="5029200" cy="274320"/>
+            <a:off x="548640" y="755660"/>
+            <a:ext cx="5029200" cy="230832"/>
           </a:xfrm>
           <a:prstGeom prst="rect">
             <a:avLst/>
@@ -13205,20 +14613,29 @@
           <a:noFill/>
         </p:spPr>
         <p:txBody>
-          <a:bodyPr wrap="square" anchor="t" lIns="0" rIns="0" tIns="0" bIns="0">
+          <a:bodyPr wrap="square" lIns="0" tIns="0" rIns="0" bIns="0" anchor="t">
             <a:spAutoFit/>
           </a:bodyPr>
           <a:lstStyle/>
           <a:p>
             <a:pPr algn="l"/>
             <a:r>
-              <a:rPr sz="1500" b="0" i="1">
+              <a:rPr lang="tr-TR" sz="1500" i="1" dirty="0">
                 <a:solidFill>
                   <a:srgbClr val="707070"/>
                 </a:solidFill>
                 <a:latin typeface="Calibri"/>
               </a:rPr>
-              <a:t>4-class macro-F1</a:t>
+              <a:t>5</a:t>
+            </a:r>
+            <a:r>
+              <a:rPr sz="1500" b="0" i="1" dirty="0">
+                <a:solidFill>
+                  <a:srgbClr val="707070"/>
+                </a:solidFill>
+                <a:latin typeface="Calibri"/>
+              </a:rPr>
+              <a:t>-class macro-F1</a:t>
             </a:r>
           </a:p>
         </p:txBody>
@@ -13231,8 +14648,8 @@
         </p:nvSpPr>
         <p:spPr>
           <a:xfrm>
-            <a:off x="548640" y="1554480"/>
-            <a:ext cx="5029200" cy="1554480"/>
+            <a:off x="579120" y="733916"/>
+            <a:ext cx="5029200" cy="1231106"/>
           </a:xfrm>
           <a:prstGeom prst="rect">
             <a:avLst/>
@@ -13240,21 +14657,36 @@
           <a:noFill/>
         </p:spPr>
         <p:txBody>
-          <a:bodyPr wrap="square" anchor="t" lIns="0" rIns="0" tIns="0" bIns="0">
+          <a:bodyPr wrap="square" lIns="0" tIns="0" rIns="0" bIns="0" anchor="t">
             <a:spAutoFit/>
           </a:bodyPr>
           <a:lstStyle/>
           <a:p>
             <a:pPr algn="l"/>
             <a:r>
-              <a:rPr sz="8000" b="1" i="0">
+              <a:rPr sz="8000" b="1" i="0" dirty="0">
                 <a:solidFill>
                   <a:srgbClr val="000000"/>
                 </a:solidFill>
                 <a:latin typeface="Georgia"/>
               </a:rPr>
-              <a:t>0.795</a:t>
-            </a:r>
+              <a:t>0.79</a:t>
+            </a:r>
+            <a:r>
+              <a:rPr lang="tr-TR" sz="8000" b="1" i="0" dirty="0">
+                <a:solidFill>
+                  <a:srgbClr val="000000"/>
+                </a:solidFill>
+                <a:latin typeface="Georgia"/>
+              </a:rPr>
+              <a:t>8</a:t>
+            </a:r>
+            <a:endParaRPr sz="8000" b="1" i="0" dirty="0">
+              <a:solidFill>
+                <a:srgbClr val="000000"/>
+              </a:solidFill>
+              <a:latin typeface="Georgia"/>
+            </a:endParaRPr>
           </a:p>
         </p:txBody>
       </p:sp>
@@ -13266,7 +14698,7 @@
         </p:nvSpPr>
         <p:spPr>
           <a:xfrm>
-            <a:off x="548640" y="3017520"/>
+            <a:off x="548640" y="2129492"/>
             <a:ext cx="5029200" cy="365760"/>
           </a:xfrm>
           <a:prstGeom prst="rect">
@@ -13275,20 +14707,29 @@
           <a:noFill/>
         </p:spPr>
         <p:txBody>
-          <a:bodyPr wrap="square" anchor="t" lIns="0" rIns="0" tIns="0" bIns="0">
+          <a:bodyPr wrap="square" lIns="0" tIns="0" rIns="0" bIns="0" anchor="t">
             <a:spAutoFit/>
           </a:bodyPr>
           <a:lstStyle/>
           <a:p>
             <a:pPr algn="l"/>
             <a:r>
-              <a:rPr sz="1300" b="0" i="0">
+              <a:rPr sz="1300" b="0" i="0" dirty="0" err="1">
                 <a:solidFill>
                   <a:srgbClr val="707070"/>
                 </a:solidFill>
                 <a:latin typeface="Calibri"/>
               </a:rPr>
-              <a:t>HistGradientBoosting · 21,872 variants · 208 features</a:t>
+              <a:t>HistGradientBoosting</a:t>
+            </a:r>
+            <a:r>
+              <a:rPr sz="1300" b="0" i="0" dirty="0">
+                <a:solidFill>
+                  <a:srgbClr val="707070"/>
+                </a:solidFill>
+                <a:latin typeface="Calibri"/>
+              </a:rPr>
+              <a:t> · 21,872 variants · 208 features</a:t>
             </a:r>
           </a:p>
         </p:txBody>
@@ -13301,7 +14742,7 @@
         </p:nvSpPr>
         <p:spPr>
           <a:xfrm>
-            <a:off x="6400800" y="1188720"/>
+            <a:off x="6400800" y="712172"/>
             <a:ext cx="5029200" cy="274320"/>
           </a:xfrm>
           <a:prstGeom prst="rect">
@@ -13310,14 +14751,14 @@
           <a:noFill/>
         </p:spPr>
         <p:txBody>
-          <a:bodyPr wrap="square" anchor="t" lIns="0" rIns="0" tIns="0" bIns="0">
+          <a:bodyPr wrap="square" lIns="0" tIns="0" rIns="0" bIns="0" anchor="t">
             <a:spAutoFit/>
           </a:bodyPr>
           <a:lstStyle/>
           <a:p>
             <a:pPr algn="l"/>
             <a:r>
-              <a:rPr sz="1500" b="0" i="1">
+              <a:rPr sz="1500" b="0" i="1" dirty="0">
                 <a:solidFill>
                   <a:srgbClr val="707070"/>
                 </a:solidFill>
@@ -13336,7 +14777,7 @@
         </p:nvSpPr>
         <p:spPr>
           <a:xfrm>
-            <a:off x="6400800" y="1554480"/>
+            <a:off x="6400800" y="777240"/>
             <a:ext cx="5029200" cy="1554480"/>
           </a:xfrm>
           <a:prstGeom prst="rect">
@@ -13345,14 +14786,14 @@
           <a:noFill/>
         </p:spPr>
         <p:txBody>
-          <a:bodyPr wrap="square" anchor="t" lIns="0" rIns="0" tIns="0" bIns="0">
+          <a:bodyPr wrap="square" lIns="0" tIns="0" rIns="0" bIns="0" anchor="t">
             <a:spAutoFit/>
           </a:bodyPr>
           <a:lstStyle/>
           <a:p>
             <a:pPr algn="l"/>
             <a:r>
-              <a:rPr sz="8000" b="1" i="0">
+              <a:rPr sz="8000" b="1" i="0" dirty="0">
                 <a:solidFill>
                   <a:srgbClr val="000000"/>
                 </a:solidFill>
@@ -13371,7 +14812,7 @@
         </p:nvSpPr>
         <p:spPr>
           <a:xfrm>
-            <a:off x="6400800" y="3017520"/>
+            <a:off x="6370320" y="2129492"/>
             <a:ext cx="5029200" cy="365760"/>
           </a:xfrm>
           <a:prstGeom prst="rect">
@@ -13380,7 +14821,7 @@
           <a:noFill/>
         </p:spPr>
         <p:txBody>
-          <a:bodyPr wrap="square" anchor="t" lIns="0" rIns="0" tIns="0" bIns="0">
+          <a:bodyPr wrap="square" lIns="0" tIns="0" rIns="0" bIns="0" anchor="t">
             <a:spAutoFit/>
           </a:bodyPr>
           <a:lstStyle/>
@@ -13404,15 +14845,21 @@
           <p:cNvGraphicFramePr>
             <a:graphicFrameLocks noGrp="1"/>
           </p:cNvGraphicFramePr>
-          <p:nvPr/>
+          <p:nvPr>
+            <p:extLst>
+              <p:ext uri="{D42A27DB-BD31-4B8C-83A1-F6EECF244321}">
+                <p14:modId xmlns:p14="http://schemas.microsoft.com/office/powerpoint/2010/main" val="2587659136"/>
+              </p:ext>
+            </p:extLst>
+          </p:nvPr>
         </p:nvGraphicFramePr>
         <p:xfrm>
-          <a:off x="548640" y="3474720"/>
+          <a:off x="495632" y="3840480"/>
           <a:ext cx="11064240" cy="2834640"/>
         </p:xfrm>
         <a:graphic>
           <a:graphicData uri="http://schemas.openxmlformats.org/drawingml/2006/chart">
-            <c:chart xmlns:c="http://schemas.openxmlformats.org/drawingml/2006/chart" r:id="rId2"/>
+            <c:chart xmlns:c="http://schemas.openxmlformats.org/drawingml/2006/chart" xmlns:r="http://schemas.openxmlformats.org/officeDocument/2006/relationships" r:id="rId2"/>
           </a:graphicData>
         </a:graphic>
       </p:graphicFrame>
@@ -13433,7 +14880,7 @@
           <a:noFill/>
         </p:spPr>
         <p:txBody>
-          <a:bodyPr wrap="square" anchor="t" lIns="0" rIns="0" tIns="0" bIns="0">
+          <a:bodyPr wrap="square" lIns="0" tIns="0" rIns="0" bIns="0" anchor="t">
             <a:spAutoFit/>
           </a:bodyPr>
           <a:lstStyle/>
@@ -13447,6 +14894,119 @@
                 <a:latin typeface="Calibri"/>
               </a:rPr>
               <a:t>8 / 24</a:t>
+            </a:r>
+          </a:p>
+        </p:txBody>
+      </p:sp>
+      <p:sp>
+        <p:nvSpPr>
+          <p:cNvPr id="12" name="TextBox 11">
+            <a:extLst>
+              <a:ext uri="{FF2B5EF4-FFF2-40B4-BE49-F238E27FC236}">
+                <a16:creationId xmlns:a16="http://schemas.microsoft.com/office/drawing/2014/main" id="{5501F97D-939B-6D84-D984-90B16D164D55}"/>
+              </a:ext>
+            </a:extLst>
+          </p:cNvPr>
+          <p:cNvSpPr txBox="1"/>
+          <p:nvPr/>
+        </p:nvSpPr>
+        <p:spPr>
+          <a:xfrm>
+            <a:off x="495632" y="2619226"/>
+            <a:ext cx="11064240" cy="482824"/>
+          </a:xfrm>
+          <a:prstGeom prst="rect">
+            <a:avLst/>
+          </a:prstGeom>
+          <a:noFill/>
+        </p:spPr>
+        <p:txBody>
+          <a:bodyPr wrap="square" lIns="0" tIns="0" rIns="0" bIns="0" anchor="t">
+            <a:spAutoFit/>
+          </a:bodyPr>
+          <a:lstStyle/>
+          <a:p>
+            <a:pPr algn="l">
+              <a:lnSpc>
+                <a:spcPct val="105000"/>
+              </a:lnSpc>
+            </a:pPr>
+            <a:r>
+              <a:rPr sz="3200" b="1" i="0" dirty="0">
+                <a:solidFill>
+                  <a:srgbClr val="000000"/>
+                </a:solidFill>
+                <a:latin typeface="Georgia"/>
+              </a:rPr>
+              <a:t>Per-model leaderboard — </a:t>
+            </a:r>
+            <a:r>
+              <a:rPr lang="tr-TR" sz="3200" b="1" i="0" dirty="0">
+                <a:solidFill>
+                  <a:srgbClr val="000000"/>
+                </a:solidFill>
+                <a:latin typeface="Georgia"/>
+              </a:rPr>
+              <a:t>4</a:t>
+            </a:r>
+            <a:r>
+              <a:rPr sz="3200" b="1" i="0" dirty="0">
+                <a:solidFill>
+                  <a:srgbClr val="000000"/>
+                </a:solidFill>
+                <a:latin typeface="Georgia"/>
+              </a:rPr>
+              <a:t>-class</a:t>
+            </a:r>
+          </a:p>
+        </p:txBody>
+      </p:sp>
+      <p:sp>
+        <p:nvSpPr>
+          <p:cNvPr id="13" name="TextBox 12">
+            <a:extLst>
+              <a:ext uri="{FF2B5EF4-FFF2-40B4-BE49-F238E27FC236}">
+                <a16:creationId xmlns:a16="http://schemas.microsoft.com/office/drawing/2014/main" id="{C0EB4BF7-725D-1A05-2485-E30D9ED31950}"/>
+              </a:ext>
+            </a:extLst>
+          </p:cNvPr>
+          <p:cNvSpPr txBox="1"/>
+          <p:nvPr/>
+        </p:nvSpPr>
+        <p:spPr>
+          <a:xfrm>
+            <a:off x="495632" y="3442186"/>
+            <a:ext cx="5029200" cy="230832"/>
+          </a:xfrm>
+          <a:prstGeom prst="rect">
+            <a:avLst/>
+          </a:prstGeom>
+          <a:noFill/>
+        </p:spPr>
+        <p:txBody>
+          <a:bodyPr wrap="square" lIns="0" tIns="0" rIns="0" bIns="0" anchor="t">
+            <a:spAutoFit/>
+          </a:bodyPr>
+          <a:lstStyle/>
+          <a:p>
+            <a:pPr algn="l"/>
+            <a:r>
+              <a:rPr lang="tr-TR" sz="1500" i="1" dirty="0">
+                <a:solidFill>
+                  <a:srgbClr val="707070"/>
+                </a:solidFill>
+                <a:latin typeface="Calibri"/>
+              </a:rPr>
+              <a:t>4</a:t>
+            </a:r>
+            <a:r>
+              <a:rPr sz="1500" b="0" i="1" dirty="0">
+                <a:solidFill>
+                  <a:srgbClr val="707070"/>
+                </a:solidFill>
+                <a:latin typeface="Calibri"/>
+              </a:rPr>
+              <a:t>-class macro-F1</a:t>
             </a:r>
           </a:p>
         </p:txBody>
@@ -13460,7 +15020,7 @@
 </file>
 
 <file path=ppt/slides/slide9.xml><?xml version="1.0" encoding="utf-8"?>
-<p:sld xmlns:a="http://schemas.openxmlformats.org/drawingml/2006/main" xmlns:p="http://schemas.openxmlformats.org/presentationml/2006/main" xmlns:r="http://schemas.openxmlformats.org/officeDocument/2006/relationships">
+<p:sld xmlns:a="http://schemas.openxmlformats.org/drawingml/2006/main" xmlns:r="http://schemas.openxmlformats.org/officeDocument/2006/relationships" xmlns:p="http://schemas.openxmlformats.org/presentationml/2006/main">
   <p:cSld>
     <p:spTree>
       <p:nvGrpSpPr>
@@ -13468,7 +15028,14 @@
         <p:cNvGrpSpPr/>
         <p:nvPr/>
       </p:nvGrpSpPr>
-      <p:grpSpPr/>
+      <p:grpSpPr>
+        <a:xfrm>
+          <a:off x="0" y="0"/>
+          <a:ext cx="0" cy="0"/>
+          <a:chOff x="0" y="0"/>
+          <a:chExt cx="0" cy="0"/>
+        </a:xfrm>
+      </p:grpSpPr>
       <p:sp>
         <p:nvSpPr>
           <p:cNvPr id="2" name="TextBox 1"/>
@@ -13486,7 +15053,7 @@
           <a:noFill/>
         </p:spPr>
         <p:txBody>
-          <a:bodyPr wrap="square" anchor="t" lIns="0" rIns="0" tIns="0" bIns="0">
+          <a:bodyPr wrap="square" lIns="0" tIns="0" rIns="0" bIns="0" anchor="t">
             <a:spAutoFit/>
           </a:bodyPr>
           <a:lstStyle/>
@@ -13497,7 +15064,7 @@
               </a:lnSpc>
             </a:pPr>
             <a:r>
-              <a:rPr sz="3200" b="1" i="0">
+              <a:rPr sz="3200" b="1" i="0" dirty="0">
                 <a:solidFill>
                   <a:srgbClr val="000000"/>
                 </a:solidFill>
@@ -13525,7 +15092,7 @@
           <a:noFill/>
         </p:spPr>
         <p:txBody>
-          <a:bodyPr wrap="square" anchor="t" lIns="0" rIns="0" tIns="0" bIns="0">
+          <a:bodyPr wrap="square" lIns="0" tIns="0" rIns="0" bIns="0" anchor="t">
             <a:spAutoFit/>
           </a:bodyPr>
           <a:lstStyle/>
@@ -13560,7 +15127,7 @@
           <a:noFill/>
         </p:spPr>
         <p:txBody>
-          <a:bodyPr wrap="square" anchor="t" lIns="0" rIns="0" tIns="0" bIns="0">
+          <a:bodyPr wrap="square" lIns="0" tIns="0" rIns="0" bIns="0" anchor="t">
             <a:spAutoFit/>
           </a:bodyPr>
           <a:lstStyle/>
@@ -13595,7 +15162,7 @@
           <a:noFill/>
         </p:spPr>
         <p:txBody>
-          <a:bodyPr wrap="square" anchor="t" lIns="0" rIns="0" tIns="0" bIns="0">
+          <a:bodyPr wrap="square" lIns="0" tIns="0" rIns="0" bIns="0" anchor="t">
             <a:spAutoFit/>
           </a:bodyPr>
           <a:lstStyle/>
@@ -13627,7 +15194,7 @@
         </p:xfrm>
         <a:graphic>
           <a:graphicData uri="http://schemas.openxmlformats.org/drawingml/2006/chart">
-            <c:chart xmlns:c="http://schemas.openxmlformats.org/drawingml/2006/chart" r:id="rId2"/>
+            <c:chart xmlns:c="http://schemas.openxmlformats.org/drawingml/2006/chart" xmlns:r="http://schemas.openxmlformats.org/officeDocument/2006/relationships" r:id="rId2"/>
           </a:graphicData>
         </a:graphic>
       </p:graphicFrame>
@@ -13648,7 +15215,7 @@
           <a:noFill/>
         </p:spPr>
         <p:txBody>
-          <a:bodyPr wrap="square" anchor="t" lIns="0" rIns="0" tIns="0" bIns="0">
+          <a:bodyPr wrap="square" lIns="0" tIns="0" rIns="0" bIns="0" anchor="t">
             <a:spAutoFit/>
           </a:bodyPr>
           <a:lstStyle/>
@@ -13992,4 +15559,319 @@
   </a:objectDefaults>
   <a:extraClrSchemeLst/>
 </a:theme>
+</file>
+
+<file path=ppt/theme/theme2.xml><?xml version="1.0" encoding="utf-8"?>
+<a:theme xmlns:a="http://schemas.openxmlformats.org/drawingml/2006/main" name="Office Theme">
+  <a:themeElements>
+    <a:clrScheme name="Office">
+      <a:dk1>
+        <a:sysClr val="windowText" lastClr="000000"/>
+      </a:dk1>
+      <a:lt1>
+        <a:sysClr val="window" lastClr="FFFFFF"/>
+      </a:lt1>
+      <a:dk2>
+        <a:srgbClr val="0E2841"/>
+      </a:dk2>
+      <a:lt2>
+        <a:srgbClr val="E8E8E8"/>
+      </a:lt2>
+      <a:accent1>
+        <a:srgbClr val="156082"/>
+      </a:accent1>
+      <a:accent2>
+        <a:srgbClr val="E97132"/>
+      </a:accent2>
+      <a:accent3>
+        <a:srgbClr val="196B24"/>
+      </a:accent3>
+      <a:accent4>
+        <a:srgbClr val="0F9ED5"/>
+      </a:accent4>
+      <a:accent5>
+        <a:srgbClr val="A02B93"/>
+      </a:accent5>
+      <a:accent6>
+        <a:srgbClr val="4EA72E"/>
+      </a:accent6>
+      <a:hlink>
+        <a:srgbClr val="467886"/>
+      </a:hlink>
+      <a:folHlink>
+        <a:srgbClr val="96607D"/>
+      </a:folHlink>
+    </a:clrScheme>
+    <a:fontScheme name="Office">
+      <a:majorFont>
+        <a:latin typeface="Aptos Display" panose="02110004020202020204"/>
+        <a:ea typeface=""/>
+        <a:cs typeface=""/>
+        <a:font script="Jpan" typeface="游ゴシック Light"/>
+        <a:font script="Hang" typeface="맑은 고딕"/>
+        <a:font script="Hans" typeface="等线 Light"/>
+        <a:font script="Hant" typeface="新細明體"/>
+        <a:font script="Arab" typeface="Times New Roman"/>
+        <a:font script="Hebr" typeface="Times New Roman"/>
+        <a:font script="Thai" typeface="Angsana New"/>
+        <a:font script="Ethi" typeface="Nyala"/>
+        <a:font script="Beng" typeface="Vrinda"/>
+        <a:font script="Gujr" typeface="Shruti"/>
+        <a:font script="Khmr" typeface="MoolBoran"/>
+        <a:font script="Knda" typeface="Tunga"/>
+        <a:font script="Guru" typeface="Raavi"/>
+        <a:font script="Cans" typeface="Euphemia"/>
+        <a:font script="Cher" typeface="Plantagenet Cherokee"/>
+        <a:font script="Yiii" typeface="Microsoft Yi Baiti"/>
+        <a:font script="Tibt" typeface="Microsoft Himalaya"/>
+        <a:font script="Thaa" typeface="MV Boli"/>
+        <a:font script="Deva" typeface="Mangal"/>
+        <a:font script="Telu" typeface="Gautami"/>
+        <a:font script="Taml" typeface="Latha"/>
+        <a:font script="Syrc" typeface="Estrangelo Edessa"/>
+        <a:font script="Orya" typeface="Kalinga"/>
+        <a:font script="Mlym" typeface="Kartika"/>
+        <a:font script="Laoo" typeface="DokChampa"/>
+        <a:font script="Sinh" typeface="Iskoola Pota"/>
+        <a:font script="Mong" typeface="Mongolian Baiti"/>
+        <a:font script="Viet" typeface="Times New Roman"/>
+        <a:font script="Uigh" typeface="Microsoft Uighur"/>
+        <a:font script="Geor" typeface="Sylfaen"/>
+        <a:font script="Armn" typeface="Arial"/>
+        <a:font script="Bugi" typeface="Leelawadee UI"/>
+        <a:font script="Bopo" typeface="Microsoft JhengHei"/>
+        <a:font script="Java" typeface="Javanese Text"/>
+        <a:font script="Lisu" typeface="Segoe UI"/>
+        <a:font script="Mymr" typeface="Myanmar Text"/>
+        <a:font script="Nkoo" typeface="Ebrima"/>
+        <a:font script="Olck" typeface="Nirmala UI"/>
+        <a:font script="Osma" typeface="Ebrima"/>
+        <a:font script="Phag" typeface="Phagspa"/>
+        <a:font script="Syrn" typeface="Estrangelo Edessa"/>
+        <a:font script="Syrj" typeface="Estrangelo Edessa"/>
+        <a:font script="Syre" typeface="Estrangelo Edessa"/>
+        <a:font script="Sora" typeface="Nirmala UI"/>
+        <a:font script="Tale" typeface="Microsoft Tai Le"/>
+        <a:font script="Talu" typeface="Microsoft New Tai Lue"/>
+        <a:font script="Tfng" typeface="Ebrima"/>
+      </a:majorFont>
+      <a:minorFont>
+        <a:latin typeface="Aptos" panose="02110004020202020204"/>
+        <a:ea typeface=""/>
+        <a:cs typeface=""/>
+        <a:font script="Jpan" typeface="游ゴシック"/>
+        <a:font script="Hang" typeface="맑은 고딕"/>
+        <a:font script="Hans" typeface="等线"/>
+        <a:font script="Hant" typeface="新細明體"/>
+        <a:font script="Arab" typeface="Arial"/>
+        <a:font script="Hebr" typeface="Arial"/>
+        <a:font script="Thai" typeface="Cordia New"/>
+        <a:font script="Ethi" typeface="Nyala"/>
+        <a:font script="Beng" typeface="Vrinda"/>
+        <a:font script="Gujr" typeface="Shruti"/>
+        <a:font script="Khmr" typeface="DaunPenh"/>
+        <a:font script="Knda" typeface="Tunga"/>
+        <a:font script="Guru" typeface="Raavi"/>
+        <a:font script="Cans" typeface="Euphemia"/>
+        <a:font script="Cher" typeface="Plantagenet Cherokee"/>
+        <a:font script="Yiii" typeface="Microsoft Yi Baiti"/>
+        <a:font script="Tibt" typeface="Microsoft Himalaya"/>
+        <a:font script="Thaa" typeface="MV Boli"/>
+        <a:font script="Deva" typeface="Mangal"/>
+        <a:font script="Telu" typeface="Gautami"/>
+        <a:font script="Taml" typeface="Latha"/>
+        <a:font script="Syrc" typeface="Estrangelo Edessa"/>
+        <a:font script="Orya" typeface="Kalinga"/>
+        <a:font script="Mlym" typeface="Kartika"/>
+        <a:font script="Laoo" typeface="DokChampa"/>
+        <a:font script="Sinh" typeface="Iskoola Pota"/>
+        <a:font script="Mong" typeface="Mongolian Baiti"/>
+        <a:font script="Viet" typeface="Arial"/>
+        <a:font script="Uigh" typeface="Microsoft Uighur"/>
+        <a:font script="Geor" typeface="Sylfaen"/>
+        <a:font script="Armn" typeface="Arial"/>
+        <a:font script="Bugi" typeface="Leelawadee UI"/>
+        <a:font script="Bopo" typeface="Microsoft JhengHei"/>
+        <a:font script="Java" typeface="Javanese Text"/>
+        <a:font script="Lisu" typeface="Segoe UI"/>
+        <a:font script="Mymr" typeface="Myanmar Text"/>
+        <a:font script="Nkoo" typeface="Ebrima"/>
+        <a:font script="Olck" typeface="Nirmala UI"/>
+        <a:font script="Osma" typeface="Ebrima"/>
+        <a:font script="Phag" typeface="Phagspa"/>
+        <a:font script="Syrn" typeface="Estrangelo Edessa"/>
+        <a:font script="Syrj" typeface="Estrangelo Edessa"/>
+        <a:font script="Syre" typeface="Estrangelo Edessa"/>
+        <a:font script="Sora" typeface="Nirmala UI"/>
+        <a:font script="Tale" typeface="Microsoft Tai Le"/>
+        <a:font script="Talu" typeface="Microsoft New Tai Lue"/>
+        <a:font script="Tfng" typeface="Ebrima"/>
+      </a:minorFont>
+    </a:fontScheme>
+    <a:fmtScheme name="Office">
+      <a:fillStyleLst>
+        <a:solidFill>
+          <a:schemeClr val="phClr"/>
+        </a:solidFill>
+        <a:gradFill rotWithShape="1">
+          <a:gsLst>
+            <a:gs pos="0">
+              <a:schemeClr val="phClr">
+                <a:lumMod val="110000"/>
+                <a:satMod val="105000"/>
+                <a:tint val="67000"/>
+              </a:schemeClr>
+            </a:gs>
+            <a:gs pos="50000">
+              <a:schemeClr val="phClr">
+                <a:lumMod val="105000"/>
+                <a:satMod val="103000"/>
+                <a:tint val="73000"/>
+              </a:schemeClr>
+            </a:gs>
+            <a:gs pos="100000">
+              <a:schemeClr val="phClr">
+                <a:lumMod val="105000"/>
+                <a:satMod val="109000"/>
+                <a:tint val="81000"/>
+              </a:schemeClr>
+            </a:gs>
+          </a:gsLst>
+          <a:lin ang="5400000" scaled="0"/>
+        </a:gradFill>
+        <a:gradFill rotWithShape="1">
+          <a:gsLst>
+            <a:gs pos="0">
+              <a:schemeClr val="phClr">
+                <a:satMod val="103000"/>
+                <a:lumMod val="102000"/>
+                <a:tint val="94000"/>
+              </a:schemeClr>
+            </a:gs>
+            <a:gs pos="50000">
+              <a:schemeClr val="phClr">
+                <a:satMod val="110000"/>
+                <a:lumMod val="100000"/>
+                <a:shade val="100000"/>
+              </a:schemeClr>
+            </a:gs>
+            <a:gs pos="100000">
+              <a:schemeClr val="phClr">
+                <a:lumMod val="99000"/>
+                <a:satMod val="120000"/>
+                <a:shade val="78000"/>
+              </a:schemeClr>
+            </a:gs>
+          </a:gsLst>
+          <a:lin ang="5400000" scaled="0"/>
+        </a:gradFill>
+      </a:fillStyleLst>
+      <a:lnStyleLst>
+        <a:ln w="12700" cap="flat" cmpd="sng" algn="ctr">
+          <a:solidFill>
+            <a:schemeClr val="phClr"/>
+          </a:solidFill>
+          <a:prstDash val="solid"/>
+          <a:miter lim="800000"/>
+        </a:ln>
+        <a:ln w="19050" cap="flat" cmpd="sng" algn="ctr">
+          <a:solidFill>
+            <a:schemeClr val="phClr"/>
+          </a:solidFill>
+          <a:prstDash val="solid"/>
+          <a:miter lim="800000"/>
+        </a:ln>
+        <a:ln w="25400" cap="flat" cmpd="sng" algn="ctr">
+          <a:solidFill>
+            <a:schemeClr val="phClr"/>
+          </a:solidFill>
+          <a:prstDash val="solid"/>
+          <a:miter lim="800000"/>
+        </a:ln>
+      </a:lnStyleLst>
+      <a:effectStyleLst>
+        <a:effectStyle>
+          <a:effectLst/>
+        </a:effectStyle>
+        <a:effectStyle>
+          <a:effectLst/>
+        </a:effectStyle>
+        <a:effectStyle>
+          <a:effectLst>
+            <a:outerShdw blurRad="57150" dist="19050" dir="5400000" algn="ctr" rotWithShape="0">
+              <a:srgbClr val="000000">
+                <a:alpha val="63000"/>
+              </a:srgbClr>
+            </a:outerShdw>
+          </a:effectLst>
+        </a:effectStyle>
+      </a:effectStyleLst>
+      <a:bgFillStyleLst>
+        <a:solidFill>
+          <a:schemeClr val="phClr"/>
+        </a:solidFill>
+        <a:solidFill>
+          <a:schemeClr val="phClr">
+            <a:tint val="95000"/>
+            <a:satMod val="170000"/>
+          </a:schemeClr>
+        </a:solidFill>
+        <a:gradFill rotWithShape="1">
+          <a:gsLst>
+            <a:gs pos="0">
+              <a:schemeClr val="phClr">
+                <a:tint val="93000"/>
+                <a:satMod val="150000"/>
+                <a:shade val="98000"/>
+                <a:lumMod val="102000"/>
+              </a:schemeClr>
+            </a:gs>
+            <a:gs pos="50000">
+              <a:schemeClr val="phClr">
+                <a:tint val="98000"/>
+                <a:satMod val="130000"/>
+                <a:shade val="90000"/>
+                <a:lumMod val="103000"/>
+              </a:schemeClr>
+            </a:gs>
+            <a:gs pos="100000">
+              <a:schemeClr val="phClr">
+                <a:shade val="63000"/>
+                <a:satMod val="120000"/>
+              </a:schemeClr>
+            </a:gs>
+          </a:gsLst>
+          <a:lin ang="5400000" scaled="0"/>
+        </a:gradFill>
+      </a:bgFillStyleLst>
+    </a:fmtScheme>
+  </a:themeElements>
+  <a:objectDefaults>
+    <a:lnDef>
+      <a:spPr/>
+      <a:bodyPr/>
+      <a:lstStyle/>
+      <a:style>
+        <a:lnRef idx="2">
+          <a:schemeClr val="accent1"/>
+        </a:lnRef>
+        <a:fillRef idx="0">
+          <a:schemeClr val="accent1"/>
+        </a:fillRef>
+        <a:effectRef idx="1">
+          <a:schemeClr val="accent1"/>
+        </a:effectRef>
+        <a:fontRef idx="minor">
+          <a:schemeClr val="tx1"/>
+        </a:fontRef>
+      </a:style>
+    </a:lnDef>
+  </a:objectDefaults>
+  <a:extraClrSchemeLst/>
+  <a:extLst>
+    <a:ext uri="{05A4C25C-085E-4340-85A3-A5531E510DB2}">
+      <thm15:themeFamily xmlns:thm15="http://schemas.microsoft.com/office/thememl/2012/main" name="Office Theme" id="{2E142A2C-CD16-42D6-873A-C26D2A0506FA}" vid="{1BDDFF52-6CD6-40A5-AB3C-68EB2F1E4D0A}"/>
+    </a:ext>
+  </a:extLst>
+</a:theme>
 </file>